--- a/templates/PPT_template/AI_Future_Template.pptx
+++ b/templates/PPT_template/AI_Future_Template.pptx
@@ -3112,16 +3112,16 @@
       <p:grpSpPr/>
       <p:sp>
         <p:nvSpPr>
-          <p:cNvPr id="2" name="Oval 1"/>
+          <p:cNvPr id="2" name="Rectangle 1"/>
           <p:cNvSpPr/>
           <p:nvPr/>
         </p:nvSpPr>
         <p:spPr>
           <a:xfrm>
-            <a:off x="8595360" y="-1463040"/>
-            <a:ext cx="4572000" cy="4572000"/>
-          </a:xfrm>
-          <a:prstGeom prst="ellipse">
+            <a:off x="0" y="0"/>
+            <a:ext cx="12191695" cy="91440"/>
+          </a:xfrm>
+          <a:prstGeom prst="rect">
             <a:avLst/>
           </a:prstGeom>
           <a:solidFill>
@@ -3162,8 +3162,8 @@
         </p:nvSpPr>
         <p:spPr>
           <a:xfrm>
-            <a:off x="0" y="0"/>
-            <a:ext cx="146304" cy="6858000"/>
+            <a:off x="914400" y="1737360"/>
+            <a:ext cx="10332720" cy="18288"/>
           </a:xfrm>
           <a:prstGeom prst="rect">
             <a:avLst/>
@@ -3200,14 +3200,58 @@
       </p:sp>
       <p:sp>
         <p:nvSpPr>
-          <p:cNvPr id="4" name="TextBox 3"/>
+          <p:cNvPr id="4" name="Rectangle 3"/>
+          <p:cNvSpPr/>
+          <p:nvPr/>
+        </p:nvSpPr>
+        <p:spPr>
+          <a:xfrm>
+            <a:off x="548640" y="5852160"/>
+            <a:ext cx="5486400" cy="18288"/>
+          </a:xfrm>
+          <a:prstGeom prst="rect">
+            <a:avLst/>
+          </a:prstGeom>
+          <a:solidFill>
+            <a:srgbClr val="D6E4FF"/>
+          </a:solidFill>
+          <a:ln>
+            <a:noFill/>
+          </a:ln>
+          <a:effectLst/>
+        </p:spPr>
+        <p:style>
+          <a:lnRef idx="1">
+            <a:schemeClr val="accent1"/>
+          </a:lnRef>
+          <a:fillRef idx="3">
+            <a:schemeClr val="accent1"/>
+          </a:fillRef>
+          <a:effectRef idx="2">
+            <a:schemeClr val="accent1"/>
+          </a:effectRef>
+          <a:fontRef idx="minor">
+            <a:schemeClr val="lt1"/>
+          </a:fontRef>
+        </p:style>
+        <p:txBody>
+          <a:bodyPr rtlCol="0" anchor="ctr"/>
+          <a:lstStyle/>
+          <a:p>
+            <a:pPr algn="ctr"/>
+          </a:p>
+        </p:txBody>
+      </p:sp>
+      <p:sp>
+        <p:nvSpPr>
+          <p:cNvPr id="5" name="TextBox 4"/>
           <p:cNvSpPr txBox="1"/>
           <p:nvPr/>
         </p:nvSpPr>
         <p:spPr>
           <a:xfrm>
-            <a:off x="868680" y="6263640"/>
-            <a:ext cx="5486400" cy="365760"/>
+            <a:off x="868680" y="6309360"/>
+            <a:ext cx="3657600" cy="365760"/>
           </a:xfrm>
           <a:prstGeom prst="rect">
             <a:avLst/>
@@ -3235,14 +3279,14 @@
       </p:sp>
       <p:sp>
         <p:nvSpPr>
-          <p:cNvPr id="5" name="TextBox 4"/>
+          <p:cNvPr id="6" name="TextBox 5"/>
           <p:cNvSpPr txBox="1"/>
           <p:nvPr/>
         </p:nvSpPr>
         <p:spPr>
           <a:xfrm>
-            <a:off x="914400" y="1828800"/>
-            <a:ext cx="10332720" cy="1737360"/>
+            <a:off x="914400" y="2286000"/>
+            <a:ext cx="10332720" cy="1554480"/>
           </a:xfrm>
           <a:prstGeom prst="rect">
             <a:avLst/>
@@ -3257,7 +3301,7 @@
           <a:p>
             <a:pPr algn="l"/>
             <a:r>
-              <a:rPr sz="4000" b="1" i="0">
+              <a:rPr sz="4200" b="1" i="0">
                 <a:solidFill>
                   <a:srgbClr val="FFFFFF"/>
                 </a:solidFill>
@@ -3270,14 +3314,14 @@
       </p:sp>
       <p:sp>
         <p:nvSpPr>
-          <p:cNvPr id="6" name="TextBox 5"/>
+          <p:cNvPr id="7" name="TextBox 6"/>
           <p:cNvSpPr txBox="1"/>
           <p:nvPr/>
         </p:nvSpPr>
         <p:spPr>
           <a:xfrm>
-            <a:off x="914400" y="3749039"/>
-            <a:ext cx="10332720" cy="822960"/>
+            <a:off x="914400" y="4023360"/>
+            <a:ext cx="10332720" cy="640080"/>
           </a:xfrm>
           <a:prstGeom prst="rect">
             <a:avLst/>
@@ -3294,7 +3338,7 @@
             <a:r>
               <a:rPr sz="2000" b="0" i="0">
                 <a:solidFill>
-                  <a:srgbClr val="FFFFFF"/>
+                  <a:srgbClr val="D6E4FF"/>
                 </a:solidFill>
                 <a:latin typeface="Microsoft YaHei"/>
               </a:rPr>
@@ -3338,7 +3382,7 @@
         <p:spPr>
           <a:xfrm>
             <a:off x="0" y="0"/>
-            <a:ext cx="118872" cy="6858000"/>
+            <a:ext cx="12191695" cy="109728"/>
           </a:xfrm>
           <a:prstGeom prst="rect">
             <a:avLst/>
@@ -3375,121 +3419,16 @@
       </p:sp>
       <p:sp>
         <p:nvSpPr>
-          <p:cNvPr id="3" name="TextBox 2"/>
-          <p:cNvSpPr txBox="1"/>
-          <p:nvPr/>
-        </p:nvSpPr>
-        <p:spPr>
-          <a:xfrm>
-            <a:off x="457200" y="6419088"/>
-            <a:ext cx="3657600" cy="274320"/>
-          </a:xfrm>
-          <a:prstGeom prst="rect">
-            <a:avLst/>
-          </a:prstGeom>
-          <a:noFill/>
-        </p:spPr>
-        <p:txBody>
-          <a:bodyPr wrap="none">
-            <a:spAutoFit/>
-          </a:bodyPr>
-          <a:lstStyle/>
-          <a:p>
-            <a:pPr algn="l"/>
-            <a:r>
-              <a:rPr sz="900" b="0">
-                <a:solidFill>
-                  <a:srgbClr val="5A6478"/>
-                </a:solidFill>
-                <a:latin typeface="Microsoft YaHei"/>
-              </a:rPr>
-              <a:t>LESSONFORGE 微课</a:t>
-            </a:r>
-          </a:p>
-        </p:txBody>
-      </p:sp>
-      <p:sp>
-        <p:nvSpPr>
-          <p:cNvPr id="4" name="TextBox 3"/>
-          <p:cNvSpPr txBox="1"/>
-          <p:nvPr/>
-        </p:nvSpPr>
-        <p:spPr>
-          <a:xfrm>
-            <a:off x="10607040" y="6419088"/>
-            <a:ext cx="1097280" cy="274320"/>
-          </a:xfrm>
-          <a:prstGeom prst="rect">
-            <a:avLst/>
-          </a:prstGeom>
-          <a:noFill/>
-        </p:spPr>
-        <p:txBody>
-          <a:bodyPr wrap="none">
-            <a:spAutoFit/>
-          </a:bodyPr>
-          <a:lstStyle/>
-          <a:p>
-            <a:pPr algn="r"/>
-            <a:r>
-              <a:rPr sz="1000" b="1">
-                <a:solidFill>
-                  <a:srgbClr val="5A6478"/>
-                </a:solidFill>
-                <a:latin typeface="Microsoft YaHei"/>
-              </a:rPr>
-              <a:t>10</a:t>
-            </a:r>
-          </a:p>
-        </p:txBody>
-      </p:sp>
-      <p:sp>
-        <p:nvSpPr>
-          <p:cNvPr id="5" name="TextBox 4"/>
-          <p:cNvSpPr txBox="1"/>
-          <p:nvPr/>
-        </p:nvSpPr>
-        <p:spPr>
-          <a:xfrm>
-            <a:off x="548640" y="457200"/>
-            <a:ext cx="11064240" cy="777240"/>
-          </a:xfrm>
-          <a:prstGeom prst="rect">
-            <a:avLst/>
-          </a:prstGeom>
-          <a:noFill/>
-        </p:spPr>
-        <p:txBody>
-          <a:bodyPr wrap="square" lIns="18288" rIns="18288" tIns="9144" bIns="9144" anchor="ctr">
-            <a:spAutoFit/>
-          </a:bodyPr>
-          <a:lstStyle/>
-          <a:p>
-            <a:pPr algn="l"/>
-            <a:r>
-              <a:rPr sz="2800" b="1" i="0">
-                <a:solidFill>
-                  <a:srgbClr val="0B3D91"/>
-                </a:solidFill>
-                <a:latin typeface="Microsoft YaHei"/>
-              </a:rPr>
-              <a:t/>
-            </a:r>
-          </a:p>
-        </p:txBody>
-      </p:sp>
-      <p:sp>
-        <p:nvSpPr>
-          <p:cNvPr id="6" name="Rectangle 5"/>
+          <p:cNvPr id="3" name="Oval 2"/>
           <p:cNvSpPr/>
           <p:nvPr/>
         </p:nvSpPr>
         <p:spPr>
           <a:xfrm>
-            <a:off x="566928" y="1298448"/>
-            <a:ext cx="1234440" cy="82296"/>
-          </a:xfrm>
-          <a:prstGeom prst="rect">
+            <a:off x="11521440" y="320040"/>
+            <a:ext cx="457200" cy="457200"/>
+          </a:xfrm>
+          <a:prstGeom prst="ellipse">
             <a:avLst/>
           </a:prstGeom>
           <a:solidFill>
@@ -3524,14 +3463,84 @@
       </p:sp>
       <p:sp>
         <p:nvSpPr>
-          <p:cNvPr id="7" name="TextBox 6"/>
+          <p:cNvPr id="4" name="TextBox 3"/>
           <p:cNvSpPr txBox="1"/>
           <p:nvPr/>
         </p:nvSpPr>
         <p:spPr>
           <a:xfrm>
-            <a:off x="594360" y="1691640"/>
-            <a:ext cx="2606040" cy="1051560"/>
+            <a:off x="457200" y="6419088"/>
+            <a:ext cx="3657600" cy="274320"/>
+          </a:xfrm>
+          <a:prstGeom prst="rect">
+            <a:avLst/>
+          </a:prstGeom>
+          <a:noFill/>
+        </p:spPr>
+        <p:txBody>
+          <a:bodyPr wrap="none">
+            <a:spAutoFit/>
+          </a:bodyPr>
+          <a:lstStyle/>
+          <a:p>
+            <a:pPr algn="l"/>
+            <a:r>
+              <a:rPr sz="900" b="0">
+                <a:solidFill>
+                  <a:srgbClr val="5A6478"/>
+                </a:solidFill>
+                <a:latin typeface="Microsoft YaHei"/>
+              </a:rPr>
+              <a:t>LESSONFORGE 微课</a:t>
+            </a:r>
+          </a:p>
+        </p:txBody>
+      </p:sp>
+      <p:sp>
+        <p:nvSpPr>
+          <p:cNvPr id="5" name="TextBox 4"/>
+          <p:cNvSpPr txBox="1"/>
+          <p:nvPr/>
+        </p:nvSpPr>
+        <p:spPr>
+          <a:xfrm>
+            <a:off x="10607040" y="6419088"/>
+            <a:ext cx="1097280" cy="274320"/>
+          </a:xfrm>
+          <a:prstGeom prst="rect">
+            <a:avLst/>
+          </a:prstGeom>
+          <a:noFill/>
+        </p:spPr>
+        <p:txBody>
+          <a:bodyPr wrap="none">
+            <a:spAutoFit/>
+          </a:bodyPr>
+          <a:lstStyle/>
+          <a:p>
+            <a:pPr algn="r"/>
+            <a:r>
+              <a:rPr sz="1000" b="1">
+                <a:solidFill>
+                  <a:srgbClr val="5A6478"/>
+                </a:solidFill>
+                <a:latin typeface="Microsoft YaHei"/>
+              </a:rPr>
+              <a:t>10</a:t>
+            </a:r>
+          </a:p>
+        </p:txBody>
+      </p:sp>
+      <p:sp>
+        <p:nvSpPr>
+          <p:cNvPr id="6" name="TextBox 5"/>
+          <p:cNvSpPr txBox="1"/>
+          <p:nvPr/>
+        </p:nvSpPr>
+        <p:spPr>
+          <a:xfrm>
+            <a:off x="640080" y="548640"/>
+            <a:ext cx="10607040" cy="731520"/>
           </a:xfrm>
           <a:prstGeom prst="rect">
             <a:avLst/>
@@ -3546,9 +3555,9 @@
           <a:p>
             <a:pPr algn="l"/>
             <a:r>
-              <a:rPr sz="1600" b="1" i="0">
-                <a:solidFill>
-                  <a:srgbClr val="0A0F1E"/>
+              <a:rPr sz="2800" b="1" i="0">
+                <a:solidFill>
+                  <a:srgbClr val="0B3D91"/>
                 </a:solidFill>
                 <a:latin typeface="Microsoft YaHei"/>
               </a:rPr>
@@ -3559,14 +3568,106 @@
       </p:sp>
       <p:sp>
         <p:nvSpPr>
-          <p:cNvPr id="8" name="TextBox 7"/>
+          <p:cNvPr id="7" name="Rectangle 6"/>
+          <p:cNvSpPr/>
+          <p:nvPr/>
+        </p:nvSpPr>
+        <p:spPr>
+          <a:xfrm>
+            <a:off x="667512" y="1353312"/>
+            <a:ext cx="1234440" cy="73152"/>
+          </a:xfrm>
+          <a:prstGeom prst="rect">
+            <a:avLst/>
+          </a:prstGeom>
+          <a:solidFill>
+            <a:srgbClr val="D6E4FF"/>
+          </a:solidFill>
+          <a:ln>
+            <a:noFill/>
+          </a:ln>
+          <a:effectLst/>
+        </p:spPr>
+        <p:style>
+          <a:lnRef idx="1">
+            <a:schemeClr val="accent1"/>
+          </a:lnRef>
+          <a:fillRef idx="3">
+            <a:schemeClr val="accent1"/>
+          </a:fillRef>
+          <a:effectRef idx="2">
+            <a:schemeClr val="accent1"/>
+          </a:effectRef>
+          <a:fontRef idx="minor">
+            <a:schemeClr val="lt1"/>
+          </a:fontRef>
+        </p:style>
+        <p:txBody>
+          <a:bodyPr rtlCol="0" anchor="ctr"/>
+          <a:lstStyle/>
+          <a:p>
+            <a:pPr algn="ctr"/>
+          </a:p>
+        </p:txBody>
+      </p:sp>
+      <p:sp>
+        <p:nvSpPr>
+          <p:cNvPr id="8" name="Rounded Rectangle 7"/>
+          <p:cNvSpPr/>
+          <p:nvPr/>
+        </p:nvSpPr>
+        <p:spPr>
+          <a:xfrm>
+            <a:off x="384047" y="1435608"/>
+            <a:ext cx="5861304" cy="2066543"/>
+          </a:xfrm>
+          <a:prstGeom prst="roundRect">
+            <a:avLst>
+              <a:gd name="adj" fmla="val 8000"/>
+            </a:avLst>
+          </a:prstGeom>
+          <a:solidFill>
+            <a:srgbClr val="EEF3FF"/>
+          </a:solidFill>
+          <a:ln w="9525">
+            <a:solidFill>
+              <a:srgbClr val="D6E4FF"/>
+            </a:solidFill>
+          </a:ln>
+          <a:effectLst/>
+        </p:spPr>
+        <p:style>
+          <a:lnRef idx="1">
+            <a:schemeClr val="accent1"/>
+          </a:lnRef>
+          <a:fillRef idx="3">
+            <a:schemeClr val="accent1"/>
+          </a:fillRef>
+          <a:effectRef idx="2">
+            <a:schemeClr val="accent1"/>
+          </a:effectRef>
+          <a:fontRef idx="minor">
+            <a:schemeClr val="lt1"/>
+          </a:fontRef>
+        </p:style>
+        <p:txBody>
+          <a:bodyPr rtlCol="0" anchor="ctr"/>
+          <a:lstStyle/>
+          <a:p>
+            <a:pPr algn="ctr"/>
+          </a:p>
+        </p:txBody>
+      </p:sp>
+      <p:sp>
+        <p:nvSpPr>
+          <p:cNvPr id="9" name="TextBox 8"/>
           <p:cNvSpPr txBox="1"/>
           <p:nvPr/>
         </p:nvSpPr>
         <p:spPr>
           <a:xfrm>
-            <a:off x="3429000" y="1691640"/>
-            <a:ext cx="2606040" cy="1051560"/>
+            <a:off x="640080" y="1691640"/>
+            <a:ext cx="5349240" cy="1554480"/>
           </a:xfrm>
           <a:prstGeom prst="rect">
             <a:avLst/>
@@ -3581,7 +3682,7 @@
           <a:p>
             <a:pPr algn="l"/>
             <a:r>
-              <a:rPr sz="1600" b="1" i="0">
+              <a:rPr sz="1600" b="0" i="0">
                 <a:solidFill>
                   <a:srgbClr val="0A0F1E"/>
                 </a:solidFill>
@@ -3594,14 +3695,62 @@
       </p:sp>
       <p:sp>
         <p:nvSpPr>
-          <p:cNvPr id="9" name="TextBox 8"/>
+          <p:cNvPr id="10" name="Rounded Rectangle 9"/>
+          <p:cNvSpPr/>
+          <p:nvPr/>
+        </p:nvSpPr>
+        <p:spPr>
+          <a:xfrm>
+            <a:off x="6053327" y="1435608"/>
+            <a:ext cx="5861304" cy="2066543"/>
+          </a:xfrm>
+          <a:prstGeom prst="roundRect">
+            <a:avLst>
+              <a:gd name="adj" fmla="val 8000"/>
+            </a:avLst>
+          </a:prstGeom>
+          <a:solidFill>
+            <a:srgbClr val="EEF3FF"/>
+          </a:solidFill>
+          <a:ln w="9525">
+            <a:solidFill>
+              <a:srgbClr val="D6E4FF"/>
+            </a:solidFill>
+          </a:ln>
+          <a:effectLst/>
+        </p:spPr>
+        <p:style>
+          <a:lnRef idx="1">
+            <a:schemeClr val="accent1"/>
+          </a:lnRef>
+          <a:fillRef idx="3">
+            <a:schemeClr val="accent1"/>
+          </a:fillRef>
+          <a:effectRef idx="2">
+            <a:schemeClr val="accent1"/>
+          </a:effectRef>
+          <a:fontRef idx="minor">
+            <a:schemeClr val="lt1"/>
+          </a:fontRef>
+        </p:style>
+        <p:txBody>
+          <a:bodyPr rtlCol="0" anchor="ctr"/>
+          <a:lstStyle/>
+          <a:p>
+            <a:pPr algn="ctr"/>
+          </a:p>
+        </p:txBody>
+      </p:sp>
+      <p:sp>
+        <p:nvSpPr>
+          <p:cNvPr id="11" name="TextBox 10"/>
           <p:cNvSpPr txBox="1"/>
           <p:nvPr/>
         </p:nvSpPr>
         <p:spPr>
           <a:xfrm>
-            <a:off x="6263640" y="1691640"/>
-            <a:ext cx="2606040" cy="1051560"/>
+            <a:off x="6309359" y="1691640"/>
+            <a:ext cx="5349240" cy="1554480"/>
           </a:xfrm>
           <a:prstGeom prst="rect">
             <a:avLst/>
@@ -3616,7 +3765,7 @@
           <a:p>
             <a:pPr algn="l"/>
             <a:r>
-              <a:rPr sz="1600" b="1" i="0">
+              <a:rPr sz="1600" b="0" i="0">
                 <a:solidFill>
                   <a:srgbClr val="0A0F1E"/>
                 </a:solidFill>
@@ -3629,14 +3778,62 @@
       </p:sp>
       <p:sp>
         <p:nvSpPr>
-          <p:cNvPr id="10" name="TextBox 9"/>
+          <p:cNvPr id="12" name="Rounded Rectangle 11"/>
+          <p:cNvSpPr/>
+          <p:nvPr/>
+        </p:nvSpPr>
+        <p:spPr>
+          <a:xfrm>
+            <a:off x="384047" y="3310128"/>
+            <a:ext cx="5861304" cy="2066543"/>
+          </a:xfrm>
+          <a:prstGeom prst="roundRect">
+            <a:avLst>
+              <a:gd name="adj" fmla="val 8000"/>
+            </a:avLst>
+          </a:prstGeom>
+          <a:solidFill>
+            <a:srgbClr val="EEF3FF"/>
+          </a:solidFill>
+          <a:ln w="9525">
+            <a:solidFill>
+              <a:srgbClr val="D6E4FF"/>
+            </a:solidFill>
+          </a:ln>
+          <a:effectLst/>
+        </p:spPr>
+        <p:style>
+          <a:lnRef idx="1">
+            <a:schemeClr val="accent1"/>
+          </a:lnRef>
+          <a:fillRef idx="3">
+            <a:schemeClr val="accent1"/>
+          </a:fillRef>
+          <a:effectRef idx="2">
+            <a:schemeClr val="accent1"/>
+          </a:effectRef>
+          <a:fontRef idx="minor">
+            <a:schemeClr val="lt1"/>
+          </a:fontRef>
+        </p:style>
+        <p:txBody>
+          <a:bodyPr rtlCol="0" anchor="ctr"/>
+          <a:lstStyle/>
+          <a:p>
+            <a:pPr algn="ctr"/>
+          </a:p>
+        </p:txBody>
+      </p:sp>
+      <p:sp>
+        <p:nvSpPr>
+          <p:cNvPr id="13" name="TextBox 12"/>
           <p:cNvSpPr txBox="1"/>
           <p:nvPr/>
         </p:nvSpPr>
         <p:spPr>
           <a:xfrm>
-            <a:off x="9098280" y="1691640"/>
-            <a:ext cx="2606040" cy="1051560"/>
+            <a:off x="640080" y="3566160"/>
+            <a:ext cx="5349240" cy="1554480"/>
           </a:xfrm>
           <a:prstGeom prst="rect">
             <a:avLst/>
@@ -3651,7 +3848,7 @@
           <a:p>
             <a:pPr algn="l"/>
             <a:r>
-              <a:rPr sz="1600" b="1" i="0">
+              <a:rPr sz="1600" b="0" i="0">
                 <a:solidFill>
                   <a:srgbClr val="0A0F1E"/>
                 </a:solidFill>
@@ -3664,14 +3861,62 @@
       </p:sp>
       <p:sp>
         <p:nvSpPr>
-          <p:cNvPr id="11" name="TextBox 10"/>
+          <p:cNvPr id="14" name="Rounded Rectangle 13"/>
+          <p:cNvSpPr/>
+          <p:nvPr/>
+        </p:nvSpPr>
+        <p:spPr>
+          <a:xfrm>
+            <a:off x="6053327" y="3310128"/>
+            <a:ext cx="5861304" cy="2066543"/>
+          </a:xfrm>
+          <a:prstGeom prst="roundRect">
+            <a:avLst>
+              <a:gd name="adj" fmla="val 8000"/>
+            </a:avLst>
+          </a:prstGeom>
+          <a:solidFill>
+            <a:srgbClr val="EEF3FF"/>
+          </a:solidFill>
+          <a:ln w="9525">
+            <a:solidFill>
+              <a:srgbClr val="D6E4FF"/>
+            </a:solidFill>
+          </a:ln>
+          <a:effectLst/>
+        </p:spPr>
+        <p:style>
+          <a:lnRef idx="1">
+            <a:schemeClr val="accent1"/>
+          </a:lnRef>
+          <a:fillRef idx="3">
+            <a:schemeClr val="accent1"/>
+          </a:fillRef>
+          <a:effectRef idx="2">
+            <a:schemeClr val="accent1"/>
+          </a:effectRef>
+          <a:fontRef idx="minor">
+            <a:schemeClr val="lt1"/>
+          </a:fontRef>
+        </p:style>
+        <p:txBody>
+          <a:bodyPr rtlCol="0" anchor="ctr"/>
+          <a:lstStyle/>
+          <a:p>
+            <a:pPr algn="ctr"/>
+          </a:p>
+        </p:txBody>
+      </p:sp>
+      <p:sp>
+        <p:nvSpPr>
+          <p:cNvPr id="15" name="TextBox 14"/>
           <p:cNvSpPr txBox="1"/>
           <p:nvPr/>
         </p:nvSpPr>
         <p:spPr>
           <a:xfrm>
-            <a:off x="594360" y="3108960"/>
-            <a:ext cx="2743200" cy="457200"/>
+            <a:off x="6309359" y="3566160"/>
+            <a:ext cx="5349240" cy="1554480"/>
           </a:xfrm>
           <a:prstGeom prst="rect">
             <a:avLst/>
@@ -3686,9 +3931,9 @@
           <a:p>
             <a:pPr algn="l"/>
             <a:r>
-              <a:rPr sz="1400" b="1" i="0">
-                <a:solidFill>
-                  <a:srgbClr val="0B3D91"/>
+              <a:rPr sz="1600" b="0" i="0">
+                <a:solidFill>
+                  <a:srgbClr val="0A0F1E"/>
                 </a:solidFill>
                 <a:latin typeface="Microsoft YaHei"/>
               </a:rPr>
@@ -3699,14 +3944,62 @@
       </p:sp>
       <p:sp>
         <p:nvSpPr>
-          <p:cNvPr id="12" name="TextBox 11"/>
+          <p:cNvPr id="16" name="Rounded Rectangle 15"/>
+          <p:cNvSpPr/>
+          <p:nvPr/>
+        </p:nvSpPr>
+        <p:spPr>
+          <a:xfrm>
+            <a:off x="384047" y="4636007"/>
+            <a:ext cx="11484864" cy="1335024"/>
+          </a:xfrm>
+          <a:prstGeom prst="roundRect">
+            <a:avLst>
+              <a:gd name="adj" fmla="val 8000"/>
+            </a:avLst>
+          </a:prstGeom>
+          <a:solidFill>
+            <a:srgbClr val="EEF3FF"/>
+          </a:solidFill>
+          <a:ln w="9525">
+            <a:solidFill>
+              <a:srgbClr val="D6E4FF"/>
+            </a:solidFill>
+          </a:ln>
+          <a:effectLst/>
+        </p:spPr>
+        <p:style>
+          <a:lnRef idx="1">
+            <a:schemeClr val="accent1"/>
+          </a:lnRef>
+          <a:fillRef idx="3">
+            <a:schemeClr val="accent1"/>
+          </a:fillRef>
+          <a:effectRef idx="2">
+            <a:schemeClr val="accent1"/>
+          </a:effectRef>
+          <a:fontRef idx="minor">
+            <a:schemeClr val="lt1"/>
+          </a:fontRef>
+        </p:style>
+        <p:txBody>
+          <a:bodyPr rtlCol="0" anchor="ctr"/>
+          <a:lstStyle/>
+          <a:p>
+            <a:pPr algn="ctr"/>
+          </a:p>
+        </p:txBody>
+      </p:sp>
+      <p:sp>
+        <p:nvSpPr>
+          <p:cNvPr id="17" name="TextBox 16"/>
           <p:cNvSpPr txBox="1"/>
           <p:nvPr/>
         </p:nvSpPr>
         <p:spPr>
           <a:xfrm>
-            <a:off x="594360" y="3657600"/>
-            <a:ext cx="10972800" cy="1097280"/>
+            <a:off x="640080" y="4892040"/>
+            <a:ext cx="10972800" cy="822960"/>
           </a:xfrm>
           <a:prstGeom prst="rect">
             <a:avLst/>
@@ -3767,7 +4060,7 @@
         <p:spPr>
           <a:xfrm>
             <a:off x="0" y="0"/>
-            <a:ext cx="118872" cy="6858000"/>
+            <a:ext cx="12191695" cy="109728"/>
           </a:xfrm>
           <a:prstGeom prst="rect">
             <a:avLst/>
@@ -3804,121 +4097,16 @@
       </p:sp>
       <p:sp>
         <p:nvSpPr>
-          <p:cNvPr id="3" name="TextBox 2"/>
-          <p:cNvSpPr txBox="1"/>
-          <p:nvPr/>
-        </p:nvSpPr>
-        <p:spPr>
-          <a:xfrm>
-            <a:off x="457200" y="6419088"/>
-            <a:ext cx="3657600" cy="274320"/>
-          </a:xfrm>
-          <a:prstGeom prst="rect">
-            <a:avLst/>
-          </a:prstGeom>
-          <a:noFill/>
-        </p:spPr>
-        <p:txBody>
-          <a:bodyPr wrap="none">
-            <a:spAutoFit/>
-          </a:bodyPr>
-          <a:lstStyle/>
-          <a:p>
-            <a:pPr algn="l"/>
-            <a:r>
-              <a:rPr sz="900" b="0">
-                <a:solidFill>
-                  <a:srgbClr val="5A6478"/>
-                </a:solidFill>
-                <a:latin typeface="Microsoft YaHei"/>
-              </a:rPr>
-              <a:t>LESSONFORGE 微课</a:t>
-            </a:r>
-          </a:p>
-        </p:txBody>
-      </p:sp>
-      <p:sp>
-        <p:nvSpPr>
-          <p:cNvPr id="4" name="TextBox 3"/>
-          <p:cNvSpPr txBox="1"/>
-          <p:nvPr/>
-        </p:nvSpPr>
-        <p:spPr>
-          <a:xfrm>
-            <a:off x="10607040" y="6419088"/>
-            <a:ext cx="1097280" cy="274320"/>
-          </a:xfrm>
-          <a:prstGeom prst="rect">
-            <a:avLst/>
-          </a:prstGeom>
-          <a:noFill/>
-        </p:spPr>
-        <p:txBody>
-          <a:bodyPr wrap="none">
-            <a:spAutoFit/>
-          </a:bodyPr>
-          <a:lstStyle/>
-          <a:p>
-            <a:pPr algn="r"/>
-            <a:r>
-              <a:rPr sz="1000" b="1">
-                <a:solidFill>
-                  <a:srgbClr val="5A6478"/>
-                </a:solidFill>
-                <a:latin typeface="Microsoft YaHei"/>
-              </a:rPr>
-              <a:t>11</a:t>
-            </a:r>
-          </a:p>
-        </p:txBody>
-      </p:sp>
-      <p:sp>
-        <p:nvSpPr>
-          <p:cNvPr id="5" name="TextBox 4"/>
-          <p:cNvSpPr txBox="1"/>
-          <p:nvPr/>
-        </p:nvSpPr>
-        <p:spPr>
-          <a:xfrm>
-            <a:off x="548640" y="457200"/>
-            <a:ext cx="11064240" cy="777240"/>
-          </a:xfrm>
-          <a:prstGeom prst="rect">
-            <a:avLst/>
-          </a:prstGeom>
-          <a:noFill/>
-        </p:spPr>
-        <p:txBody>
-          <a:bodyPr wrap="square" lIns="18288" rIns="18288" tIns="9144" bIns="9144" anchor="ctr">
-            <a:spAutoFit/>
-          </a:bodyPr>
-          <a:lstStyle/>
-          <a:p>
-            <a:pPr algn="l"/>
-            <a:r>
-              <a:rPr sz="2800" b="1" i="0">
-                <a:solidFill>
-                  <a:srgbClr val="0B3D91"/>
-                </a:solidFill>
-                <a:latin typeface="Microsoft YaHei"/>
-              </a:rPr>
-              <a:t/>
-            </a:r>
-          </a:p>
-        </p:txBody>
-      </p:sp>
-      <p:sp>
-        <p:nvSpPr>
-          <p:cNvPr id="6" name="Rectangle 5"/>
+          <p:cNvPr id="3" name="Oval 2"/>
           <p:cNvSpPr/>
           <p:nvPr/>
         </p:nvSpPr>
         <p:spPr>
           <a:xfrm>
-            <a:off x="566928" y="1298448"/>
-            <a:ext cx="1234440" cy="82296"/>
-          </a:xfrm>
-          <a:prstGeom prst="rect">
+            <a:off x="11521440" y="320040"/>
+            <a:ext cx="457200" cy="457200"/>
+          </a:xfrm>
+          <a:prstGeom prst="ellipse">
             <a:avLst/>
           </a:prstGeom>
           <a:solidFill>
@@ -3953,14 +4141,84 @@
       </p:sp>
       <p:sp>
         <p:nvSpPr>
-          <p:cNvPr id="7" name="TextBox 6"/>
+          <p:cNvPr id="4" name="TextBox 3"/>
           <p:cNvSpPr txBox="1"/>
           <p:nvPr/>
         </p:nvSpPr>
         <p:spPr>
           <a:xfrm>
-            <a:off x="594360" y="1783080"/>
-            <a:ext cx="10972800" cy="822960"/>
+            <a:off x="457200" y="6419088"/>
+            <a:ext cx="3657600" cy="274320"/>
+          </a:xfrm>
+          <a:prstGeom prst="rect">
+            <a:avLst/>
+          </a:prstGeom>
+          <a:noFill/>
+        </p:spPr>
+        <p:txBody>
+          <a:bodyPr wrap="none">
+            <a:spAutoFit/>
+          </a:bodyPr>
+          <a:lstStyle/>
+          <a:p>
+            <a:pPr algn="l"/>
+            <a:r>
+              <a:rPr sz="900" b="0">
+                <a:solidFill>
+                  <a:srgbClr val="5A6478"/>
+                </a:solidFill>
+                <a:latin typeface="Microsoft YaHei"/>
+              </a:rPr>
+              <a:t>LESSONFORGE 微课</a:t>
+            </a:r>
+          </a:p>
+        </p:txBody>
+      </p:sp>
+      <p:sp>
+        <p:nvSpPr>
+          <p:cNvPr id="5" name="TextBox 4"/>
+          <p:cNvSpPr txBox="1"/>
+          <p:nvPr/>
+        </p:nvSpPr>
+        <p:spPr>
+          <a:xfrm>
+            <a:off x="10607040" y="6419088"/>
+            <a:ext cx="1097280" cy="274320"/>
+          </a:xfrm>
+          <a:prstGeom prst="rect">
+            <a:avLst/>
+          </a:prstGeom>
+          <a:noFill/>
+        </p:spPr>
+        <p:txBody>
+          <a:bodyPr wrap="none">
+            <a:spAutoFit/>
+          </a:bodyPr>
+          <a:lstStyle/>
+          <a:p>
+            <a:pPr algn="r"/>
+            <a:r>
+              <a:rPr sz="1000" b="1">
+                <a:solidFill>
+                  <a:srgbClr val="5A6478"/>
+                </a:solidFill>
+                <a:latin typeface="Microsoft YaHei"/>
+              </a:rPr>
+              <a:t>11</a:t>
+            </a:r>
+          </a:p>
+        </p:txBody>
+      </p:sp>
+      <p:sp>
+        <p:nvSpPr>
+          <p:cNvPr id="6" name="TextBox 5"/>
+          <p:cNvSpPr txBox="1"/>
+          <p:nvPr/>
+        </p:nvSpPr>
+        <p:spPr>
+          <a:xfrm>
+            <a:off x="640080" y="548640"/>
+            <a:ext cx="10607040" cy="731520"/>
           </a:xfrm>
           <a:prstGeom prst="rect">
             <a:avLst/>
@@ -3975,7 +4233,7 @@
           <a:p>
             <a:pPr algn="l"/>
             <a:r>
-              <a:rPr sz="1800" b="1" i="0">
+              <a:rPr sz="2800" b="1" i="0">
                 <a:solidFill>
                   <a:srgbClr val="0B3D91"/>
                 </a:solidFill>
@@ -3988,13 +4246,105 @@
       </p:sp>
       <p:sp>
         <p:nvSpPr>
-          <p:cNvPr id="8" name="TextBox 7"/>
+          <p:cNvPr id="7" name="Rectangle 6"/>
+          <p:cNvSpPr/>
+          <p:nvPr/>
+        </p:nvSpPr>
+        <p:spPr>
+          <a:xfrm>
+            <a:off x="667512" y="1353312"/>
+            <a:ext cx="1234440" cy="73152"/>
+          </a:xfrm>
+          <a:prstGeom prst="rect">
+            <a:avLst/>
+          </a:prstGeom>
+          <a:solidFill>
+            <a:srgbClr val="D6E4FF"/>
+          </a:solidFill>
+          <a:ln>
+            <a:noFill/>
+          </a:ln>
+          <a:effectLst/>
+        </p:spPr>
+        <p:style>
+          <a:lnRef idx="1">
+            <a:schemeClr val="accent1"/>
+          </a:lnRef>
+          <a:fillRef idx="3">
+            <a:schemeClr val="accent1"/>
+          </a:fillRef>
+          <a:effectRef idx="2">
+            <a:schemeClr val="accent1"/>
+          </a:effectRef>
+          <a:fontRef idx="minor">
+            <a:schemeClr val="lt1"/>
+          </a:fontRef>
+        </p:style>
+        <p:txBody>
+          <a:bodyPr rtlCol="0" anchor="ctr"/>
+          <a:lstStyle/>
+          <a:p>
+            <a:pPr algn="ctr"/>
+          </a:p>
+        </p:txBody>
+      </p:sp>
+      <p:sp>
+        <p:nvSpPr>
+          <p:cNvPr id="8" name="Rounded Rectangle 7"/>
+          <p:cNvSpPr/>
+          <p:nvPr/>
+        </p:nvSpPr>
+        <p:spPr>
+          <a:xfrm>
+            <a:off x="384047" y="1435608"/>
+            <a:ext cx="11484864" cy="1289304"/>
+          </a:xfrm>
+          <a:prstGeom prst="roundRect">
+            <a:avLst>
+              <a:gd name="adj" fmla="val 8000"/>
+            </a:avLst>
+          </a:prstGeom>
+          <a:solidFill>
+            <a:srgbClr val="EEF3FF"/>
+          </a:solidFill>
+          <a:ln w="9525">
+            <a:solidFill>
+              <a:srgbClr val="D6E4FF"/>
+            </a:solidFill>
+          </a:ln>
+          <a:effectLst/>
+        </p:spPr>
+        <p:style>
+          <a:lnRef idx="1">
+            <a:schemeClr val="accent1"/>
+          </a:lnRef>
+          <a:fillRef idx="3">
+            <a:schemeClr val="accent1"/>
+          </a:fillRef>
+          <a:effectRef idx="2">
+            <a:schemeClr val="accent1"/>
+          </a:effectRef>
+          <a:fontRef idx="minor">
+            <a:schemeClr val="lt1"/>
+          </a:fontRef>
+        </p:style>
+        <p:txBody>
+          <a:bodyPr rtlCol="0" anchor="ctr"/>
+          <a:lstStyle/>
+          <a:p>
+            <a:pPr algn="ctr"/>
+          </a:p>
+        </p:txBody>
+      </p:sp>
+      <p:sp>
+        <p:nvSpPr>
+          <p:cNvPr id="9" name="TextBox 8"/>
           <p:cNvSpPr txBox="1"/>
           <p:nvPr/>
         </p:nvSpPr>
         <p:spPr>
           <a:xfrm>
-            <a:off x="594360" y="2880360"/>
+            <a:off x="640080" y="1691640"/>
             <a:ext cx="10972800" cy="777240"/>
           </a:xfrm>
           <a:prstGeom prst="rect">
@@ -4010,9 +4360,9 @@
           <a:p>
             <a:pPr algn="l"/>
             <a:r>
-              <a:rPr sz="1600" b="0" i="0">
-                <a:solidFill>
-                  <a:srgbClr val="0A0F1E"/>
+              <a:rPr sz="1800" b="1" i="0">
+                <a:solidFill>
+                  <a:srgbClr val="0B3D91"/>
                 </a:solidFill>
                 <a:latin typeface="Microsoft YaHei"/>
               </a:rPr>
@@ -4023,14 +4373,62 @@
       </p:sp>
       <p:sp>
         <p:nvSpPr>
-          <p:cNvPr id="9" name="TextBox 8"/>
+          <p:cNvPr id="10" name="Rounded Rectangle 9"/>
+          <p:cNvSpPr/>
+          <p:nvPr/>
+        </p:nvSpPr>
+        <p:spPr>
+          <a:xfrm>
+            <a:off x="384047" y="2487168"/>
+            <a:ext cx="5861304" cy="1975104"/>
+          </a:xfrm>
+          <a:prstGeom prst="roundRect">
+            <a:avLst>
+              <a:gd name="adj" fmla="val 8000"/>
+            </a:avLst>
+          </a:prstGeom>
+          <a:solidFill>
+            <a:srgbClr val="EEF3FF"/>
+          </a:solidFill>
+          <a:ln w="9525">
+            <a:solidFill>
+              <a:srgbClr val="D6E4FF"/>
+            </a:solidFill>
+          </a:ln>
+          <a:effectLst/>
+        </p:spPr>
+        <p:style>
+          <a:lnRef idx="1">
+            <a:schemeClr val="accent1"/>
+          </a:lnRef>
+          <a:fillRef idx="3">
+            <a:schemeClr val="accent1"/>
+          </a:fillRef>
+          <a:effectRef idx="2">
+            <a:schemeClr val="accent1"/>
+          </a:effectRef>
+          <a:fontRef idx="minor">
+            <a:schemeClr val="lt1"/>
+          </a:fontRef>
+        </p:style>
+        <p:txBody>
+          <a:bodyPr rtlCol="0" anchor="ctr"/>
+          <a:lstStyle/>
+          <a:p>
+            <a:pPr algn="ctr"/>
+          </a:p>
+        </p:txBody>
+      </p:sp>
+      <p:sp>
+        <p:nvSpPr>
+          <p:cNvPr id="11" name="TextBox 10"/>
           <p:cNvSpPr txBox="1"/>
           <p:nvPr/>
         </p:nvSpPr>
         <p:spPr>
           <a:xfrm>
-            <a:off x="594360" y="3840480"/>
-            <a:ext cx="10972800" cy="777240"/>
+            <a:off x="640080" y="2743200"/>
+            <a:ext cx="5349240" cy="1463040"/>
           </a:xfrm>
           <a:prstGeom prst="rect">
             <a:avLst/>
@@ -4058,14 +4456,228 @@
       </p:sp>
       <p:sp>
         <p:nvSpPr>
-          <p:cNvPr id="10" name="TextBox 9"/>
+          <p:cNvPr id="12" name="Rounded Rectangle 11"/>
+          <p:cNvSpPr/>
+          <p:nvPr/>
+        </p:nvSpPr>
+        <p:spPr>
+          <a:xfrm>
+            <a:off x="6053327" y="2487168"/>
+            <a:ext cx="5861304" cy="1975104"/>
+          </a:xfrm>
+          <a:prstGeom prst="roundRect">
+            <a:avLst>
+              <a:gd name="adj" fmla="val 8000"/>
+            </a:avLst>
+          </a:prstGeom>
+          <a:solidFill>
+            <a:srgbClr val="EEF3FF"/>
+          </a:solidFill>
+          <a:ln w="9525">
+            <a:solidFill>
+              <a:srgbClr val="D6E4FF"/>
+            </a:solidFill>
+          </a:ln>
+          <a:effectLst/>
+        </p:spPr>
+        <p:style>
+          <a:lnRef idx="1">
+            <a:schemeClr val="accent1"/>
+          </a:lnRef>
+          <a:fillRef idx="3">
+            <a:schemeClr val="accent1"/>
+          </a:fillRef>
+          <a:effectRef idx="2">
+            <a:schemeClr val="accent1"/>
+          </a:effectRef>
+          <a:fontRef idx="minor">
+            <a:schemeClr val="lt1"/>
+          </a:fontRef>
+        </p:style>
+        <p:txBody>
+          <a:bodyPr rtlCol="0" anchor="ctr"/>
+          <a:lstStyle/>
+          <a:p>
+            <a:pPr algn="ctr"/>
+          </a:p>
+        </p:txBody>
+      </p:sp>
+      <p:sp>
+        <p:nvSpPr>
+          <p:cNvPr id="13" name="TextBox 12"/>
           <p:cNvSpPr txBox="1"/>
           <p:nvPr/>
         </p:nvSpPr>
         <p:spPr>
           <a:xfrm>
-            <a:off x="594360" y="4800600"/>
-            <a:ext cx="10972800" cy="777240"/>
+            <a:off x="6309359" y="2743200"/>
+            <a:ext cx="5349240" cy="1463040"/>
+          </a:xfrm>
+          <a:prstGeom prst="rect">
+            <a:avLst/>
+          </a:prstGeom>
+          <a:noFill/>
+        </p:spPr>
+        <p:txBody>
+          <a:bodyPr wrap="square" lIns="18288" rIns="18288" tIns="9144" bIns="9144" anchor="ctr">
+            <a:spAutoFit/>
+          </a:bodyPr>
+          <a:lstStyle/>
+          <a:p>
+            <a:pPr algn="l"/>
+            <a:r>
+              <a:rPr sz="1600" b="0" i="0">
+                <a:solidFill>
+                  <a:srgbClr val="0A0F1E"/>
+                </a:solidFill>
+                <a:latin typeface="Microsoft YaHei"/>
+              </a:rPr>
+              <a:t/>
+            </a:r>
+          </a:p>
+        </p:txBody>
+      </p:sp>
+      <p:sp>
+        <p:nvSpPr>
+          <p:cNvPr id="14" name="Rounded Rectangle 13"/>
+          <p:cNvSpPr/>
+          <p:nvPr/>
+        </p:nvSpPr>
+        <p:spPr>
+          <a:xfrm>
+            <a:off x="384047" y="4270248"/>
+            <a:ext cx="5861304" cy="1975104"/>
+          </a:xfrm>
+          <a:prstGeom prst="roundRect">
+            <a:avLst>
+              <a:gd name="adj" fmla="val 8000"/>
+            </a:avLst>
+          </a:prstGeom>
+          <a:solidFill>
+            <a:srgbClr val="EEF3FF"/>
+          </a:solidFill>
+          <a:ln w="9525">
+            <a:solidFill>
+              <a:srgbClr val="D6E4FF"/>
+            </a:solidFill>
+          </a:ln>
+          <a:effectLst/>
+        </p:spPr>
+        <p:style>
+          <a:lnRef idx="1">
+            <a:schemeClr val="accent1"/>
+          </a:lnRef>
+          <a:fillRef idx="3">
+            <a:schemeClr val="accent1"/>
+          </a:fillRef>
+          <a:effectRef idx="2">
+            <a:schemeClr val="accent1"/>
+          </a:effectRef>
+          <a:fontRef idx="minor">
+            <a:schemeClr val="lt1"/>
+          </a:fontRef>
+        </p:style>
+        <p:txBody>
+          <a:bodyPr rtlCol="0" anchor="ctr"/>
+          <a:lstStyle/>
+          <a:p>
+            <a:pPr algn="ctr"/>
+          </a:p>
+        </p:txBody>
+      </p:sp>
+      <p:sp>
+        <p:nvSpPr>
+          <p:cNvPr id="15" name="TextBox 14"/>
+          <p:cNvSpPr txBox="1"/>
+          <p:nvPr/>
+        </p:nvSpPr>
+        <p:spPr>
+          <a:xfrm>
+            <a:off x="640080" y="4526280"/>
+            <a:ext cx="5349240" cy="1463040"/>
+          </a:xfrm>
+          <a:prstGeom prst="rect">
+            <a:avLst/>
+          </a:prstGeom>
+          <a:noFill/>
+        </p:spPr>
+        <p:txBody>
+          <a:bodyPr wrap="square" lIns="18288" rIns="18288" tIns="9144" bIns="9144" anchor="ctr">
+            <a:spAutoFit/>
+          </a:bodyPr>
+          <a:lstStyle/>
+          <a:p>
+            <a:pPr algn="l"/>
+            <a:r>
+              <a:rPr sz="1600" b="0" i="0">
+                <a:solidFill>
+                  <a:srgbClr val="0A0F1E"/>
+                </a:solidFill>
+                <a:latin typeface="Microsoft YaHei"/>
+              </a:rPr>
+              <a:t/>
+            </a:r>
+          </a:p>
+        </p:txBody>
+      </p:sp>
+      <p:sp>
+        <p:nvSpPr>
+          <p:cNvPr id="16" name="Rounded Rectangle 15"/>
+          <p:cNvSpPr/>
+          <p:nvPr/>
+        </p:nvSpPr>
+        <p:spPr>
+          <a:xfrm>
+            <a:off x="6053327" y="4270248"/>
+            <a:ext cx="5861304" cy="1975104"/>
+          </a:xfrm>
+          <a:prstGeom prst="roundRect">
+            <a:avLst>
+              <a:gd name="adj" fmla="val 8000"/>
+            </a:avLst>
+          </a:prstGeom>
+          <a:solidFill>
+            <a:srgbClr val="EEF3FF"/>
+          </a:solidFill>
+          <a:ln w="9525">
+            <a:solidFill>
+              <a:srgbClr val="D6E4FF"/>
+            </a:solidFill>
+          </a:ln>
+          <a:effectLst/>
+        </p:spPr>
+        <p:style>
+          <a:lnRef idx="1">
+            <a:schemeClr val="accent1"/>
+          </a:lnRef>
+          <a:fillRef idx="3">
+            <a:schemeClr val="accent1"/>
+          </a:fillRef>
+          <a:effectRef idx="2">
+            <a:schemeClr val="accent1"/>
+          </a:effectRef>
+          <a:fontRef idx="minor">
+            <a:schemeClr val="lt1"/>
+          </a:fontRef>
+        </p:style>
+        <p:txBody>
+          <a:bodyPr rtlCol="0" anchor="ctr"/>
+          <a:lstStyle/>
+          <a:p>
+            <a:pPr algn="ctr"/>
+          </a:p>
+        </p:txBody>
+      </p:sp>
+      <p:sp>
+        <p:nvSpPr>
+          <p:cNvPr id="17" name="TextBox 16"/>
+          <p:cNvSpPr txBox="1"/>
+          <p:nvPr/>
+        </p:nvSpPr>
+        <p:spPr>
+          <a:xfrm>
+            <a:off x="6309359" y="4526280"/>
+            <a:ext cx="5349240" cy="1463040"/>
           </a:xfrm>
           <a:prstGeom prst="rect">
             <a:avLst/>
@@ -4126,7 +4738,7 @@
         <p:spPr>
           <a:xfrm>
             <a:off x="0" y="0"/>
-            <a:ext cx="118872" cy="6858000"/>
+            <a:ext cx="12191695" cy="109728"/>
           </a:xfrm>
           <a:prstGeom prst="rect">
             <a:avLst/>
@@ -4163,121 +4775,16 @@
       </p:sp>
       <p:sp>
         <p:nvSpPr>
-          <p:cNvPr id="3" name="TextBox 2"/>
-          <p:cNvSpPr txBox="1"/>
-          <p:nvPr/>
-        </p:nvSpPr>
-        <p:spPr>
-          <a:xfrm>
-            <a:off x="457200" y="6419088"/>
-            <a:ext cx="3657600" cy="274320"/>
-          </a:xfrm>
-          <a:prstGeom prst="rect">
-            <a:avLst/>
-          </a:prstGeom>
-          <a:noFill/>
-        </p:spPr>
-        <p:txBody>
-          <a:bodyPr wrap="none">
-            <a:spAutoFit/>
-          </a:bodyPr>
-          <a:lstStyle/>
-          <a:p>
-            <a:pPr algn="l"/>
-            <a:r>
-              <a:rPr sz="900" b="0">
-                <a:solidFill>
-                  <a:srgbClr val="5A6478"/>
-                </a:solidFill>
-                <a:latin typeface="Microsoft YaHei"/>
-              </a:rPr>
-              <a:t>LESSONFORGE 微课</a:t>
-            </a:r>
-          </a:p>
-        </p:txBody>
-      </p:sp>
-      <p:sp>
-        <p:nvSpPr>
-          <p:cNvPr id="4" name="TextBox 3"/>
-          <p:cNvSpPr txBox="1"/>
-          <p:nvPr/>
-        </p:nvSpPr>
-        <p:spPr>
-          <a:xfrm>
-            <a:off x="10607040" y="6419088"/>
-            <a:ext cx="1097280" cy="274320"/>
-          </a:xfrm>
-          <a:prstGeom prst="rect">
-            <a:avLst/>
-          </a:prstGeom>
-          <a:noFill/>
-        </p:spPr>
-        <p:txBody>
-          <a:bodyPr wrap="none">
-            <a:spAutoFit/>
-          </a:bodyPr>
-          <a:lstStyle/>
-          <a:p>
-            <a:pPr algn="r"/>
-            <a:r>
-              <a:rPr sz="1000" b="1">
-                <a:solidFill>
-                  <a:srgbClr val="5A6478"/>
-                </a:solidFill>
-                <a:latin typeface="Microsoft YaHei"/>
-              </a:rPr>
-              <a:t>12</a:t>
-            </a:r>
-          </a:p>
-        </p:txBody>
-      </p:sp>
-      <p:sp>
-        <p:nvSpPr>
-          <p:cNvPr id="5" name="TextBox 4"/>
-          <p:cNvSpPr txBox="1"/>
-          <p:nvPr/>
-        </p:nvSpPr>
-        <p:spPr>
-          <a:xfrm>
-            <a:off x="548640" y="457200"/>
-            <a:ext cx="11064240" cy="777240"/>
-          </a:xfrm>
-          <a:prstGeom prst="rect">
-            <a:avLst/>
-          </a:prstGeom>
-          <a:noFill/>
-        </p:spPr>
-        <p:txBody>
-          <a:bodyPr wrap="square" lIns="18288" rIns="18288" tIns="9144" bIns="9144" anchor="ctr">
-            <a:spAutoFit/>
-          </a:bodyPr>
-          <a:lstStyle/>
-          <a:p>
-            <a:pPr algn="l"/>
-            <a:r>
-              <a:rPr sz="2800" b="1" i="0">
-                <a:solidFill>
-                  <a:srgbClr val="0B3D91"/>
-                </a:solidFill>
-                <a:latin typeface="Microsoft YaHei"/>
-              </a:rPr>
-              <a:t/>
-            </a:r>
-          </a:p>
-        </p:txBody>
-      </p:sp>
-      <p:sp>
-        <p:nvSpPr>
-          <p:cNvPr id="6" name="Rectangle 5"/>
+          <p:cNvPr id="3" name="Oval 2"/>
           <p:cNvSpPr/>
           <p:nvPr/>
         </p:nvSpPr>
         <p:spPr>
           <a:xfrm>
-            <a:off x="566928" y="1298448"/>
-            <a:ext cx="1234440" cy="82296"/>
-          </a:xfrm>
-          <a:prstGeom prst="rect">
+            <a:off x="11521440" y="320040"/>
+            <a:ext cx="457200" cy="457200"/>
+          </a:xfrm>
+          <a:prstGeom prst="ellipse">
             <a:avLst/>
           </a:prstGeom>
           <a:solidFill>
@@ -4312,14 +4819,84 @@
       </p:sp>
       <p:sp>
         <p:nvSpPr>
-          <p:cNvPr id="7" name="TextBox 6"/>
+          <p:cNvPr id="4" name="TextBox 3"/>
           <p:cNvSpPr txBox="1"/>
           <p:nvPr/>
         </p:nvSpPr>
         <p:spPr>
           <a:xfrm>
-            <a:off x="594360" y="1645920"/>
-            <a:ext cx="10972800" cy="548640"/>
+            <a:off x="457200" y="6419088"/>
+            <a:ext cx="3657600" cy="274320"/>
+          </a:xfrm>
+          <a:prstGeom prst="rect">
+            <a:avLst/>
+          </a:prstGeom>
+          <a:noFill/>
+        </p:spPr>
+        <p:txBody>
+          <a:bodyPr wrap="none">
+            <a:spAutoFit/>
+          </a:bodyPr>
+          <a:lstStyle/>
+          <a:p>
+            <a:pPr algn="l"/>
+            <a:r>
+              <a:rPr sz="900" b="0">
+                <a:solidFill>
+                  <a:srgbClr val="5A6478"/>
+                </a:solidFill>
+                <a:latin typeface="Microsoft YaHei"/>
+              </a:rPr>
+              <a:t>LESSONFORGE 微课</a:t>
+            </a:r>
+          </a:p>
+        </p:txBody>
+      </p:sp>
+      <p:sp>
+        <p:nvSpPr>
+          <p:cNvPr id="5" name="TextBox 4"/>
+          <p:cNvSpPr txBox="1"/>
+          <p:nvPr/>
+        </p:nvSpPr>
+        <p:spPr>
+          <a:xfrm>
+            <a:off x="10607040" y="6419088"/>
+            <a:ext cx="1097280" cy="274320"/>
+          </a:xfrm>
+          <a:prstGeom prst="rect">
+            <a:avLst/>
+          </a:prstGeom>
+          <a:noFill/>
+        </p:spPr>
+        <p:txBody>
+          <a:bodyPr wrap="none">
+            <a:spAutoFit/>
+          </a:bodyPr>
+          <a:lstStyle/>
+          <a:p>
+            <a:pPr algn="r"/>
+            <a:r>
+              <a:rPr sz="1000" b="1">
+                <a:solidFill>
+                  <a:srgbClr val="5A6478"/>
+                </a:solidFill>
+                <a:latin typeface="Microsoft YaHei"/>
+              </a:rPr>
+              <a:t>12</a:t>
+            </a:r>
+          </a:p>
+        </p:txBody>
+      </p:sp>
+      <p:sp>
+        <p:nvSpPr>
+          <p:cNvPr id="6" name="TextBox 5"/>
+          <p:cNvSpPr txBox="1"/>
+          <p:nvPr/>
+        </p:nvSpPr>
+        <p:spPr>
+          <a:xfrm>
+            <a:off x="640080" y="548640"/>
+            <a:ext cx="10607040" cy="731520"/>
           </a:xfrm>
           <a:prstGeom prst="rect">
             <a:avLst/>
@@ -4334,7 +4911,7 @@
           <a:p>
             <a:pPr algn="l"/>
             <a:r>
-              <a:rPr sz="1700" b="1" i="0">
+              <a:rPr sz="2800" b="1" i="0">
                 <a:solidFill>
                   <a:srgbClr val="0B3D91"/>
                 </a:solidFill>
@@ -4347,14 +4924,106 @@
       </p:sp>
       <p:sp>
         <p:nvSpPr>
-          <p:cNvPr id="8" name="TextBox 7"/>
+          <p:cNvPr id="7" name="Rectangle 6"/>
+          <p:cNvSpPr/>
+          <p:nvPr/>
+        </p:nvSpPr>
+        <p:spPr>
+          <a:xfrm>
+            <a:off x="667512" y="1353312"/>
+            <a:ext cx="1234440" cy="73152"/>
+          </a:xfrm>
+          <a:prstGeom prst="rect">
+            <a:avLst/>
+          </a:prstGeom>
+          <a:solidFill>
+            <a:srgbClr val="D6E4FF"/>
+          </a:solidFill>
+          <a:ln>
+            <a:noFill/>
+          </a:ln>
+          <a:effectLst/>
+        </p:spPr>
+        <p:style>
+          <a:lnRef idx="1">
+            <a:schemeClr val="accent1"/>
+          </a:lnRef>
+          <a:fillRef idx="3">
+            <a:schemeClr val="accent1"/>
+          </a:fillRef>
+          <a:effectRef idx="2">
+            <a:schemeClr val="accent1"/>
+          </a:effectRef>
+          <a:fontRef idx="minor">
+            <a:schemeClr val="lt1"/>
+          </a:fontRef>
+        </p:style>
+        <p:txBody>
+          <a:bodyPr rtlCol="0" anchor="ctr"/>
+          <a:lstStyle/>
+          <a:p>
+            <a:pPr algn="ctr"/>
+          </a:p>
+        </p:txBody>
+      </p:sp>
+      <p:sp>
+        <p:nvSpPr>
+          <p:cNvPr id="8" name="Rounded Rectangle 7"/>
+          <p:cNvSpPr/>
+          <p:nvPr/>
+        </p:nvSpPr>
+        <p:spPr>
+          <a:xfrm>
+            <a:off x="384047" y="1389888"/>
+            <a:ext cx="11484864" cy="1060704"/>
+          </a:xfrm>
+          <a:prstGeom prst="roundRect">
+            <a:avLst>
+              <a:gd name="adj" fmla="val 8000"/>
+            </a:avLst>
+          </a:prstGeom>
+          <a:solidFill>
+            <a:srgbClr val="EEF3FF"/>
+          </a:solidFill>
+          <a:ln w="9525">
+            <a:solidFill>
+              <a:srgbClr val="D6E4FF"/>
+            </a:solidFill>
+          </a:ln>
+          <a:effectLst/>
+        </p:spPr>
+        <p:style>
+          <a:lnRef idx="1">
+            <a:schemeClr val="accent1"/>
+          </a:lnRef>
+          <a:fillRef idx="3">
+            <a:schemeClr val="accent1"/>
+          </a:fillRef>
+          <a:effectRef idx="2">
+            <a:schemeClr val="accent1"/>
+          </a:effectRef>
+          <a:fontRef idx="minor">
+            <a:schemeClr val="lt1"/>
+          </a:fontRef>
+        </p:style>
+        <p:txBody>
+          <a:bodyPr rtlCol="0" anchor="ctr"/>
+          <a:lstStyle/>
+          <a:p>
+            <a:pPr algn="ctr"/>
+          </a:p>
+        </p:txBody>
+      </p:sp>
+      <p:sp>
+        <p:nvSpPr>
+          <p:cNvPr id="9" name="TextBox 8"/>
           <p:cNvSpPr txBox="1"/>
           <p:nvPr/>
         </p:nvSpPr>
         <p:spPr>
           <a:xfrm>
-            <a:off x="594360" y="2331720"/>
-            <a:ext cx="5394960" cy="548640"/>
+            <a:off x="640080" y="1645920"/>
+            <a:ext cx="10972800" cy="548640"/>
           </a:xfrm>
           <a:prstGeom prst="rect">
             <a:avLst/>
@@ -4369,9 +5038,9 @@
           <a:p>
             <a:pPr algn="l"/>
             <a:r>
-              <a:rPr sz="1600" b="0" i="0">
-                <a:solidFill>
-                  <a:srgbClr val="0A0F1E"/>
+              <a:rPr sz="1700" b="1" i="0">
+                <a:solidFill>
+                  <a:srgbClr val="0B3D91"/>
                 </a:solidFill>
                 <a:latin typeface="Microsoft YaHei"/>
               </a:rPr>
@@ -4382,14 +5051,62 @@
       </p:sp>
       <p:sp>
         <p:nvSpPr>
-          <p:cNvPr id="9" name="TextBox 8"/>
+          <p:cNvPr id="10" name="Rounded Rectangle 9"/>
+          <p:cNvSpPr/>
+          <p:nvPr/>
+        </p:nvSpPr>
+        <p:spPr>
+          <a:xfrm>
+            <a:off x="384047" y="2121408"/>
+            <a:ext cx="5861304" cy="2112264"/>
+          </a:xfrm>
+          <a:prstGeom prst="roundRect">
+            <a:avLst>
+              <a:gd name="adj" fmla="val 8000"/>
+            </a:avLst>
+          </a:prstGeom>
+          <a:solidFill>
+            <a:srgbClr val="EEF3FF"/>
+          </a:solidFill>
+          <a:ln w="9525">
+            <a:solidFill>
+              <a:srgbClr val="D6E4FF"/>
+            </a:solidFill>
+          </a:ln>
+          <a:effectLst/>
+        </p:spPr>
+        <p:style>
+          <a:lnRef idx="1">
+            <a:schemeClr val="accent1"/>
+          </a:lnRef>
+          <a:fillRef idx="3">
+            <a:schemeClr val="accent1"/>
+          </a:fillRef>
+          <a:effectRef idx="2">
+            <a:schemeClr val="accent1"/>
+          </a:effectRef>
+          <a:fontRef idx="minor">
+            <a:schemeClr val="lt1"/>
+          </a:fontRef>
+        </p:style>
+        <p:txBody>
+          <a:bodyPr rtlCol="0" anchor="ctr"/>
+          <a:lstStyle/>
+          <a:p>
+            <a:pPr algn="ctr"/>
+          </a:p>
+        </p:txBody>
+      </p:sp>
+      <p:sp>
+        <p:nvSpPr>
+          <p:cNvPr id="11" name="TextBox 10"/>
           <p:cNvSpPr txBox="1"/>
           <p:nvPr/>
         </p:nvSpPr>
         <p:spPr>
           <a:xfrm>
-            <a:off x="6263640" y="2331720"/>
-            <a:ext cx="5394960" cy="548640"/>
+            <a:off x="640080" y="2377440"/>
+            <a:ext cx="5349240" cy="1600200"/>
           </a:xfrm>
           <a:prstGeom prst="rect">
             <a:avLst/>
@@ -4417,14 +5134,62 @@
       </p:sp>
       <p:sp>
         <p:nvSpPr>
-          <p:cNvPr id="10" name="TextBox 9"/>
+          <p:cNvPr id="12" name="Rounded Rectangle 11"/>
+          <p:cNvSpPr/>
+          <p:nvPr/>
+        </p:nvSpPr>
+        <p:spPr>
+          <a:xfrm>
+            <a:off x="6053327" y="2121408"/>
+            <a:ext cx="5861304" cy="2112264"/>
+          </a:xfrm>
+          <a:prstGeom prst="roundRect">
+            <a:avLst>
+              <a:gd name="adj" fmla="val 8000"/>
+            </a:avLst>
+          </a:prstGeom>
+          <a:solidFill>
+            <a:srgbClr val="EEF3FF"/>
+          </a:solidFill>
+          <a:ln w="9525">
+            <a:solidFill>
+              <a:srgbClr val="D6E4FF"/>
+            </a:solidFill>
+          </a:ln>
+          <a:effectLst/>
+        </p:spPr>
+        <p:style>
+          <a:lnRef idx="1">
+            <a:schemeClr val="accent1"/>
+          </a:lnRef>
+          <a:fillRef idx="3">
+            <a:schemeClr val="accent1"/>
+          </a:fillRef>
+          <a:effectRef idx="2">
+            <a:schemeClr val="accent1"/>
+          </a:effectRef>
+          <a:fontRef idx="minor">
+            <a:schemeClr val="lt1"/>
+          </a:fontRef>
+        </p:style>
+        <p:txBody>
+          <a:bodyPr rtlCol="0" anchor="ctr"/>
+          <a:lstStyle/>
+          <a:p>
+            <a:pPr algn="ctr"/>
+          </a:p>
+        </p:txBody>
+      </p:sp>
+      <p:sp>
+        <p:nvSpPr>
+          <p:cNvPr id="13" name="TextBox 12"/>
           <p:cNvSpPr txBox="1"/>
           <p:nvPr/>
         </p:nvSpPr>
         <p:spPr>
           <a:xfrm>
-            <a:off x="594360" y="3017520"/>
-            <a:ext cx="5394960" cy="548640"/>
+            <a:off x="6309359" y="2377440"/>
+            <a:ext cx="5349240" cy="1600200"/>
           </a:xfrm>
           <a:prstGeom prst="rect">
             <a:avLst/>
@@ -4452,14 +5217,62 @@
       </p:sp>
       <p:sp>
         <p:nvSpPr>
-          <p:cNvPr id="11" name="TextBox 10"/>
+          <p:cNvPr id="14" name="Rounded Rectangle 13"/>
+          <p:cNvSpPr/>
+          <p:nvPr/>
+        </p:nvSpPr>
+        <p:spPr>
+          <a:xfrm>
+            <a:off x="384047" y="4087368"/>
+            <a:ext cx="5861304" cy="2112264"/>
+          </a:xfrm>
+          <a:prstGeom prst="roundRect">
+            <a:avLst>
+              <a:gd name="adj" fmla="val 8000"/>
+            </a:avLst>
+          </a:prstGeom>
+          <a:solidFill>
+            <a:srgbClr val="EEF3FF"/>
+          </a:solidFill>
+          <a:ln w="9525">
+            <a:solidFill>
+              <a:srgbClr val="D6E4FF"/>
+            </a:solidFill>
+          </a:ln>
+          <a:effectLst/>
+        </p:spPr>
+        <p:style>
+          <a:lnRef idx="1">
+            <a:schemeClr val="accent1"/>
+          </a:lnRef>
+          <a:fillRef idx="3">
+            <a:schemeClr val="accent1"/>
+          </a:fillRef>
+          <a:effectRef idx="2">
+            <a:schemeClr val="accent1"/>
+          </a:effectRef>
+          <a:fontRef idx="minor">
+            <a:schemeClr val="lt1"/>
+          </a:fontRef>
+        </p:style>
+        <p:txBody>
+          <a:bodyPr rtlCol="0" anchor="ctr"/>
+          <a:lstStyle/>
+          <a:p>
+            <a:pPr algn="ctr"/>
+          </a:p>
+        </p:txBody>
+      </p:sp>
+      <p:sp>
+        <p:nvSpPr>
+          <p:cNvPr id="15" name="TextBox 14"/>
           <p:cNvSpPr txBox="1"/>
           <p:nvPr/>
         </p:nvSpPr>
         <p:spPr>
           <a:xfrm>
-            <a:off x="6263640" y="3017520"/>
-            <a:ext cx="5394960" cy="548640"/>
+            <a:off x="640080" y="4343400"/>
+            <a:ext cx="5349240" cy="1600200"/>
           </a:xfrm>
           <a:prstGeom prst="rect">
             <a:avLst/>
@@ -4487,14 +5300,62 @@
       </p:sp>
       <p:sp>
         <p:nvSpPr>
-          <p:cNvPr id="12" name="TextBox 11"/>
+          <p:cNvPr id="16" name="Rounded Rectangle 15"/>
+          <p:cNvSpPr/>
+          <p:nvPr/>
+        </p:nvSpPr>
+        <p:spPr>
+          <a:xfrm>
+            <a:off x="6053327" y="4087368"/>
+            <a:ext cx="5861304" cy="2112264"/>
+          </a:xfrm>
+          <a:prstGeom prst="roundRect">
+            <a:avLst>
+              <a:gd name="adj" fmla="val 8000"/>
+            </a:avLst>
+          </a:prstGeom>
+          <a:solidFill>
+            <a:srgbClr val="EEF3FF"/>
+          </a:solidFill>
+          <a:ln w="9525">
+            <a:solidFill>
+              <a:srgbClr val="D6E4FF"/>
+            </a:solidFill>
+          </a:ln>
+          <a:effectLst/>
+        </p:spPr>
+        <p:style>
+          <a:lnRef idx="1">
+            <a:schemeClr val="accent1"/>
+          </a:lnRef>
+          <a:fillRef idx="3">
+            <a:schemeClr val="accent1"/>
+          </a:fillRef>
+          <a:effectRef idx="2">
+            <a:schemeClr val="accent1"/>
+          </a:effectRef>
+          <a:fontRef idx="minor">
+            <a:schemeClr val="lt1"/>
+          </a:fontRef>
+        </p:style>
+        <p:txBody>
+          <a:bodyPr rtlCol="0" anchor="ctr"/>
+          <a:lstStyle/>
+          <a:p>
+            <a:pPr algn="ctr"/>
+          </a:p>
+        </p:txBody>
+      </p:sp>
+      <p:sp>
+        <p:nvSpPr>
+          <p:cNvPr id="17" name="TextBox 16"/>
           <p:cNvSpPr txBox="1"/>
           <p:nvPr/>
         </p:nvSpPr>
         <p:spPr>
           <a:xfrm>
-            <a:off x="594360" y="3703320"/>
-            <a:ext cx="5394960" cy="548640"/>
+            <a:off x="6309359" y="4343400"/>
+            <a:ext cx="5349240" cy="1600200"/>
           </a:xfrm>
           <a:prstGeom prst="rect">
             <a:avLst/>
@@ -4512,146 +5373,6 @@
               <a:rPr sz="1600" b="0" i="0">
                 <a:solidFill>
                   <a:srgbClr val="0A0F1E"/>
-                </a:solidFill>
-                <a:latin typeface="Microsoft YaHei"/>
-              </a:rPr>
-              <a:t/>
-            </a:r>
-          </a:p>
-        </p:txBody>
-      </p:sp>
-      <p:sp>
-        <p:nvSpPr>
-          <p:cNvPr id="13" name="TextBox 12"/>
-          <p:cNvSpPr txBox="1"/>
-          <p:nvPr/>
-        </p:nvSpPr>
-        <p:spPr>
-          <a:xfrm>
-            <a:off x="6263640" y="3703320"/>
-            <a:ext cx="5394960" cy="548640"/>
-          </a:xfrm>
-          <a:prstGeom prst="rect">
-            <a:avLst/>
-          </a:prstGeom>
-          <a:noFill/>
-        </p:spPr>
-        <p:txBody>
-          <a:bodyPr wrap="square" lIns="18288" rIns="18288" tIns="9144" bIns="9144" anchor="ctr">
-            <a:spAutoFit/>
-          </a:bodyPr>
-          <a:lstStyle/>
-          <a:p>
-            <a:pPr algn="l"/>
-            <a:r>
-              <a:rPr sz="1600" b="0" i="0">
-                <a:solidFill>
-                  <a:srgbClr val="0A0F1E"/>
-                </a:solidFill>
-                <a:latin typeface="Microsoft YaHei"/>
-              </a:rPr>
-              <a:t/>
-            </a:r>
-          </a:p>
-        </p:txBody>
-      </p:sp>
-      <p:sp>
-        <p:nvSpPr>
-          <p:cNvPr id="14" name="TextBox 13"/>
-          <p:cNvSpPr txBox="1"/>
-          <p:nvPr/>
-        </p:nvSpPr>
-        <p:spPr>
-          <a:xfrm>
-            <a:off x="594360" y="4389120"/>
-            <a:ext cx="5394960" cy="548640"/>
-          </a:xfrm>
-          <a:prstGeom prst="rect">
-            <a:avLst/>
-          </a:prstGeom>
-          <a:noFill/>
-        </p:spPr>
-        <p:txBody>
-          <a:bodyPr wrap="square" lIns="18288" rIns="18288" tIns="9144" bIns="9144" anchor="ctr">
-            <a:spAutoFit/>
-          </a:bodyPr>
-          <a:lstStyle/>
-          <a:p>
-            <a:pPr algn="l"/>
-            <a:r>
-              <a:rPr sz="1600" b="0" i="0">
-                <a:solidFill>
-                  <a:srgbClr val="0A0F1E"/>
-                </a:solidFill>
-                <a:latin typeface="Microsoft YaHei"/>
-              </a:rPr>
-              <a:t/>
-            </a:r>
-          </a:p>
-        </p:txBody>
-      </p:sp>
-      <p:sp>
-        <p:nvSpPr>
-          <p:cNvPr id="15" name="TextBox 14"/>
-          <p:cNvSpPr txBox="1"/>
-          <p:nvPr/>
-        </p:nvSpPr>
-        <p:spPr>
-          <a:xfrm>
-            <a:off x="6263640" y="4389120"/>
-            <a:ext cx="5394960" cy="548640"/>
-          </a:xfrm>
-          <a:prstGeom prst="rect">
-            <a:avLst/>
-          </a:prstGeom>
-          <a:noFill/>
-        </p:spPr>
-        <p:txBody>
-          <a:bodyPr wrap="square" lIns="18288" rIns="18288" tIns="9144" bIns="9144" anchor="ctr">
-            <a:spAutoFit/>
-          </a:bodyPr>
-          <a:lstStyle/>
-          <a:p>
-            <a:pPr algn="l"/>
-            <a:r>
-              <a:rPr sz="1600" b="0" i="0">
-                <a:solidFill>
-                  <a:srgbClr val="0A0F1E"/>
-                </a:solidFill>
-                <a:latin typeface="Microsoft YaHei"/>
-              </a:rPr>
-              <a:t/>
-            </a:r>
-          </a:p>
-        </p:txBody>
-      </p:sp>
-      <p:sp>
-        <p:nvSpPr>
-          <p:cNvPr id="16" name="TextBox 15"/>
-          <p:cNvSpPr txBox="1"/>
-          <p:nvPr/>
-        </p:nvSpPr>
-        <p:spPr>
-          <a:xfrm>
-            <a:off x="594360" y="5349240"/>
-            <a:ext cx="10972800" cy="685800"/>
-          </a:xfrm>
-          <a:prstGeom prst="rect">
-            <a:avLst/>
-          </a:prstGeom>
-          <a:noFill/>
-        </p:spPr>
-        <p:txBody>
-          <a:bodyPr wrap="square" lIns="18288" rIns="18288" tIns="9144" bIns="9144" anchor="ctr">
-            <a:spAutoFit/>
-          </a:bodyPr>
-          <a:lstStyle/>
-          <a:p>
-            <a:pPr algn="l"/>
-            <a:r>
-              <a:rPr sz="1500" b="0" i="1">
-                <a:solidFill>
-                  <a:srgbClr val="5A6478"/>
                 </a:solidFill>
                 <a:latin typeface="Microsoft YaHei"/>
               </a:rPr>
@@ -4695,7 +5416,7 @@
         <p:spPr>
           <a:xfrm>
             <a:off x="0" y="0"/>
-            <a:ext cx="118872" cy="6858000"/>
+            <a:ext cx="12191695" cy="109728"/>
           </a:xfrm>
           <a:prstGeom prst="rect">
             <a:avLst/>
@@ -4732,121 +5453,16 @@
       </p:sp>
       <p:sp>
         <p:nvSpPr>
-          <p:cNvPr id="3" name="TextBox 2"/>
-          <p:cNvSpPr txBox="1"/>
-          <p:nvPr/>
-        </p:nvSpPr>
-        <p:spPr>
-          <a:xfrm>
-            <a:off x="457200" y="6419088"/>
-            <a:ext cx="3657600" cy="274320"/>
-          </a:xfrm>
-          <a:prstGeom prst="rect">
-            <a:avLst/>
-          </a:prstGeom>
-          <a:noFill/>
-        </p:spPr>
-        <p:txBody>
-          <a:bodyPr wrap="none">
-            <a:spAutoFit/>
-          </a:bodyPr>
-          <a:lstStyle/>
-          <a:p>
-            <a:pPr algn="l"/>
-            <a:r>
-              <a:rPr sz="900" b="0">
-                <a:solidFill>
-                  <a:srgbClr val="5A6478"/>
-                </a:solidFill>
-                <a:latin typeface="Microsoft YaHei"/>
-              </a:rPr>
-              <a:t>LESSONFORGE 微课</a:t>
-            </a:r>
-          </a:p>
-        </p:txBody>
-      </p:sp>
-      <p:sp>
-        <p:nvSpPr>
-          <p:cNvPr id="4" name="TextBox 3"/>
-          <p:cNvSpPr txBox="1"/>
-          <p:nvPr/>
-        </p:nvSpPr>
-        <p:spPr>
-          <a:xfrm>
-            <a:off x="10607040" y="6419088"/>
-            <a:ext cx="1097280" cy="274320"/>
-          </a:xfrm>
-          <a:prstGeom prst="rect">
-            <a:avLst/>
-          </a:prstGeom>
-          <a:noFill/>
-        </p:spPr>
-        <p:txBody>
-          <a:bodyPr wrap="none">
-            <a:spAutoFit/>
-          </a:bodyPr>
-          <a:lstStyle/>
-          <a:p>
-            <a:pPr algn="r"/>
-            <a:r>
-              <a:rPr sz="1000" b="1">
-                <a:solidFill>
-                  <a:srgbClr val="5A6478"/>
-                </a:solidFill>
-                <a:latin typeface="Microsoft YaHei"/>
-              </a:rPr>
-              <a:t>13</a:t>
-            </a:r>
-          </a:p>
-        </p:txBody>
-      </p:sp>
-      <p:sp>
-        <p:nvSpPr>
-          <p:cNvPr id="5" name="TextBox 4"/>
-          <p:cNvSpPr txBox="1"/>
-          <p:nvPr/>
-        </p:nvSpPr>
-        <p:spPr>
-          <a:xfrm>
-            <a:off x="548640" y="457200"/>
-            <a:ext cx="11064240" cy="777240"/>
-          </a:xfrm>
-          <a:prstGeom prst="rect">
-            <a:avLst/>
-          </a:prstGeom>
-          <a:noFill/>
-        </p:spPr>
-        <p:txBody>
-          <a:bodyPr wrap="square" lIns="18288" rIns="18288" tIns="9144" bIns="9144" anchor="ctr">
-            <a:spAutoFit/>
-          </a:bodyPr>
-          <a:lstStyle/>
-          <a:p>
-            <a:pPr algn="l"/>
-            <a:r>
-              <a:rPr sz="2800" b="1" i="0">
-                <a:solidFill>
-                  <a:srgbClr val="0B3D91"/>
-                </a:solidFill>
-                <a:latin typeface="Microsoft YaHei"/>
-              </a:rPr>
-              <a:t/>
-            </a:r>
-          </a:p>
-        </p:txBody>
-      </p:sp>
-      <p:sp>
-        <p:nvSpPr>
-          <p:cNvPr id="6" name="Rectangle 5"/>
+          <p:cNvPr id="3" name="Oval 2"/>
           <p:cNvSpPr/>
           <p:nvPr/>
         </p:nvSpPr>
         <p:spPr>
           <a:xfrm>
-            <a:off x="566928" y="1298448"/>
-            <a:ext cx="1234440" cy="82296"/>
-          </a:xfrm>
-          <a:prstGeom prst="rect">
+            <a:off x="11521440" y="320040"/>
+            <a:ext cx="457200" cy="457200"/>
+          </a:xfrm>
+          <a:prstGeom prst="ellipse">
             <a:avLst/>
           </a:prstGeom>
           <a:solidFill>
@@ -4881,14 +5497,84 @@
       </p:sp>
       <p:sp>
         <p:nvSpPr>
-          <p:cNvPr id="7" name="TextBox 6"/>
+          <p:cNvPr id="4" name="TextBox 3"/>
           <p:cNvSpPr txBox="1"/>
           <p:nvPr/>
         </p:nvSpPr>
         <p:spPr>
           <a:xfrm>
-            <a:off x="914400" y="1691640"/>
-            <a:ext cx="10332720" cy="457200"/>
+            <a:off x="457200" y="6419088"/>
+            <a:ext cx="3657600" cy="274320"/>
+          </a:xfrm>
+          <a:prstGeom prst="rect">
+            <a:avLst/>
+          </a:prstGeom>
+          <a:noFill/>
+        </p:spPr>
+        <p:txBody>
+          <a:bodyPr wrap="none">
+            <a:spAutoFit/>
+          </a:bodyPr>
+          <a:lstStyle/>
+          <a:p>
+            <a:pPr algn="l"/>
+            <a:r>
+              <a:rPr sz="900" b="0">
+                <a:solidFill>
+                  <a:srgbClr val="5A6478"/>
+                </a:solidFill>
+                <a:latin typeface="Microsoft YaHei"/>
+              </a:rPr>
+              <a:t>LESSONFORGE 微课</a:t>
+            </a:r>
+          </a:p>
+        </p:txBody>
+      </p:sp>
+      <p:sp>
+        <p:nvSpPr>
+          <p:cNvPr id="5" name="TextBox 4"/>
+          <p:cNvSpPr txBox="1"/>
+          <p:nvPr/>
+        </p:nvSpPr>
+        <p:spPr>
+          <a:xfrm>
+            <a:off x="10607040" y="6419088"/>
+            <a:ext cx="1097280" cy="274320"/>
+          </a:xfrm>
+          <a:prstGeom prst="rect">
+            <a:avLst/>
+          </a:prstGeom>
+          <a:noFill/>
+        </p:spPr>
+        <p:txBody>
+          <a:bodyPr wrap="none">
+            <a:spAutoFit/>
+          </a:bodyPr>
+          <a:lstStyle/>
+          <a:p>
+            <a:pPr algn="r"/>
+            <a:r>
+              <a:rPr sz="1000" b="1">
+                <a:solidFill>
+                  <a:srgbClr val="5A6478"/>
+                </a:solidFill>
+                <a:latin typeface="Microsoft YaHei"/>
+              </a:rPr>
+              <a:t>13</a:t>
+            </a:r>
+          </a:p>
+        </p:txBody>
+      </p:sp>
+      <p:sp>
+        <p:nvSpPr>
+          <p:cNvPr id="6" name="TextBox 5"/>
+          <p:cNvSpPr txBox="1"/>
+          <p:nvPr/>
+        </p:nvSpPr>
+        <p:spPr>
+          <a:xfrm>
+            <a:off x="640080" y="548640"/>
+            <a:ext cx="10607040" cy="731520"/>
           </a:xfrm>
           <a:prstGeom prst="rect">
             <a:avLst/>
@@ -4903,9 +5589,9 @@
           <a:p>
             <a:pPr algn="l"/>
             <a:r>
-              <a:rPr sz="1500" b="1" i="0">
-                <a:solidFill>
-                  <a:srgbClr val="0A0F1E"/>
+              <a:rPr sz="2800" b="1" i="0">
+                <a:solidFill>
+                  <a:srgbClr val="0B3D91"/>
                 </a:solidFill>
                 <a:latin typeface="Microsoft YaHei"/>
               </a:rPr>
@@ -4916,14 +5602,106 @@
       </p:sp>
       <p:sp>
         <p:nvSpPr>
-          <p:cNvPr id="8" name="TextBox 7"/>
+          <p:cNvPr id="7" name="Rectangle 6"/>
+          <p:cNvSpPr/>
+          <p:nvPr/>
+        </p:nvSpPr>
+        <p:spPr>
+          <a:xfrm>
+            <a:off x="667512" y="1353312"/>
+            <a:ext cx="1234440" cy="73152"/>
+          </a:xfrm>
+          <a:prstGeom prst="rect">
+            <a:avLst/>
+          </a:prstGeom>
+          <a:solidFill>
+            <a:srgbClr val="D6E4FF"/>
+          </a:solidFill>
+          <a:ln>
+            <a:noFill/>
+          </a:ln>
+          <a:effectLst/>
+        </p:spPr>
+        <p:style>
+          <a:lnRef idx="1">
+            <a:schemeClr val="accent1"/>
+          </a:lnRef>
+          <a:fillRef idx="3">
+            <a:schemeClr val="accent1"/>
+          </a:fillRef>
+          <a:effectRef idx="2">
+            <a:schemeClr val="accent1"/>
+          </a:effectRef>
+          <a:fontRef idx="minor">
+            <a:schemeClr val="lt1"/>
+          </a:fontRef>
+        </p:style>
+        <p:txBody>
+          <a:bodyPr rtlCol="0" anchor="ctr"/>
+          <a:lstStyle/>
+          <a:p>
+            <a:pPr algn="ctr"/>
+          </a:p>
+        </p:txBody>
+      </p:sp>
+      <p:sp>
+        <p:nvSpPr>
+          <p:cNvPr id="8" name="Rounded Rectangle 7"/>
+          <p:cNvSpPr/>
+          <p:nvPr/>
+        </p:nvSpPr>
+        <p:spPr>
+          <a:xfrm>
+            <a:off x="658368" y="1435608"/>
+            <a:ext cx="10844784" cy="969264"/>
+          </a:xfrm>
+          <a:prstGeom prst="roundRect">
+            <a:avLst>
+              <a:gd name="adj" fmla="val 8000"/>
+            </a:avLst>
+          </a:prstGeom>
+          <a:solidFill>
+            <a:srgbClr val="EEF3FF"/>
+          </a:solidFill>
+          <a:ln w="9525">
+            <a:solidFill>
+              <a:srgbClr val="D6E4FF"/>
+            </a:solidFill>
+          </a:ln>
+          <a:effectLst/>
+        </p:spPr>
+        <p:style>
+          <a:lnRef idx="1">
+            <a:schemeClr val="accent1"/>
+          </a:lnRef>
+          <a:fillRef idx="3">
+            <a:schemeClr val="accent1"/>
+          </a:fillRef>
+          <a:effectRef idx="2">
+            <a:schemeClr val="accent1"/>
+          </a:effectRef>
+          <a:fontRef idx="minor">
+            <a:schemeClr val="lt1"/>
+          </a:fontRef>
+        </p:style>
+        <p:txBody>
+          <a:bodyPr rtlCol="0" anchor="ctr"/>
+          <a:lstStyle/>
+          <a:p>
+            <a:pPr algn="ctr"/>
+          </a:p>
+        </p:txBody>
+      </p:sp>
+      <p:sp>
+        <p:nvSpPr>
+          <p:cNvPr id="9" name="TextBox 8"/>
           <p:cNvSpPr txBox="1"/>
           <p:nvPr/>
         </p:nvSpPr>
         <p:spPr>
           <a:xfrm>
-            <a:off x="914400" y="2194560"/>
-            <a:ext cx="10332720" cy="411480"/>
+            <a:off x="914400" y="1691640"/>
+            <a:ext cx="10332720" cy="457200"/>
           </a:xfrm>
           <a:prstGeom prst="rect">
             <a:avLst/>
@@ -4938,9 +5716,9 @@
           <a:p>
             <a:pPr algn="l"/>
             <a:r>
-              <a:rPr sz="1400" b="0" i="0">
-                <a:solidFill>
-                  <a:srgbClr val="5A6478"/>
+              <a:rPr sz="1500" b="1" i="0">
+                <a:solidFill>
+                  <a:srgbClr val="0A0F1E"/>
                 </a:solidFill>
                 <a:latin typeface="Microsoft YaHei"/>
               </a:rPr>
@@ -4951,14 +5729,62 @@
       </p:sp>
       <p:sp>
         <p:nvSpPr>
-          <p:cNvPr id="9" name="TextBox 8"/>
+          <p:cNvPr id="10" name="Rounded Rectangle 9"/>
+          <p:cNvSpPr/>
+          <p:nvPr/>
+        </p:nvSpPr>
+        <p:spPr>
+          <a:xfrm>
+            <a:off x="658368" y="1938528"/>
+            <a:ext cx="10844784" cy="923544"/>
+          </a:xfrm>
+          <a:prstGeom prst="roundRect">
+            <a:avLst>
+              <a:gd name="adj" fmla="val 8000"/>
+            </a:avLst>
+          </a:prstGeom>
+          <a:solidFill>
+            <a:srgbClr val="EEF3FF"/>
+          </a:solidFill>
+          <a:ln w="9525">
+            <a:solidFill>
+              <a:srgbClr val="D6E4FF"/>
+            </a:solidFill>
+          </a:ln>
+          <a:effectLst/>
+        </p:spPr>
+        <p:style>
+          <a:lnRef idx="1">
+            <a:schemeClr val="accent1"/>
+          </a:lnRef>
+          <a:fillRef idx="3">
+            <a:schemeClr val="accent1"/>
+          </a:fillRef>
+          <a:effectRef idx="2">
+            <a:schemeClr val="accent1"/>
+          </a:effectRef>
+          <a:fontRef idx="minor">
+            <a:schemeClr val="lt1"/>
+          </a:fontRef>
+        </p:style>
+        <p:txBody>
+          <a:bodyPr rtlCol="0" anchor="ctr"/>
+          <a:lstStyle/>
+          <a:p>
+            <a:pPr algn="ctr"/>
+          </a:p>
+        </p:txBody>
+      </p:sp>
+      <p:sp>
+        <p:nvSpPr>
+          <p:cNvPr id="11" name="TextBox 10"/>
           <p:cNvSpPr txBox="1"/>
           <p:nvPr/>
         </p:nvSpPr>
         <p:spPr>
           <a:xfrm>
-            <a:off x="914400" y="3017520"/>
-            <a:ext cx="10332720" cy="457200"/>
+            <a:off x="914400" y="2194560"/>
+            <a:ext cx="10332720" cy="411480"/>
           </a:xfrm>
           <a:prstGeom prst="rect">
             <a:avLst/>
@@ -4973,9 +5799,9 @@
           <a:p>
             <a:pPr algn="l"/>
             <a:r>
-              <a:rPr sz="1500" b="1" i="0">
-                <a:solidFill>
-                  <a:srgbClr val="0A0F1E"/>
+              <a:rPr sz="1400" b="0" i="0">
+                <a:solidFill>
+                  <a:srgbClr val="5A6478"/>
                 </a:solidFill>
                 <a:latin typeface="Microsoft YaHei"/>
               </a:rPr>
@@ -4986,14 +5812,62 @@
       </p:sp>
       <p:sp>
         <p:nvSpPr>
-          <p:cNvPr id="10" name="TextBox 9"/>
+          <p:cNvPr id="12" name="Rounded Rectangle 11"/>
+          <p:cNvSpPr/>
+          <p:nvPr/>
+        </p:nvSpPr>
+        <p:spPr>
+          <a:xfrm>
+            <a:off x="658368" y="2761487"/>
+            <a:ext cx="10844784" cy="969264"/>
+          </a:xfrm>
+          <a:prstGeom prst="roundRect">
+            <a:avLst>
+              <a:gd name="adj" fmla="val 8000"/>
+            </a:avLst>
+          </a:prstGeom>
+          <a:solidFill>
+            <a:srgbClr val="EEF3FF"/>
+          </a:solidFill>
+          <a:ln w="9525">
+            <a:solidFill>
+              <a:srgbClr val="D6E4FF"/>
+            </a:solidFill>
+          </a:ln>
+          <a:effectLst/>
+        </p:spPr>
+        <p:style>
+          <a:lnRef idx="1">
+            <a:schemeClr val="accent1"/>
+          </a:lnRef>
+          <a:fillRef idx="3">
+            <a:schemeClr val="accent1"/>
+          </a:fillRef>
+          <a:effectRef idx="2">
+            <a:schemeClr val="accent1"/>
+          </a:effectRef>
+          <a:fontRef idx="minor">
+            <a:schemeClr val="lt1"/>
+          </a:fontRef>
+        </p:style>
+        <p:txBody>
+          <a:bodyPr rtlCol="0" anchor="ctr"/>
+          <a:lstStyle/>
+          <a:p>
+            <a:pPr algn="ctr"/>
+          </a:p>
+        </p:txBody>
+      </p:sp>
+      <p:sp>
+        <p:nvSpPr>
+          <p:cNvPr id="13" name="TextBox 12"/>
           <p:cNvSpPr txBox="1"/>
           <p:nvPr/>
         </p:nvSpPr>
         <p:spPr>
           <a:xfrm>
-            <a:off x="914400" y="3520440"/>
-            <a:ext cx="10332720" cy="411480"/>
+            <a:off x="914400" y="3017520"/>
+            <a:ext cx="10332720" cy="457200"/>
           </a:xfrm>
           <a:prstGeom prst="rect">
             <a:avLst/>
@@ -5008,9 +5882,9 @@
           <a:p>
             <a:pPr algn="l"/>
             <a:r>
-              <a:rPr sz="1400" b="0" i="0">
-                <a:solidFill>
-                  <a:srgbClr val="5A6478"/>
+              <a:rPr sz="1500" b="1" i="0">
+                <a:solidFill>
+                  <a:srgbClr val="0A0F1E"/>
                 </a:solidFill>
                 <a:latin typeface="Microsoft YaHei"/>
               </a:rPr>
@@ -5021,14 +5895,62 @@
       </p:sp>
       <p:sp>
         <p:nvSpPr>
-          <p:cNvPr id="11" name="TextBox 10"/>
+          <p:cNvPr id="14" name="Rounded Rectangle 13"/>
+          <p:cNvSpPr/>
+          <p:nvPr/>
+        </p:nvSpPr>
+        <p:spPr>
+          <a:xfrm>
+            <a:off x="658368" y="3264408"/>
+            <a:ext cx="10844784" cy="923544"/>
+          </a:xfrm>
+          <a:prstGeom prst="roundRect">
+            <a:avLst>
+              <a:gd name="adj" fmla="val 8000"/>
+            </a:avLst>
+          </a:prstGeom>
+          <a:solidFill>
+            <a:srgbClr val="EEF3FF"/>
+          </a:solidFill>
+          <a:ln w="9525">
+            <a:solidFill>
+              <a:srgbClr val="D6E4FF"/>
+            </a:solidFill>
+          </a:ln>
+          <a:effectLst/>
+        </p:spPr>
+        <p:style>
+          <a:lnRef idx="1">
+            <a:schemeClr val="accent1"/>
+          </a:lnRef>
+          <a:fillRef idx="3">
+            <a:schemeClr val="accent1"/>
+          </a:fillRef>
+          <a:effectRef idx="2">
+            <a:schemeClr val="accent1"/>
+          </a:effectRef>
+          <a:fontRef idx="minor">
+            <a:schemeClr val="lt1"/>
+          </a:fontRef>
+        </p:style>
+        <p:txBody>
+          <a:bodyPr rtlCol="0" anchor="ctr"/>
+          <a:lstStyle/>
+          <a:p>
+            <a:pPr algn="ctr"/>
+          </a:p>
+        </p:txBody>
+      </p:sp>
+      <p:sp>
+        <p:nvSpPr>
+          <p:cNvPr id="15" name="TextBox 14"/>
           <p:cNvSpPr txBox="1"/>
           <p:nvPr/>
         </p:nvSpPr>
         <p:spPr>
           <a:xfrm>
-            <a:off x="914400" y="4343400"/>
-            <a:ext cx="10332720" cy="457200"/>
+            <a:off x="914400" y="3520440"/>
+            <a:ext cx="10332720" cy="411480"/>
           </a:xfrm>
           <a:prstGeom prst="rect">
             <a:avLst/>
@@ -5043,9 +5965,9 @@
           <a:p>
             <a:pPr algn="l"/>
             <a:r>
-              <a:rPr sz="1500" b="1" i="0">
-                <a:solidFill>
-                  <a:srgbClr val="0A0F1E"/>
+              <a:rPr sz="1400" b="0" i="0">
+                <a:solidFill>
+                  <a:srgbClr val="5A6478"/>
                 </a:solidFill>
                 <a:latin typeface="Microsoft YaHei"/>
               </a:rPr>
@@ -5056,14 +5978,62 @@
       </p:sp>
       <p:sp>
         <p:nvSpPr>
-          <p:cNvPr id="12" name="TextBox 11"/>
+          <p:cNvPr id="16" name="Rounded Rectangle 15"/>
+          <p:cNvSpPr/>
+          <p:nvPr/>
+        </p:nvSpPr>
+        <p:spPr>
+          <a:xfrm>
+            <a:off x="658368" y="4087368"/>
+            <a:ext cx="10844784" cy="969264"/>
+          </a:xfrm>
+          <a:prstGeom prst="roundRect">
+            <a:avLst>
+              <a:gd name="adj" fmla="val 8000"/>
+            </a:avLst>
+          </a:prstGeom>
+          <a:solidFill>
+            <a:srgbClr val="EEF3FF"/>
+          </a:solidFill>
+          <a:ln w="9525">
+            <a:solidFill>
+              <a:srgbClr val="D6E4FF"/>
+            </a:solidFill>
+          </a:ln>
+          <a:effectLst/>
+        </p:spPr>
+        <p:style>
+          <a:lnRef idx="1">
+            <a:schemeClr val="accent1"/>
+          </a:lnRef>
+          <a:fillRef idx="3">
+            <a:schemeClr val="accent1"/>
+          </a:fillRef>
+          <a:effectRef idx="2">
+            <a:schemeClr val="accent1"/>
+          </a:effectRef>
+          <a:fontRef idx="minor">
+            <a:schemeClr val="lt1"/>
+          </a:fontRef>
+        </p:style>
+        <p:txBody>
+          <a:bodyPr rtlCol="0" anchor="ctr"/>
+          <a:lstStyle/>
+          <a:p>
+            <a:pPr algn="ctr"/>
+          </a:p>
+        </p:txBody>
+      </p:sp>
+      <p:sp>
+        <p:nvSpPr>
+          <p:cNvPr id="17" name="TextBox 16"/>
           <p:cNvSpPr txBox="1"/>
           <p:nvPr/>
         </p:nvSpPr>
         <p:spPr>
           <a:xfrm>
-            <a:off x="914400" y="4846320"/>
-            <a:ext cx="10332720" cy="411480"/>
+            <a:off x="914400" y="4343400"/>
+            <a:ext cx="10332720" cy="457200"/>
           </a:xfrm>
           <a:prstGeom prst="rect">
             <a:avLst/>
@@ -5078,9 +6048,9 @@
           <a:p>
             <a:pPr algn="l"/>
             <a:r>
-              <a:rPr sz="1400" b="0" i="0">
-                <a:solidFill>
-                  <a:srgbClr val="5A6478"/>
+              <a:rPr sz="1500" b="1" i="0">
+                <a:solidFill>
+                  <a:srgbClr val="0A0F1E"/>
                 </a:solidFill>
                 <a:latin typeface="Microsoft YaHei"/>
               </a:rPr>
@@ -5091,7 +6061,138 @@
       </p:sp>
       <p:sp>
         <p:nvSpPr>
-          <p:cNvPr id="13" name="TextBox 12"/>
+          <p:cNvPr id="18" name="Rounded Rectangle 17"/>
+          <p:cNvSpPr/>
+          <p:nvPr/>
+        </p:nvSpPr>
+        <p:spPr>
+          <a:xfrm>
+            <a:off x="658368" y="4590288"/>
+            <a:ext cx="10844784" cy="923544"/>
+          </a:xfrm>
+          <a:prstGeom prst="roundRect">
+            <a:avLst>
+              <a:gd name="adj" fmla="val 8000"/>
+            </a:avLst>
+          </a:prstGeom>
+          <a:solidFill>
+            <a:srgbClr val="EEF3FF"/>
+          </a:solidFill>
+          <a:ln w="9525">
+            <a:solidFill>
+              <a:srgbClr val="D6E4FF"/>
+            </a:solidFill>
+          </a:ln>
+          <a:effectLst/>
+        </p:spPr>
+        <p:style>
+          <a:lnRef idx="1">
+            <a:schemeClr val="accent1"/>
+          </a:lnRef>
+          <a:fillRef idx="3">
+            <a:schemeClr val="accent1"/>
+          </a:fillRef>
+          <a:effectRef idx="2">
+            <a:schemeClr val="accent1"/>
+          </a:effectRef>
+          <a:fontRef idx="minor">
+            <a:schemeClr val="lt1"/>
+          </a:fontRef>
+        </p:style>
+        <p:txBody>
+          <a:bodyPr rtlCol="0" anchor="ctr"/>
+          <a:lstStyle/>
+          <a:p>
+            <a:pPr algn="ctr"/>
+          </a:p>
+        </p:txBody>
+      </p:sp>
+      <p:sp>
+        <p:nvSpPr>
+          <p:cNvPr id="19" name="TextBox 18"/>
+          <p:cNvSpPr txBox="1"/>
+          <p:nvPr/>
+        </p:nvSpPr>
+        <p:spPr>
+          <a:xfrm>
+            <a:off x="914400" y="4846320"/>
+            <a:ext cx="10332720" cy="411480"/>
+          </a:xfrm>
+          <a:prstGeom prst="rect">
+            <a:avLst/>
+          </a:prstGeom>
+          <a:noFill/>
+        </p:spPr>
+        <p:txBody>
+          <a:bodyPr wrap="square" lIns="18288" rIns="18288" tIns="9144" bIns="9144" anchor="ctr">
+            <a:spAutoFit/>
+          </a:bodyPr>
+          <a:lstStyle/>
+          <a:p>
+            <a:pPr algn="l"/>
+            <a:r>
+              <a:rPr sz="1400" b="0" i="0">
+                <a:solidFill>
+                  <a:srgbClr val="5A6478"/>
+                </a:solidFill>
+                <a:latin typeface="Microsoft YaHei"/>
+              </a:rPr>
+              <a:t/>
+            </a:r>
+          </a:p>
+        </p:txBody>
+      </p:sp>
+      <p:sp>
+        <p:nvSpPr>
+          <p:cNvPr id="20" name="Rounded Rectangle 19"/>
+          <p:cNvSpPr/>
+          <p:nvPr/>
+        </p:nvSpPr>
+        <p:spPr>
+          <a:xfrm>
+            <a:off x="658368" y="5413248"/>
+            <a:ext cx="10844784" cy="877824"/>
+          </a:xfrm>
+          <a:prstGeom prst="roundRect">
+            <a:avLst>
+              <a:gd name="adj" fmla="val 8000"/>
+            </a:avLst>
+          </a:prstGeom>
+          <a:solidFill>
+            <a:srgbClr val="EEF3FF"/>
+          </a:solidFill>
+          <a:ln w="9525">
+            <a:solidFill>
+              <a:srgbClr val="D6E4FF"/>
+            </a:solidFill>
+          </a:ln>
+          <a:effectLst/>
+        </p:spPr>
+        <p:style>
+          <a:lnRef idx="1">
+            <a:schemeClr val="accent1"/>
+          </a:lnRef>
+          <a:fillRef idx="3">
+            <a:schemeClr val="accent1"/>
+          </a:fillRef>
+          <a:effectRef idx="2">
+            <a:schemeClr val="accent1"/>
+          </a:effectRef>
+          <a:fontRef idx="minor">
+            <a:schemeClr val="lt1"/>
+          </a:fontRef>
+        </p:style>
+        <p:txBody>
+          <a:bodyPr rtlCol="0" anchor="ctr"/>
+          <a:lstStyle/>
+          <a:p>
+            <a:pPr algn="ctr"/>
+          </a:p>
+        </p:txBody>
+      </p:sp>
+      <p:sp>
+        <p:nvSpPr>
+          <p:cNvPr id="21" name="TextBox 20"/>
           <p:cNvSpPr txBox="1"/>
           <p:nvPr/>
         </p:nvSpPr>
@@ -5159,7 +6260,7 @@
         <p:spPr>
           <a:xfrm>
             <a:off x="0" y="0"/>
-            <a:ext cx="118872" cy="6858000"/>
+            <a:ext cx="12191695" cy="109728"/>
           </a:xfrm>
           <a:prstGeom prst="rect">
             <a:avLst/>
@@ -5196,121 +6297,16 @@
       </p:sp>
       <p:sp>
         <p:nvSpPr>
-          <p:cNvPr id="3" name="TextBox 2"/>
-          <p:cNvSpPr txBox="1"/>
-          <p:nvPr/>
-        </p:nvSpPr>
-        <p:spPr>
-          <a:xfrm>
-            <a:off x="457200" y="6419088"/>
-            <a:ext cx="3657600" cy="274320"/>
-          </a:xfrm>
-          <a:prstGeom prst="rect">
-            <a:avLst/>
-          </a:prstGeom>
-          <a:noFill/>
-        </p:spPr>
-        <p:txBody>
-          <a:bodyPr wrap="none">
-            <a:spAutoFit/>
-          </a:bodyPr>
-          <a:lstStyle/>
-          <a:p>
-            <a:pPr algn="l"/>
-            <a:r>
-              <a:rPr sz="900" b="0">
-                <a:solidFill>
-                  <a:srgbClr val="5A6478"/>
-                </a:solidFill>
-                <a:latin typeface="Microsoft YaHei"/>
-              </a:rPr>
-              <a:t>LESSONFORGE 微课</a:t>
-            </a:r>
-          </a:p>
-        </p:txBody>
-      </p:sp>
-      <p:sp>
-        <p:nvSpPr>
-          <p:cNvPr id="4" name="TextBox 3"/>
-          <p:cNvSpPr txBox="1"/>
-          <p:nvPr/>
-        </p:nvSpPr>
-        <p:spPr>
-          <a:xfrm>
-            <a:off x="10607040" y="6419088"/>
-            <a:ext cx="1097280" cy="274320"/>
-          </a:xfrm>
-          <a:prstGeom prst="rect">
-            <a:avLst/>
-          </a:prstGeom>
-          <a:noFill/>
-        </p:spPr>
-        <p:txBody>
-          <a:bodyPr wrap="none">
-            <a:spAutoFit/>
-          </a:bodyPr>
-          <a:lstStyle/>
-          <a:p>
-            <a:pPr algn="r"/>
-            <a:r>
-              <a:rPr sz="1000" b="1">
-                <a:solidFill>
-                  <a:srgbClr val="5A6478"/>
-                </a:solidFill>
-                <a:latin typeface="Microsoft YaHei"/>
-              </a:rPr>
-              <a:t>14</a:t>
-            </a:r>
-          </a:p>
-        </p:txBody>
-      </p:sp>
-      <p:sp>
-        <p:nvSpPr>
-          <p:cNvPr id="5" name="TextBox 4"/>
-          <p:cNvSpPr txBox="1"/>
-          <p:nvPr/>
-        </p:nvSpPr>
-        <p:spPr>
-          <a:xfrm>
-            <a:off x="548640" y="457200"/>
-            <a:ext cx="11064240" cy="777240"/>
-          </a:xfrm>
-          <a:prstGeom prst="rect">
-            <a:avLst/>
-          </a:prstGeom>
-          <a:noFill/>
-        </p:spPr>
-        <p:txBody>
-          <a:bodyPr wrap="square" lIns="18288" rIns="18288" tIns="9144" bIns="9144" anchor="ctr">
-            <a:spAutoFit/>
-          </a:bodyPr>
-          <a:lstStyle/>
-          <a:p>
-            <a:pPr algn="l"/>
-            <a:r>
-              <a:rPr sz="2800" b="1" i="0">
-                <a:solidFill>
-                  <a:srgbClr val="0B3D91"/>
-                </a:solidFill>
-                <a:latin typeface="Microsoft YaHei"/>
-              </a:rPr>
-              <a:t/>
-            </a:r>
-          </a:p>
-        </p:txBody>
-      </p:sp>
-      <p:sp>
-        <p:nvSpPr>
-          <p:cNvPr id="6" name="Rectangle 5"/>
+          <p:cNvPr id="3" name="Oval 2"/>
           <p:cNvSpPr/>
           <p:nvPr/>
         </p:nvSpPr>
         <p:spPr>
           <a:xfrm>
-            <a:off x="566928" y="1298448"/>
-            <a:ext cx="1234440" cy="82296"/>
-          </a:xfrm>
-          <a:prstGeom prst="rect">
+            <a:off x="11521440" y="320040"/>
+            <a:ext cx="457200" cy="457200"/>
+          </a:xfrm>
+          <a:prstGeom prst="ellipse">
             <a:avLst/>
           </a:prstGeom>
           <a:solidFill>
@@ -5345,14 +6341,84 @@
       </p:sp>
       <p:sp>
         <p:nvSpPr>
-          <p:cNvPr id="7" name="TextBox 6"/>
+          <p:cNvPr id="4" name="TextBox 3"/>
           <p:cNvSpPr txBox="1"/>
           <p:nvPr/>
         </p:nvSpPr>
         <p:spPr>
           <a:xfrm>
-            <a:off x="914400" y="1737360"/>
-            <a:ext cx="5486400" cy="457200"/>
+            <a:off x="457200" y="6419088"/>
+            <a:ext cx="3657600" cy="274320"/>
+          </a:xfrm>
+          <a:prstGeom prst="rect">
+            <a:avLst/>
+          </a:prstGeom>
+          <a:noFill/>
+        </p:spPr>
+        <p:txBody>
+          <a:bodyPr wrap="none">
+            <a:spAutoFit/>
+          </a:bodyPr>
+          <a:lstStyle/>
+          <a:p>
+            <a:pPr algn="l"/>
+            <a:r>
+              <a:rPr sz="900" b="0">
+                <a:solidFill>
+                  <a:srgbClr val="5A6478"/>
+                </a:solidFill>
+                <a:latin typeface="Microsoft YaHei"/>
+              </a:rPr>
+              <a:t>LESSONFORGE 微课</a:t>
+            </a:r>
+          </a:p>
+        </p:txBody>
+      </p:sp>
+      <p:sp>
+        <p:nvSpPr>
+          <p:cNvPr id="5" name="TextBox 4"/>
+          <p:cNvSpPr txBox="1"/>
+          <p:nvPr/>
+        </p:nvSpPr>
+        <p:spPr>
+          <a:xfrm>
+            <a:off x="10607040" y="6419088"/>
+            <a:ext cx="1097280" cy="274320"/>
+          </a:xfrm>
+          <a:prstGeom prst="rect">
+            <a:avLst/>
+          </a:prstGeom>
+          <a:noFill/>
+        </p:spPr>
+        <p:txBody>
+          <a:bodyPr wrap="none">
+            <a:spAutoFit/>
+          </a:bodyPr>
+          <a:lstStyle/>
+          <a:p>
+            <a:pPr algn="r"/>
+            <a:r>
+              <a:rPr sz="1000" b="1">
+                <a:solidFill>
+                  <a:srgbClr val="5A6478"/>
+                </a:solidFill>
+                <a:latin typeface="Microsoft YaHei"/>
+              </a:rPr>
+              <a:t>14</a:t>
+            </a:r>
+          </a:p>
+        </p:txBody>
+      </p:sp>
+      <p:sp>
+        <p:nvSpPr>
+          <p:cNvPr id="6" name="TextBox 5"/>
+          <p:cNvSpPr txBox="1"/>
+          <p:nvPr/>
+        </p:nvSpPr>
+        <p:spPr>
+          <a:xfrm>
+            <a:off x="640080" y="548640"/>
+            <a:ext cx="10607040" cy="731520"/>
           </a:xfrm>
           <a:prstGeom prst="rect">
             <a:avLst/>
@@ -5367,7 +6433,7 @@
           <a:p>
             <a:pPr algn="l"/>
             <a:r>
-              <a:rPr sz="1400" b="1" i="0">
+              <a:rPr sz="2800" b="1" i="0">
                 <a:solidFill>
                   <a:srgbClr val="0B3D91"/>
                 </a:solidFill>
@@ -5380,14 +6446,106 @@
       </p:sp>
       <p:sp>
         <p:nvSpPr>
-          <p:cNvPr id="8" name="TextBox 7"/>
+          <p:cNvPr id="7" name="Rectangle 6"/>
+          <p:cNvSpPr/>
+          <p:nvPr/>
+        </p:nvSpPr>
+        <p:spPr>
+          <a:xfrm>
+            <a:off x="667512" y="1353312"/>
+            <a:ext cx="1234440" cy="73152"/>
+          </a:xfrm>
+          <a:prstGeom prst="rect">
+            <a:avLst/>
+          </a:prstGeom>
+          <a:solidFill>
+            <a:srgbClr val="D6E4FF"/>
+          </a:solidFill>
+          <a:ln>
+            <a:noFill/>
+          </a:ln>
+          <a:effectLst/>
+        </p:spPr>
+        <p:style>
+          <a:lnRef idx="1">
+            <a:schemeClr val="accent1"/>
+          </a:lnRef>
+          <a:fillRef idx="3">
+            <a:schemeClr val="accent1"/>
+          </a:fillRef>
+          <a:effectRef idx="2">
+            <a:schemeClr val="accent1"/>
+          </a:effectRef>
+          <a:fontRef idx="minor">
+            <a:schemeClr val="lt1"/>
+          </a:fontRef>
+        </p:style>
+        <p:txBody>
+          <a:bodyPr rtlCol="0" anchor="ctr"/>
+          <a:lstStyle/>
+          <a:p>
+            <a:pPr algn="ctr"/>
+          </a:p>
+        </p:txBody>
+      </p:sp>
+      <p:sp>
+        <p:nvSpPr>
+          <p:cNvPr id="8" name="Rounded Rectangle 7"/>
+          <p:cNvSpPr/>
+          <p:nvPr/>
+        </p:nvSpPr>
+        <p:spPr>
+          <a:xfrm>
+            <a:off x="658368" y="1481328"/>
+            <a:ext cx="5998464" cy="969264"/>
+          </a:xfrm>
+          <a:prstGeom prst="roundRect">
+            <a:avLst>
+              <a:gd name="adj" fmla="val 8000"/>
+            </a:avLst>
+          </a:prstGeom>
+          <a:solidFill>
+            <a:srgbClr val="EEF3FF"/>
+          </a:solidFill>
+          <a:ln w="9525">
+            <a:solidFill>
+              <a:srgbClr val="D6E4FF"/>
+            </a:solidFill>
+          </a:ln>
+          <a:effectLst/>
+        </p:spPr>
+        <p:style>
+          <a:lnRef idx="1">
+            <a:schemeClr val="accent1"/>
+          </a:lnRef>
+          <a:fillRef idx="3">
+            <a:schemeClr val="accent1"/>
+          </a:fillRef>
+          <a:effectRef idx="2">
+            <a:schemeClr val="accent1"/>
+          </a:effectRef>
+          <a:fontRef idx="minor">
+            <a:schemeClr val="lt1"/>
+          </a:fontRef>
+        </p:style>
+        <p:txBody>
+          <a:bodyPr rtlCol="0" anchor="ctr"/>
+          <a:lstStyle/>
+          <a:p>
+            <a:pPr algn="ctr"/>
+          </a:p>
+        </p:txBody>
+      </p:sp>
+      <p:sp>
+        <p:nvSpPr>
+          <p:cNvPr id="9" name="TextBox 8"/>
           <p:cNvSpPr txBox="1"/>
           <p:nvPr/>
         </p:nvSpPr>
         <p:spPr>
           <a:xfrm>
-            <a:off x="914400" y="2286000"/>
-            <a:ext cx="10332720" cy="914400"/>
+            <a:off x="914400" y="1737360"/>
+            <a:ext cx="5486400" cy="457200"/>
           </a:xfrm>
           <a:prstGeom prst="rect">
             <a:avLst/>
@@ -5402,9 +6560,9 @@
           <a:p>
             <a:pPr algn="l"/>
             <a:r>
-              <a:rPr sz="1700" b="1" i="0">
-                <a:solidFill>
-                  <a:srgbClr val="0A0F1E"/>
+              <a:rPr sz="1400" b="1" i="0">
+                <a:solidFill>
+                  <a:srgbClr val="0B3D91"/>
                 </a:solidFill>
                 <a:latin typeface="Microsoft YaHei"/>
               </a:rPr>
@@ -5415,14 +6573,62 @@
       </p:sp>
       <p:sp>
         <p:nvSpPr>
-          <p:cNvPr id="9" name="TextBox 8"/>
+          <p:cNvPr id="10" name="Rounded Rectangle 9"/>
+          <p:cNvSpPr/>
+          <p:nvPr/>
+        </p:nvSpPr>
+        <p:spPr>
+          <a:xfrm>
+            <a:off x="658368" y="2029967"/>
+            <a:ext cx="10844784" cy="1426464"/>
+          </a:xfrm>
+          <a:prstGeom prst="roundRect">
+            <a:avLst>
+              <a:gd name="adj" fmla="val 8000"/>
+            </a:avLst>
+          </a:prstGeom>
+          <a:solidFill>
+            <a:srgbClr val="EEF3FF"/>
+          </a:solidFill>
+          <a:ln w="9525">
+            <a:solidFill>
+              <a:srgbClr val="D6E4FF"/>
+            </a:solidFill>
+          </a:ln>
+          <a:effectLst/>
+        </p:spPr>
+        <p:style>
+          <a:lnRef idx="1">
+            <a:schemeClr val="accent1"/>
+          </a:lnRef>
+          <a:fillRef idx="3">
+            <a:schemeClr val="accent1"/>
+          </a:fillRef>
+          <a:effectRef idx="2">
+            <a:schemeClr val="accent1"/>
+          </a:effectRef>
+          <a:fontRef idx="minor">
+            <a:schemeClr val="lt1"/>
+          </a:fontRef>
+        </p:style>
+        <p:txBody>
+          <a:bodyPr rtlCol="0" anchor="ctr"/>
+          <a:lstStyle/>
+          <a:p>
+            <a:pPr algn="ctr"/>
+          </a:p>
+        </p:txBody>
+      </p:sp>
+      <p:sp>
+        <p:nvSpPr>
+          <p:cNvPr id="11" name="TextBox 10"/>
           <p:cNvSpPr txBox="1"/>
           <p:nvPr/>
         </p:nvSpPr>
         <p:spPr>
           <a:xfrm>
-            <a:off x="914400" y="3611880"/>
-            <a:ext cx="5029200" cy="685800"/>
+            <a:off x="914400" y="2286000"/>
+            <a:ext cx="10332720" cy="914400"/>
           </a:xfrm>
           <a:prstGeom prst="rect">
             <a:avLst/>
@@ -5437,7 +6643,7 @@
           <a:p>
             <a:pPr algn="l"/>
             <a:r>
-              <a:rPr sz="1600" b="0" i="0">
+              <a:rPr sz="1700" b="1" i="0">
                 <a:solidFill>
                   <a:srgbClr val="0A0F1E"/>
                 </a:solidFill>
@@ -5450,14 +6656,62 @@
       </p:sp>
       <p:sp>
         <p:nvSpPr>
-          <p:cNvPr id="10" name="TextBox 9"/>
+          <p:cNvPr id="12" name="Rounded Rectangle 11"/>
+          <p:cNvSpPr/>
+          <p:nvPr/>
+        </p:nvSpPr>
+        <p:spPr>
+          <a:xfrm>
+            <a:off x="658368" y="3218687"/>
+            <a:ext cx="5541264" cy="1700784"/>
+          </a:xfrm>
+          <a:prstGeom prst="roundRect">
+            <a:avLst>
+              <a:gd name="adj" fmla="val 8000"/>
+            </a:avLst>
+          </a:prstGeom>
+          <a:solidFill>
+            <a:srgbClr val="EEF3FF"/>
+          </a:solidFill>
+          <a:ln w="9525">
+            <a:solidFill>
+              <a:srgbClr val="D6E4FF"/>
+            </a:solidFill>
+          </a:ln>
+          <a:effectLst/>
+        </p:spPr>
+        <p:style>
+          <a:lnRef idx="1">
+            <a:schemeClr val="accent1"/>
+          </a:lnRef>
+          <a:fillRef idx="3">
+            <a:schemeClr val="accent1"/>
+          </a:fillRef>
+          <a:effectRef idx="2">
+            <a:schemeClr val="accent1"/>
+          </a:effectRef>
+          <a:fontRef idx="minor">
+            <a:schemeClr val="lt1"/>
+          </a:fontRef>
+        </p:style>
+        <p:txBody>
+          <a:bodyPr rtlCol="0" anchor="ctr"/>
+          <a:lstStyle/>
+          <a:p>
+            <a:pPr algn="ctr"/>
+          </a:p>
+        </p:txBody>
+      </p:sp>
+      <p:sp>
+        <p:nvSpPr>
+          <p:cNvPr id="13" name="TextBox 12"/>
           <p:cNvSpPr txBox="1"/>
           <p:nvPr/>
         </p:nvSpPr>
         <p:spPr>
           <a:xfrm>
-            <a:off x="6217920" y="3611880"/>
-            <a:ext cx="5029200" cy="685800"/>
+            <a:off x="914400" y="3474720"/>
+            <a:ext cx="5029200" cy="1188720"/>
           </a:xfrm>
           <a:prstGeom prst="rect">
             <a:avLst/>
@@ -5485,14 +6739,62 @@
       </p:sp>
       <p:sp>
         <p:nvSpPr>
-          <p:cNvPr id="11" name="TextBox 10"/>
+          <p:cNvPr id="14" name="Rounded Rectangle 13"/>
+          <p:cNvSpPr/>
+          <p:nvPr/>
+        </p:nvSpPr>
+        <p:spPr>
+          <a:xfrm>
+            <a:off x="5961888" y="3218687"/>
+            <a:ext cx="5541264" cy="1700784"/>
+          </a:xfrm>
+          <a:prstGeom prst="roundRect">
+            <a:avLst>
+              <a:gd name="adj" fmla="val 8000"/>
+            </a:avLst>
+          </a:prstGeom>
+          <a:solidFill>
+            <a:srgbClr val="EEF3FF"/>
+          </a:solidFill>
+          <a:ln w="9525">
+            <a:solidFill>
+              <a:srgbClr val="D6E4FF"/>
+            </a:solidFill>
+          </a:ln>
+          <a:effectLst/>
+        </p:spPr>
+        <p:style>
+          <a:lnRef idx="1">
+            <a:schemeClr val="accent1"/>
+          </a:lnRef>
+          <a:fillRef idx="3">
+            <a:schemeClr val="accent1"/>
+          </a:fillRef>
+          <a:effectRef idx="2">
+            <a:schemeClr val="accent1"/>
+          </a:effectRef>
+          <a:fontRef idx="minor">
+            <a:schemeClr val="lt1"/>
+          </a:fontRef>
+        </p:style>
+        <p:txBody>
+          <a:bodyPr rtlCol="0" anchor="ctr"/>
+          <a:lstStyle/>
+          <a:p>
+            <a:pPr algn="ctr"/>
+          </a:p>
+        </p:txBody>
+      </p:sp>
+      <p:sp>
+        <p:nvSpPr>
+          <p:cNvPr id="15" name="TextBox 14"/>
           <p:cNvSpPr txBox="1"/>
           <p:nvPr/>
         </p:nvSpPr>
         <p:spPr>
           <a:xfrm>
-            <a:off x="914400" y="4434840"/>
-            <a:ext cx="5029200" cy="685800"/>
+            <a:off x="6217920" y="3474720"/>
+            <a:ext cx="5029200" cy="1188720"/>
           </a:xfrm>
           <a:prstGeom prst="rect">
             <a:avLst/>
@@ -5520,14 +6822,145 @@
       </p:sp>
       <p:sp>
         <p:nvSpPr>
-          <p:cNvPr id="12" name="TextBox 11"/>
+          <p:cNvPr id="16" name="Rounded Rectangle 15"/>
+          <p:cNvSpPr/>
+          <p:nvPr/>
+        </p:nvSpPr>
+        <p:spPr>
+          <a:xfrm>
+            <a:off x="658368" y="4681728"/>
+            <a:ext cx="5541264" cy="1700784"/>
+          </a:xfrm>
+          <a:prstGeom prst="roundRect">
+            <a:avLst>
+              <a:gd name="adj" fmla="val 8000"/>
+            </a:avLst>
+          </a:prstGeom>
+          <a:solidFill>
+            <a:srgbClr val="EEF3FF"/>
+          </a:solidFill>
+          <a:ln w="9525">
+            <a:solidFill>
+              <a:srgbClr val="D6E4FF"/>
+            </a:solidFill>
+          </a:ln>
+          <a:effectLst/>
+        </p:spPr>
+        <p:style>
+          <a:lnRef idx="1">
+            <a:schemeClr val="accent1"/>
+          </a:lnRef>
+          <a:fillRef idx="3">
+            <a:schemeClr val="accent1"/>
+          </a:fillRef>
+          <a:effectRef idx="2">
+            <a:schemeClr val="accent1"/>
+          </a:effectRef>
+          <a:fontRef idx="minor">
+            <a:schemeClr val="lt1"/>
+          </a:fontRef>
+        </p:style>
+        <p:txBody>
+          <a:bodyPr rtlCol="0" anchor="ctr"/>
+          <a:lstStyle/>
+          <a:p>
+            <a:pPr algn="ctr"/>
+          </a:p>
+        </p:txBody>
+      </p:sp>
+      <p:sp>
+        <p:nvSpPr>
+          <p:cNvPr id="17" name="TextBox 16"/>
           <p:cNvSpPr txBox="1"/>
           <p:nvPr/>
         </p:nvSpPr>
         <p:spPr>
           <a:xfrm>
-            <a:off x="6217920" y="4434840"/>
-            <a:ext cx="5029200" cy="685800"/>
+            <a:off x="914400" y="4937760"/>
+            <a:ext cx="5029200" cy="1188720"/>
+          </a:xfrm>
+          <a:prstGeom prst="rect">
+            <a:avLst/>
+          </a:prstGeom>
+          <a:noFill/>
+        </p:spPr>
+        <p:txBody>
+          <a:bodyPr wrap="square" lIns="18288" rIns="18288" tIns="9144" bIns="9144" anchor="ctr">
+            <a:spAutoFit/>
+          </a:bodyPr>
+          <a:lstStyle/>
+          <a:p>
+            <a:pPr algn="l"/>
+            <a:r>
+              <a:rPr sz="1600" b="0" i="0">
+                <a:solidFill>
+                  <a:srgbClr val="0A0F1E"/>
+                </a:solidFill>
+                <a:latin typeface="Microsoft YaHei"/>
+              </a:rPr>
+              <a:t/>
+            </a:r>
+          </a:p>
+        </p:txBody>
+      </p:sp>
+      <p:sp>
+        <p:nvSpPr>
+          <p:cNvPr id="18" name="Rounded Rectangle 17"/>
+          <p:cNvSpPr/>
+          <p:nvPr/>
+        </p:nvSpPr>
+        <p:spPr>
+          <a:xfrm>
+            <a:off x="5961888" y="4681728"/>
+            <a:ext cx="5541264" cy="1700784"/>
+          </a:xfrm>
+          <a:prstGeom prst="roundRect">
+            <a:avLst>
+              <a:gd name="adj" fmla="val 8000"/>
+            </a:avLst>
+          </a:prstGeom>
+          <a:solidFill>
+            <a:srgbClr val="EEF3FF"/>
+          </a:solidFill>
+          <a:ln w="9525">
+            <a:solidFill>
+              <a:srgbClr val="D6E4FF"/>
+            </a:solidFill>
+          </a:ln>
+          <a:effectLst/>
+        </p:spPr>
+        <p:style>
+          <a:lnRef idx="1">
+            <a:schemeClr val="accent1"/>
+          </a:lnRef>
+          <a:fillRef idx="3">
+            <a:schemeClr val="accent1"/>
+          </a:fillRef>
+          <a:effectRef idx="2">
+            <a:schemeClr val="accent1"/>
+          </a:effectRef>
+          <a:fontRef idx="minor">
+            <a:schemeClr val="lt1"/>
+          </a:fontRef>
+        </p:style>
+        <p:txBody>
+          <a:bodyPr rtlCol="0" anchor="ctr"/>
+          <a:lstStyle/>
+          <a:p>
+            <a:pPr algn="ctr"/>
+          </a:p>
+        </p:txBody>
+      </p:sp>
+      <p:sp>
+        <p:nvSpPr>
+          <p:cNvPr id="19" name="TextBox 18"/>
+          <p:cNvSpPr txBox="1"/>
+          <p:nvPr/>
+        </p:nvSpPr>
+        <p:spPr>
+          <a:xfrm>
+            <a:off x="6217920" y="4937760"/>
+            <a:ext cx="5029200" cy="1188720"/>
           </a:xfrm>
           <a:prstGeom prst="rect">
             <a:avLst/>
@@ -5581,16 +7014,16 @@
       <p:grpSpPr/>
       <p:sp>
         <p:nvSpPr>
-          <p:cNvPr id="2" name="Oval 1"/>
+          <p:cNvPr id="2" name="Rectangle 1"/>
           <p:cNvSpPr/>
           <p:nvPr/>
         </p:nvSpPr>
         <p:spPr>
           <a:xfrm>
-            <a:off x="-1463040" y="4389120"/>
-            <a:ext cx="4572000" cy="4572000"/>
-          </a:xfrm>
-          <a:prstGeom prst="ellipse">
+            <a:off x="0" y="0"/>
+            <a:ext cx="12191695" cy="91440"/>
+          </a:xfrm>
+          <a:prstGeom prst="rect">
             <a:avLst/>
           </a:prstGeom>
           <a:solidFill>
@@ -5625,14 +7058,58 @@
       </p:sp>
       <p:sp>
         <p:nvSpPr>
-          <p:cNvPr id="3" name="TextBox 2"/>
+          <p:cNvPr id="3" name="Oval 2"/>
+          <p:cNvSpPr/>
+          <p:nvPr/>
+        </p:nvSpPr>
+        <p:spPr>
+          <a:xfrm>
+            <a:off x="10424160" y="-1280160"/>
+            <a:ext cx="3291840" cy="3291840"/>
+          </a:xfrm>
+          <a:prstGeom prst="ellipse">
+            <a:avLst/>
+          </a:prstGeom>
+          <a:solidFill>
+            <a:srgbClr val="D6E4FF"/>
+          </a:solidFill>
+          <a:ln>
+            <a:noFill/>
+          </a:ln>
+          <a:effectLst/>
+        </p:spPr>
+        <p:style>
+          <a:lnRef idx="1">
+            <a:schemeClr val="accent1"/>
+          </a:lnRef>
+          <a:fillRef idx="3">
+            <a:schemeClr val="accent1"/>
+          </a:fillRef>
+          <a:effectRef idx="2">
+            <a:schemeClr val="accent1"/>
+          </a:effectRef>
+          <a:fontRef idx="minor">
+            <a:schemeClr val="lt1"/>
+          </a:fontRef>
+        </p:style>
+        <p:txBody>
+          <a:bodyPr rtlCol="0" anchor="ctr"/>
+          <a:lstStyle/>
+          <a:p>
+            <a:pPr algn="ctr"/>
+          </a:p>
+        </p:txBody>
+      </p:sp>
+      <p:sp>
+        <p:nvSpPr>
+          <p:cNvPr id="4" name="TextBox 3"/>
           <p:cNvSpPr txBox="1"/>
           <p:nvPr/>
         </p:nvSpPr>
         <p:spPr>
           <a:xfrm>
-            <a:off x="868680" y="6263640"/>
-            <a:ext cx="5486400" cy="365760"/>
+            <a:off x="868680" y="6309360"/>
+            <a:ext cx="3657600" cy="365760"/>
           </a:xfrm>
           <a:prstGeom prst="rect">
             <a:avLst/>
@@ -5660,14 +7137,14 @@
       </p:sp>
       <p:sp>
         <p:nvSpPr>
-          <p:cNvPr id="4" name="TextBox 3"/>
+          <p:cNvPr id="5" name="TextBox 4"/>
           <p:cNvSpPr txBox="1"/>
           <p:nvPr/>
         </p:nvSpPr>
         <p:spPr>
           <a:xfrm>
-            <a:off x="914400" y="2011680"/>
-            <a:ext cx="10332720" cy="1188720"/>
+            <a:off x="1097280" y="2194560"/>
+            <a:ext cx="10058400" cy="1188720"/>
           </a:xfrm>
           <a:prstGeom prst="rect">
             <a:avLst/>
@@ -5695,14 +7172,14 @@
       </p:sp>
       <p:sp>
         <p:nvSpPr>
-          <p:cNvPr id="5" name="TextBox 4"/>
+          <p:cNvPr id="6" name="TextBox 5"/>
           <p:cNvSpPr txBox="1"/>
           <p:nvPr/>
         </p:nvSpPr>
         <p:spPr>
           <a:xfrm>
-            <a:off x="914400" y="3474720"/>
-            <a:ext cx="10332720" cy="822960"/>
+            <a:off x="1097280" y="3611880"/>
+            <a:ext cx="10058400" cy="731520"/>
           </a:xfrm>
           <a:prstGeom prst="rect">
             <a:avLst/>
@@ -5719,7 +7196,7 @@
             <a:r>
               <a:rPr sz="2000" b="0" i="0">
                 <a:solidFill>
-                  <a:srgbClr val="FFFFFF"/>
+                  <a:srgbClr val="D6E4FF"/>
                 </a:solidFill>
                 <a:latin typeface="Microsoft YaHei"/>
               </a:rPr>
@@ -5763,7 +7240,7 @@
         <p:spPr>
           <a:xfrm>
             <a:off x="0" y="0"/>
-            <a:ext cx="118872" cy="6858000"/>
+            <a:ext cx="12191695" cy="109728"/>
           </a:xfrm>
           <a:prstGeom prst="rect">
             <a:avLst/>
@@ -5800,121 +7277,16 @@
       </p:sp>
       <p:sp>
         <p:nvSpPr>
-          <p:cNvPr id="3" name="TextBox 2"/>
-          <p:cNvSpPr txBox="1"/>
-          <p:nvPr/>
-        </p:nvSpPr>
-        <p:spPr>
-          <a:xfrm>
-            <a:off x="457200" y="6419088"/>
-            <a:ext cx="3657600" cy="274320"/>
-          </a:xfrm>
-          <a:prstGeom prst="rect">
-            <a:avLst/>
-          </a:prstGeom>
-          <a:noFill/>
-        </p:spPr>
-        <p:txBody>
-          <a:bodyPr wrap="none">
-            <a:spAutoFit/>
-          </a:bodyPr>
-          <a:lstStyle/>
-          <a:p>
-            <a:pPr algn="l"/>
-            <a:r>
-              <a:rPr sz="900" b="0">
-                <a:solidFill>
-                  <a:srgbClr val="5A6478"/>
-                </a:solidFill>
-                <a:latin typeface="Microsoft YaHei"/>
-              </a:rPr>
-              <a:t>LESSONFORGE 微课</a:t>
-            </a:r>
-          </a:p>
-        </p:txBody>
-      </p:sp>
-      <p:sp>
-        <p:nvSpPr>
-          <p:cNvPr id="4" name="TextBox 3"/>
-          <p:cNvSpPr txBox="1"/>
-          <p:nvPr/>
-        </p:nvSpPr>
-        <p:spPr>
-          <a:xfrm>
-            <a:off x="10607040" y="6419088"/>
-            <a:ext cx="1097280" cy="274320"/>
-          </a:xfrm>
-          <a:prstGeom prst="rect">
-            <a:avLst/>
-          </a:prstGeom>
-          <a:noFill/>
-        </p:spPr>
-        <p:txBody>
-          <a:bodyPr wrap="none">
-            <a:spAutoFit/>
-          </a:bodyPr>
-          <a:lstStyle/>
-          <a:p>
-            <a:pPr algn="r"/>
-            <a:r>
-              <a:rPr sz="1000" b="1">
-                <a:solidFill>
-                  <a:srgbClr val="5A6478"/>
-                </a:solidFill>
-                <a:latin typeface="Microsoft YaHei"/>
-              </a:rPr>
-              <a:t>02</a:t>
-            </a:r>
-          </a:p>
-        </p:txBody>
-      </p:sp>
-      <p:sp>
-        <p:nvSpPr>
-          <p:cNvPr id="5" name="TextBox 4"/>
-          <p:cNvSpPr txBox="1"/>
-          <p:nvPr/>
-        </p:nvSpPr>
-        <p:spPr>
-          <a:xfrm>
-            <a:off x="548640" y="457200"/>
-            <a:ext cx="11064240" cy="777240"/>
-          </a:xfrm>
-          <a:prstGeom prst="rect">
-            <a:avLst/>
-          </a:prstGeom>
-          <a:noFill/>
-        </p:spPr>
-        <p:txBody>
-          <a:bodyPr wrap="square" lIns="18288" rIns="18288" tIns="9144" bIns="9144" anchor="ctr">
-            <a:spAutoFit/>
-          </a:bodyPr>
-          <a:lstStyle/>
-          <a:p>
-            <a:pPr algn="l"/>
-            <a:r>
-              <a:rPr sz="2800" b="1" i="0">
-                <a:solidFill>
-                  <a:srgbClr val="0B3D91"/>
-                </a:solidFill>
-                <a:latin typeface="Microsoft YaHei"/>
-              </a:rPr>
-              <a:t/>
-            </a:r>
-          </a:p>
-        </p:txBody>
-      </p:sp>
-      <p:sp>
-        <p:nvSpPr>
-          <p:cNvPr id="6" name="Rectangle 5"/>
+          <p:cNvPr id="3" name="Oval 2"/>
           <p:cNvSpPr/>
           <p:nvPr/>
         </p:nvSpPr>
         <p:spPr>
           <a:xfrm>
-            <a:off x="566928" y="1298448"/>
-            <a:ext cx="1234440" cy="82296"/>
-          </a:xfrm>
-          <a:prstGeom prst="rect">
+            <a:off x="11521440" y="320040"/>
+            <a:ext cx="457200" cy="457200"/>
+          </a:xfrm>
+          <a:prstGeom prst="ellipse">
             <a:avLst/>
           </a:prstGeom>
           <a:solidFill>
@@ -5949,14 +7321,84 @@
       </p:sp>
       <p:sp>
         <p:nvSpPr>
-          <p:cNvPr id="7" name="TextBox 6"/>
+          <p:cNvPr id="4" name="TextBox 3"/>
           <p:cNvSpPr txBox="1"/>
           <p:nvPr/>
         </p:nvSpPr>
         <p:spPr>
           <a:xfrm>
-            <a:off x="594360" y="1645920"/>
-            <a:ext cx="10972800" cy="960120"/>
+            <a:off x="457200" y="6419088"/>
+            <a:ext cx="3657600" cy="274320"/>
+          </a:xfrm>
+          <a:prstGeom prst="rect">
+            <a:avLst/>
+          </a:prstGeom>
+          <a:noFill/>
+        </p:spPr>
+        <p:txBody>
+          <a:bodyPr wrap="none">
+            <a:spAutoFit/>
+          </a:bodyPr>
+          <a:lstStyle/>
+          <a:p>
+            <a:pPr algn="l"/>
+            <a:r>
+              <a:rPr sz="900" b="0">
+                <a:solidFill>
+                  <a:srgbClr val="5A6478"/>
+                </a:solidFill>
+                <a:latin typeface="Microsoft YaHei"/>
+              </a:rPr>
+              <a:t>LESSONFORGE 微课</a:t>
+            </a:r>
+          </a:p>
+        </p:txBody>
+      </p:sp>
+      <p:sp>
+        <p:nvSpPr>
+          <p:cNvPr id="5" name="TextBox 4"/>
+          <p:cNvSpPr txBox="1"/>
+          <p:nvPr/>
+        </p:nvSpPr>
+        <p:spPr>
+          <a:xfrm>
+            <a:off x="10607040" y="6419088"/>
+            <a:ext cx="1097280" cy="274320"/>
+          </a:xfrm>
+          <a:prstGeom prst="rect">
+            <a:avLst/>
+          </a:prstGeom>
+          <a:noFill/>
+        </p:spPr>
+        <p:txBody>
+          <a:bodyPr wrap="none">
+            <a:spAutoFit/>
+          </a:bodyPr>
+          <a:lstStyle/>
+          <a:p>
+            <a:pPr algn="r"/>
+            <a:r>
+              <a:rPr sz="1000" b="1">
+                <a:solidFill>
+                  <a:srgbClr val="5A6478"/>
+                </a:solidFill>
+                <a:latin typeface="Microsoft YaHei"/>
+              </a:rPr>
+              <a:t>02</a:t>
+            </a:r>
+          </a:p>
+        </p:txBody>
+      </p:sp>
+      <p:sp>
+        <p:nvSpPr>
+          <p:cNvPr id="6" name="TextBox 5"/>
+          <p:cNvSpPr txBox="1"/>
+          <p:nvPr/>
+        </p:nvSpPr>
+        <p:spPr>
+          <a:xfrm>
+            <a:off x="640080" y="548640"/>
+            <a:ext cx="10607040" cy="731520"/>
           </a:xfrm>
           <a:prstGeom prst="rect">
             <a:avLst/>
@@ -5971,7 +7413,7 @@
           <a:p>
             <a:pPr algn="l"/>
             <a:r>
-              <a:rPr sz="1800" b="1" i="0">
+              <a:rPr sz="2800" b="1" i="0">
                 <a:solidFill>
                   <a:srgbClr val="0B3D91"/>
                 </a:solidFill>
@@ -5984,14 +7426,106 @@
       </p:sp>
       <p:sp>
         <p:nvSpPr>
-          <p:cNvPr id="8" name="TextBox 7"/>
+          <p:cNvPr id="7" name="Rectangle 6"/>
+          <p:cNvSpPr/>
+          <p:nvPr/>
+        </p:nvSpPr>
+        <p:spPr>
+          <a:xfrm>
+            <a:off x="667512" y="1353312"/>
+            <a:ext cx="1234440" cy="73152"/>
+          </a:xfrm>
+          <a:prstGeom prst="rect">
+            <a:avLst/>
+          </a:prstGeom>
+          <a:solidFill>
+            <a:srgbClr val="D6E4FF"/>
+          </a:solidFill>
+          <a:ln>
+            <a:noFill/>
+          </a:ln>
+          <a:effectLst/>
+        </p:spPr>
+        <p:style>
+          <a:lnRef idx="1">
+            <a:schemeClr val="accent1"/>
+          </a:lnRef>
+          <a:fillRef idx="3">
+            <a:schemeClr val="accent1"/>
+          </a:fillRef>
+          <a:effectRef idx="2">
+            <a:schemeClr val="accent1"/>
+          </a:effectRef>
+          <a:fontRef idx="minor">
+            <a:schemeClr val="lt1"/>
+          </a:fontRef>
+        </p:style>
+        <p:txBody>
+          <a:bodyPr rtlCol="0" anchor="ctr"/>
+          <a:lstStyle/>
+          <a:p>
+            <a:pPr algn="ctr"/>
+          </a:p>
+        </p:txBody>
+      </p:sp>
+      <p:sp>
+        <p:nvSpPr>
+          <p:cNvPr id="8" name="Rounded Rectangle 7"/>
+          <p:cNvSpPr/>
+          <p:nvPr/>
+        </p:nvSpPr>
+        <p:spPr>
+          <a:xfrm>
+            <a:off x="384047" y="1435608"/>
+            <a:ext cx="11484864" cy="1426464"/>
+          </a:xfrm>
+          <a:prstGeom prst="roundRect">
+            <a:avLst>
+              <a:gd name="adj" fmla="val 8000"/>
+            </a:avLst>
+          </a:prstGeom>
+          <a:solidFill>
+            <a:srgbClr val="EEF3FF"/>
+          </a:solidFill>
+          <a:ln w="9525">
+            <a:solidFill>
+              <a:srgbClr val="D6E4FF"/>
+            </a:solidFill>
+          </a:ln>
+          <a:effectLst/>
+        </p:spPr>
+        <p:style>
+          <a:lnRef idx="1">
+            <a:schemeClr val="accent1"/>
+          </a:lnRef>
+          <a:fillRef idx="3">
+            <a:schemeClr val="accent1"/>
+          </a:fillRef>
+          <a:effectRef idx="2">
+            <a:schemeClr val="accent1"/>
+          </a:effectRef>
+          <a:fontRef idx="minor">
+            <a:schemeClr val="lt1"/>
+          </a:fontRef>
+        </p:style>
+        <p:txBody>
+          <a:bodyPr rtlCol="0" anchor="ctr"/>
+          <a:lstStyle/>
+          <a:p>
+            <a:pPr algn="ctr"/>
+          </a:p>
+        </p:txBody>
+      </p:sp>
+      <p:sp>
+        <p:nvSpPr>
+          <p:cNvPr id="9" name="TextBox 8"/>
           <p:cNvSpPr txBox="1"/>
           <p:nvPr/>
         </p:nvSpPr>
         <p:spPr>
           <a:xfrm>
-            <a:off x="594360" y="2788920"/>
-            <a:ext cx="10972800" cy="566928"/>
+            <a:off x="640080" y="1691640"/>
+            <a:ext cx="10972800" cy="914400"/>
           </a:xfrm>
           <a:prstGeom prst="rect">
             <a:avLst/>
@@ -6006,9 +7540,9 @@
           <a:p>
             <a:pPr algn="l"/>
             <a:r>
-              <a:rPr sz="1600" b="0" i="0">
-                <a:solidFill>
-                  <a:srgbClr val="0A0F1E"/>
+              <a:rPr sz="1800" b="1" i="0">
+                <a:solidFill>
+                  <a:srgbClr val="0B3D91"/>
                 </a:solidFill>
                 <a:latin typeface="Microsoft YaHei"/>
               </a:rPr>
@@ -6019,14 +7553,62 @@
       </p:sp>
       <p:sp>
         <p:nvSpPr>
-          <p:cNvPr id="9" name="TextBox 8"/>
+          <p:cNvPr id="10" name="Rounded Rectangle 9"/>
+          <p:cNvSpPr/>
+          <p:nvPr/>
+        </p:nvSpPr>
+        <p:spPr>
+          <a:xfrm>
+            <a:off x="384047" y="2578608"/>
+            <a:ext cx="5861304" cy="1975104"/>
+          </a:xfrm>
+          <a:prstGeom prst="roundRect">
+            <a:avLst>
+              <a:gd name="adj" fmla="val 8000"/>
+            </a:avLst>
+          </a:prstGeom>
+          <a:solidFill>
+            <a:srgbClr val="EEF3FF"/>
+          </a:solidFill>
+          <a:ln w="9525">
+            <a:solidFill>
+              <a:srgbClr val="D6E4FF"/>
+            </a:solidFill>
+          </a:ln>
+          <a:effectLst/>
+        </p:spPr>
+        <p:style>
+          <a:lnRef idx="1">
+            <a:schemeClr val="accent1"/>
+          </a:lnRef>
+          <a:fillRef idx="3">
+            <a:schemeClr val="accent1"/>
+          </a:fillRef>
+          <a:effectRef idx="2">
+            <a:schemeClr val="accent1"/>
+          </a:effectRef>
+          <a:fontRef idx="minor">
+            <a:schemeClr val="lt1"/>
+          </a:fontRef>
+        </p:style>
+        <p:txBody>
+          <a:bodyPr rtlCol="0" anchor="ctr"/>
+          <a:lstStyle/>
+          <a:p>
+            <a:pPr algn="ctr"/>
+          </a:p>
+        </p:txBody>
+      </p:sp>
+      <p:sp>
+        <p:nvSpPr>
+          <p:cNvPr id="11" name="TextBox 10"/>
           <p:cNvSpPr txBox="1"/>
           <p:nvPr/>
         </p:nvSpPr>
         <p:spPr>
           <a:xfrm>
-            <a:off x="594360" y="3447288"/>
-            <a:ext cx="10972800" cy="566928"/>
+            <a:off x="640080" y="2834640"/>
+            <a:ext cx="5349240" cy="1463040"/>
           </a:xfrm>
           <a:prstGeom prst="rect">
             <a:avLst/>
@@ -6054,14 +7636,62 @@
       </p:sp>
       <p:sp>
         <p:nvSpPr>
-          <p:cNvPr id="10" name="TextBox 9"/>
+          <p:cNvPr id="12" name="Rounded Rectangle 11"/>
+          <p:cNvSpPr/>
+          <p:nvPr/>
+        </p:nvSpPr>
+        <p:spPr>
+          <a:xfrm>
+            <a:off x="6053327" y="2578608"/>
+            <a:ext cx="5861304" cy="1975104"/>
+          </a:xfrm>
+          <a:prstGeom prst="roundRect">
+            <a:avLst>
+              <a:gd name="adj" fmla="val 8000"/>
+            </a:avLst>
+          </a:prstGeom>
+          <a:solidFill>
+            <a:srgbClr val="EEF3FF"/>
+          </a:solidFill>
+          <a:ln w="9525">
+            <a:solidFill>
+              <a:srgbClr val="D6E4FF"/>
+            </a:solidFill>
+          </a:ln>
+          <a:effectLst/>
+        </p:spPr>
+        <p:style>
+          <a:lnRef idx="1">
+            <a:schemeClr val="accent1"/>
+          </a:lnRef>
+          <a:fillRef idx="3">
+            <a:schemeClr val="accent1"/>
+          </a:fillRef>
+          <a:effectRef idx="2">
+            <a:schemeClr val="accent1"/>
+          </a:effectRef>
+          <a:fontRef idx="minor">
+            <a:schemeClr val="lt1"/>
+          </a:fontRef>
+        </p:style>
+        <p:txBody>
+          <a:bodyPr rtlCol="0" anchor="ctr"/>
+          <a:lstStyle/>
+          <a:p>
+            <a:pPr algn="ctr"/>
+          </a:p>
+        </p:txBody>
+      </p:sp>
+      <p:sp>
+        <p:nvSpPr>
+          <p:cNvPr id="13" name="TextBox 12"/>
           <p:cNvSpPr txBox="1"/>
           <p:nvPr/>
         </p:nvSpPr>
         <p:spPr>
           <a:xfrm>
-            <a:off x="594360" y="4105656"/>
-            <a:ext cx="10972800" cy="566928"/>
+            <a:off x="6309359" y="2834640"/>
+            <a:ext cx="5349240" cy="1463040"/>
           </a:xfrm>
           <a:prstGeom prst="rect">
             <a:avLst/>
@@ -6089,14 +7719,62 @@
       </p:sp>
       <p:sp>
         <p:nvSpPr>
-          <p:cNvPr id="11" name="TextBox 10"/>
+          <p:cNvPr id="14" name="Rounded Rectangle 13"/>
+          <p:cNvSpPr/>
+          <p:nvPr/>
+        </p:nvSpPr>
+        <p:spPr>
+          <a:xfrm>
+            <a:off x="384047" y="4361688"/>
+            <a:ext cx="5861304" cy="1975104"/>
+          </a:xfrm>
+          <a:prstGeom prst="roundRect">
+            <a:avLst>
+              <a:gd name="adj" fmla="val 8000"/>
+            </a:avLst>
+          </a:prstGeom>
+          <a:solidFill>
+            <a:srgbClr val="EEF3FF"/>
+          </a:solidFill>
+          <a:ln w="9525">
+            <a:solidFill>
+              <a:srgbClr val="D6E4FF"/>
+            </a:solidFill>
+          </a:ln>
+          <a:effectLst/>
+        </p:spPr>
+        <p:style>
+          <a:lnRef idx="1">
+            <a:schemeClr val="accent1"/>
+          </a:lnRef>
+          <a:fillRef idx="3">
+            <a:schemeClr val="accent1"/>
+          </a:fillRef>
+          <a:effectRef idx="2">
+            <a:schemeClr val="accent1"/>
+          </a:effectRef>
+          <a:fontRef idx="minor">
+            <a:schemeClr val="lt1"/>
+          </a:fontRef>
+        </p:style>
+        <p:txBody>
+          <a:bodyPr rtlCol="0" anchor="ctr"/>
+          <a:lstStyle/>
+          <a:p>
+            <a:pPr algn="ctr"/>
+          </a:p>
+        </p:txBody>
+      </p:sp>
+      <p:sp>
+        <p:nvSpPr>
+          <p:cNvPr id="15" name="TextBox 14"/>
           <p:cNvSpPr txBox="1"/>
           <p:nvPr/>
         </p:nvSpPr>
         <p:spPr>
           <a:xfrm>
-            <a:off x="594360" y="4764024"/>
-            <a:ext cx="10972800" cy="566928"/>
+            <a:off x="640080" y="4617720"/>
+            <a:ext cx="5349240" cy="1463040"/>
           </a:xfrm>
           <a:prstGeom prst="rect">
             <a:avLst/>
@@ -6124,14 +7802,62 @@
       </p:sp>
       <p:sp>
         <p:nvSpPr>
-          <p:cNvPr id="12" name="TextBox 11"/>
+          <p:cNvPr id="16" name="Rounded Rectangle 15"/>
+          <p:cNvSpPr/>
+          <p:nvPr/>
+        </p:nvSpPr>
+        <p:spPr>
+          <a:xfrm>
+            <a:off x="6053327" y="4361688"/>
+            <a:ext cx="5861304" cy="1975104"/>
+          </a:xfrm>
+          <a:prstGeom prst="roundRect">
+            <a:avLst>
+              <a:gd name="adj" fmla="val 8000"/>
+            </a:avLst>
+          </a:prstGeom>
+          <a:solidFill>
+            <a:srgbClr val="EEF3FF"/>
+          </a:solidFill>
+          <a:ln w="9525">
+            <a:solidFill>
+              <a:srgbClr val="D6E4FF"/>
+            </a:solidFill>
+          </a:ln>
+          <a:effectLst/>
+        </p:spPr>
+        <p:style>
+          <a:lnRef idx="1">
+            <a:schemeClr val="accent1"/>
+          </a:lnRef>
+          <a:fillRef idx="3">
+            <a:schemeClr val="accent1"/>
+          </a:fillRef>
+          <a:effectRef idx="2">
+            <a:schemeClr val="accent1"/>
+          </a:effectRef>
+          <a:fontRef idx="minor">
+            <a:schemeClr val="lt1"/>
+          </a:fontRef>
+        </p:style>
+        <p:txBody>
+          <a:bodyPr rtlCol="0" anchor="ctr"/>
+          <a:lstStyle/>
+          <a:p>
+            <a:pPr algn="ctr"/>
+          </a:p>
+        </p:txBody>
+      </p:sp>
+      <p:sp>
+        <p:nvSpPr>
+          <p:cNvPr id="17" name="TextBox 16"/>
           <p:cNvSpPr txBox="1"/>
           <p:nvPr/>
         </p:nvSpPr>
         <p:spPr>
           <a:xfrm>
-            <a:off x="594360" y="5422392"/>
-            <a:ext cx="10972800" cy="566928"/>
+            <a:off x="6309359" y="4617720"/>
+            <a:ext cx="5349240" cy="1463040"/>
           </a:xfrm>
           <a:prstGeom prst="rect">
             <a:avLst/>
@@ -6192,7 +7918,7 @@
         <p:spPr>
           <a:xfrm>
             <a:off x="0" y="0"/>
-            <a:ext cx="118872" cy="6858000"/>
+            <a:ext cx="12191695" cy="109728"/>
           </a:xfrm>
           <a:prstGeom prst="rect">
             <a:avLst/>
@@ -6229,121 +7955,16 @@
       </p:sp>
       <p:sp>
         <p:nvSpPr>
-          <p:cNvPr id="3" name="TextBox 2"/>
-          <p:cNvSpPr txBox="1"/>
-          <p:nvPr/>
-        </p:nvSpPr>
-        <p:spPr>
-          <a:xfrm>
-            <a:off x="457200" y="6419088"/>
-            <a:ext cx="3657600" cy="274320"/>
-          </a:xfrm>
-          <a:prstGeom prst="rect">
-            <a:avLst/>
-          </a:prstGeom>
-          <a:noFill/>
-        </p:spPr>
-        <p:txBody>
-          <a:bodyPr wrap="none">
-            <a:spAutoFit/>
-          </a:bodyPr>
-          <a:lstStyle/>
-          <a:p>
-            <a:pPr algn="l"/>
-            <a:r>
-              <a:rPr sz="900" b="0">
-                <a:solidFill>
-                  <a:srgbClr val="5A6478"/>
-                </a:solidFill>
-                <a:latin typeface="Microsoft YaHei"/>
-              </a:rPr>
-              <a:t>LESSONFORGE 微课</a:t>
-            </a:r>
-          </a:p>
-        </p:txBody>
-      </p:sp>
-      <p:sp>
-        <p:nvSpPr>
-          <p:cNvPr id="4" name="TextBox 3"/>
-          <p:cNvSpPr txBox="1"/>
-          <p:nvPr/>
-        </p:nvSpPr>
-        <p:spPr>
-          <a:xfrm>
-            <a:off x="10607040" y="6419088"/>
-            <a:ext cx="1097280" cy="274320"/>
-          </a:xfrm>
-          <a:prstGeom prst="rect">
-            <a:avLst/>
-          </a:prstGeom>
-          <a:noFill/>
-        </p:spPr>
-        <p:txBody>
-          <a:bodyPr wrap="none">
-            <a:spAutoFit/>
-          </a:bodyPr>
-          <a:lstStyle/>
-          <a:p>
-            <a:pPr algn="r"/>
-            <a:r>
-              <a:rPr sz="1000" b="1">
-                <a:solidFill>
-                  <a:srgbClr val="5A6478"/>
-                </a:solidFill>
-                <a:latin typeface="Microsoft YaHei"/>
-              </a:rPr>
-              <a:t>03</a:t>
-            </a:r>
-          </a:p>
-        </p:txBody>
-      </p:sp>
-      <p:sp>
-        <p:nvSpPr>
-          <p:cNvPr id="5" name="TextBox 4"/>
-          <p:cNvSpPr txBox="1"/>
-          <p:nvPr/>
-        </p:nvSpPr>
-        <p:spPr>
-          <a:xfrm>
-            <a:off x="548640" y="457200"/>
-            <a:ext cx="11064240" cy="777240"/>
-          </a:xfrm>
-          <a:prstGeom prst="rect">
-            <a:avLst/>
-          </a:prstGeom>
-          <a:noFill/>
-        </p:spPr>
-        <p:txBody>
-          <a:bodyPr wrap="square" lIns="18288" rIns="18288" tIns="9144" bIns="9144" anchor="ctr">
-            <a:spAutoFit/>
-          </a:bodyPr>
-          <a:lstStyle/>
-          <a:p>
-            <a:pPr algn="l"/>
-            <a:r>
-              <a:rPr sz="2800" b="1" i="0">
-                <a:solidFill>
-                  <a:srgbClr val="0B3D91"/>
-                </a:solidFill>
-                <a:latin typeface="Microsoft YaHei"/>
-              </a:rPr>
-              <a:t/>
-            </a:r>
-          </a:p>
-        </p:txBody>
-      </p:sp>
-      <p:sp>
-        <p:nvSpPr>
-          <p:cNvPr id="6" name="Rectangle 5"/>
+          <p:cNvPr id="3" name="Oval 2"/>
           <p:cNvSpPr/>
           <p:nvPr/>
         </p:nvSpPr>
         <p:spPr>
           <a:xfrm>
-            <a:off x="566928" y="1298448"/>
-            <a:ext cx="1234440" cy="82296"/>
-          </a:xfrm>
-          <a:prstGeom prst="rect">
+            <a:off x="11521440" y="320040"/>
+            <a:ext cx="457200" cy="457200"/>
+          </a:xfrm>
+          <a:prstGeom prst="ellipse">
             <a:avLst/>
           </a:prstGeom>
           <a:solidFill>
@@ -6378,14 +7999,84 @@
       </p:sp>
       <p:sp>
         <p:nvSpPr>
-          <p:cNvPr id="7" name="TextBox 6"/>
+          <p:cNvPr id="4" name="TextBox 3"/>
           <p:cNvSpPr txBox="1"/>
           <p:nvPr/>
         </p:nvSpPr>
         <p:spPr>
           <a:xfrm>
-            <a:off x="594360" y="1737360"/>
-            <a:ext cx="10972800" cy="640080"/>
+            <a:off x="457200" y="6419088"/>
+            <a:ext cx="3657600" cy="274320"/>
+          </a:xfrm>
+          <a:prstGeom prst="rect">
+            <a:avLst/>
+          </a:prstGeom>
+          <a:noFill/>
+        </p:spPr>
+        <p:txBody>
+          <a:bodyPr wrap="none">
+            <a:spAutoFit/>
+          </a:bodyPr>
+          <a:lstStyle/>
+          <a:p>
+            <a:pPr algn="l"/>
+            <a:r>
+              <a:rPr sz="900" b="0">
+                <a:solidFill>
+                  <a:srgbClr val="5A6478"/>
+                </a:solidFill>
+                <a:latin typeface="Microsoft YaHei"/>
+              </a:rPr>
+              <a:t>LESSONFORGE 微课</a:t>
+            </a:r>
+          </a:p>
+        </p:txBody>
+      </p:sp>
+      <p:sp>
+        <p:nvSpPr>
+          <p:cNvPr id="5" name="TextBox 4"/>
+          <p:cNvSpPr txBox="1"/>
+          <p:nvPr/>
+        </p:nvSpPr>
+        <p:spPr>
+          <a:xfrm>
+            <a:off x="10607040" y="6419088"/>
+            <a:ext cx="1097280" cy="274320"/>
+          </a:xfrm>
+          <a:prstGeom prst="rect">
+            <a:avLst/>
+          </a:prstGeom>
+          <a:noFill/>
+        </p:spPr>
+        <p:txBody>
+          <a:bodyPr wrap="none">
+            <a:spAutoFit/>
+          </a:bodyPr>
+          <a:lstStyle/>
+          <a:p>
+            <a:pPr algn="r"/>
+            <a:r>
+              <a:rPr sz="1000" b="1">
+                <a:solidFill>
+                  <a:srgbClr val="5A6478"/>
+                </a:solidFill>
+                <a:latin typeface="Microsoft YaHei"/>
+              </a:rPr>
+              <a:t>03</a:t>
+            </a:r>
+          </a:p>
+        </p:txBody>
+      </p:sp>
+      <p:sp>
+        <p:nvSpPr>
+          <p:cNvPr id="6" name="TextBox 5"/>
+          <p:cNvSpPr txBox="1"/>
+          <p:nvPr/>
+        </p:nvSpPr>
+        <p:spPr>
+          <a:xfrm>
+            <a:off x="640080" y="548640"/>
+            <a:ext cx="10607040" cy="731520"/>
           </a:xfrm>
           <a:prstGeom prst="rect">
             <a:avLst/>
@@ -6400,7 +8091,7 @@
           <a:p>
             <a:pPr algn="l"/>
             <a:r>
-              <a:rPr sz="1800" b="1" i="0">
+              <a:rPr sz="2800" b="1" i="0">
                 <a:solidFill>
                   <a:srgbClr val="0B3D91"/>
                 </a:solidFill>
@@ -6413,14 +8104,106 @@
       </p:sp>
       <p:sp>
         <p:nvSpPr>
-          <p:cNvPr id="8" name="TextBox 7"/>
+          <p:cNvPr id="7" name="Rectangle 6"/>
+          <p:cNvSpPr/>
+          <p:nvPr/>
+        </p:nvSpPr>
+        <p:spPr>
+          <a:xfrm>
+            <a:off x="667512" y="1353312"/>
+            <a:ext cx="1234440" cy="73152"/>
+          </a:xfrm>
+          <a:prstGeom prst="rect">
+            <a:avLst/>
+          </a:prstGeom>
+          <a:solidFill>
+            <a:srgbClr val="D6E4FF"/>
+          </a:solidFill>
+          <a:ln>
+            <a:noFill/>
+          </a:ln>
+          <a:effectLst/>
+        </p:spPr>
+        <p:style>
+          <a:lnRef idx="1">
+            <a:schemeClr val="accent1"/>
+          </a:lnRef>
+          <a:fillRef idx="3">
+            <a:schemeClr val="accent1"/>
+          </a:fillRef>
+          <a:effectRef idx="2">
+            <a:schemeClr val="accent1"/>
+          </a:effectRef>
+          <a:fontRef idx="minor">
+            <a:schemeClr val="lt1"/>
+          </a:fontRef>
+        </p:style>
+        <p:txBody>
+          <a:bodyPr rtlCol="0" anchor="ctr"/>
+          <a:lstStyle/>
+          <a:p>
+            <a:pPr algn="ctr"/>
+          </a:p>
+        </p:txBody>
+      </p:sp>
+      <p:sp>
+        <p:nvSpPr>
+          <p:cNvPr id="8" name="Rounded Rectangle 7"/>
+          <p:cNvSpPr/>
+          <p:nvPr/>
+        </p:nvSpPr>
+        <p:spPr>
+          <a:xfrm>
+            <a:off x="384047" y="1435608"/>
+            <a:ext cx="5861304" cy="2295144"/>
+          </a:xfrm>
+          <a:prstGeom prst="roundRect">
+            <a:avLst>
+              <a:gd name="adj" fmla="val 8000"/>
+            </a:avLst>
+          </a:prstGeom>
+          <a:solidFill>
+            <a:srgbClr val="EEF3FF"/>
+          </a:solidFill>
+          <a:ln w="9525">
+            <a:solidFill>
+              <a:srgbClr val="D6E4FF"/>
+            </a:solidFill>
+          </a:ln>
+          <a:effectLst/>
+        </p:spPr>
+        <p:style>
+          <a:lnRef idx="1">
+            <a:schemeClr val="accent1"/>
+          </a:lnRef>
+          <a:fillRef idx="3">
+            <a:schemeClr val="accent1"/>
+          </a:fillRef>
+          <a:effectRef idx="2">
+            <a:schemeClr val="accent1"/>
+          </a:effectRef>
+          <a:fontRef idx="minor">
+            <a:schemeClr val="lt1"/>
+          </a:fontRef>
+        </p:style>
+        <p:txBody>
+          <a:bodyPr rtlCol="0" anchor="ctr"/>
+          <a:lstStyle/>
+          <a:p>
+            <a:pPr algn="ctr"/>
+          </a:p>
+        </p:txBody>
+      </p:sp>
+      <p:sp>
+        <p:nvSpPr>
+          <p:cNvPr id="9" name="TextBox 8"/>
           <p:cNvSpPr txBox="1"/>
           <p:nvPr/>
         </p:nvSpPr>
         <p:spPr>
           <a:xfrm>
-            <a:off x="594360" y="2560320"/>
-            <a:ext cx="10972800" cy="731520"/>
+            <a:off x="640080" y="1691640"/>
+            <a:ext cx="5349240" cy="1783080"/>
           </a:xfrm>
           <a:prstGeom prst="rect">
             <a:avLst/>
@@ -6448,14 +8231,62 @@
       </p:sp>
       <p:sp>
         <p:nvSpPr>
-          <p:cNvPr id="9" name="TextBox 8"/>
+          <p:cNvPr id="10" name="Rounded Rectangle 9"/>
+          <p:cNvSpPr/>
+          <p:nvPr/>
+        </p:nvSpPr>
+        <p:spPr>
+          <a:xfrm>
+            <a:off x="6053327" y="1435608"/>
+            <a:ext cx="5861304" cy="2295144"/>
+          </a:xfrm>
+          <a:prstGeom prst="roundRect">
+            <a:avLst>
+              <a:gd name="adj" fmla="val 8000"/>
+            </a:avLst>
+          </a:prstGeom>
+          <a:solidFill>
+            <a:srgbClr val="EEF3FF"/>
+          </a:solidFill>
+          <a:ln w="9525">
+            <a:solidFill>
+              <a:srgbClr val="D6E4FF"/>
+            </a:solidFill>
+          </a:ln>
+          <a:effectLst/>
+        </p:spPr>
+        <p:style>
+          <a:lnRef idx="1">
+            <a:schemeClr val="accent1"/>
+          </a:lnRef>
+          <a:fillRef idx="3">
+            <a:schemeClr val="accent1"/>
+          </a:fillRef>
+          <a:effectRef idx="2">
+            <a:schemeClr val="accent1"/>
+          </a:effectRef>
+          <a:fontRef idx="minor">
+            <a:schemeClr val="lt1"/>
+          </a:fontRef>
+        </p:style>
+        <p:txBody>
+          <a:bodyPr rtlCol="0" anchor="ctr"/>
+          <a:lstStyle/>
+          <a:p>
+            <a:pPr algn="ctr"/>
+          </a:p>
+        </p:txBody>
+      </p:sp>
+      <p:sp>
+        <p:nvSpPr>
+          <p:cNvPr id="11" name="TextBox 10"/>
           <p:cNvSpPr txBox="1"/>
           <p:nvPr/>
         </p:nvSpPr>
         <p:spPr>
           <a:xfrm>
-            <a:off x="594360" y="3429000"/>
-            <a:ext cx="10972800" cy="731520"/>
+            <a:off x="6309359" y="1691640"/>
+            <a:ext cx="5349240" cy="1783080"/>
           </a:xfrm>
           <a:prstGeom prst="rect">
             <a:avLst/>
@@ -6483,14 +8314,62 @@
       </p:sp>
       <p:sp>
         <p:nvSpPr>
-          <p:cNvPr id="10" name="TextBox 9"/>
+          <p:cNvPr id="12" name="Rounded Rectangle 11"/>
+          <p:cNvSpPr/>
+          <p:nvPr/>
+        </p:nvSpPr>
+        <p:spPr>
+          <a:xfrm>
+            <a:off x="384047" y="3584448"/>
+            <a:ext cx="5861304" cy="2295144"/>
+          </a:xfrm>
+          <a:prstGeom prst="roundRect">
+            <a:avLst>
+              <a:gd name="adj" fmla="val 8000"/>
+            </a:avLst>
+          </a:prstGeom>
+          <a:solidFill>
+            <a:srgbClr val="EEF3FF"/>
+          </a:solidFill>
+          <a:ln w="9525">
+            <a:solidFill>
+              <a:srgbClr val="D6E4FF"/>
+            </a:solidFill>
+          </a:ln>
+          <a:effectLst/>
+        </p:spPr>
+        <p:style>
+          <a:lnRef idx="1">
+            <a:schemeClr val="accent1"/>
+          </a:lnRef>
+          <a:fillRef idx="3">
+            <a:schemeClr val="accent1"/>
+          </a:fillRef>
+          <a:effectRef idx="2">
+            <a:schemeClr val="accent1"/>
+          </a:effectRef>
+          <a:fontRef idx="minor">
+            <a:schemeClr val="lt1"/>
+          </a:fontRef>
+        </p:style>
+        <p:txBody>
+          <a:bodyPr rtlCol="0" anchor="ctr"/>
+          <a:lstStyle/>
+          <a:p>
+            <a:pPr algn="ctr"/>
+          </a:p>
+        </p:txBody>
+      </p:sp>
+      <p:sp>
+        <p:nvSpPr>
+          <p:cNvPr id="13" name="TextBox 12"/>
           <p:cNvSpPr txBox="1"/>
           <p:nvPr/>
         </p:nvSpPr>
         <p:spPr>
           <a:xfrm>
-            <a:off x="594360" y="4297680"/>
-            <a:ext cx="10972800" cy="731520"/>
+            <a:off x="640080" y="3840480"/>
+            <a:ext cx="5349240" cy="1783080"/>
           </a:xfrm>
           <a:prstGeom prst="rect">
             <a:avLst/>
@@ -6518,14 +8397,62 @@
       </p:sp>
       <p:sp>
         <p:nvSpPr>
-          <p:cNvPr id="11" name="TextBox 10"/>
+          <p:cNvPr id="14" name="Rounded Rectangle 13"/>
+          <p:cNvSpPr/>
+          <p:nvPr/>
+        </p:nvSpPr>
+        <p:spPr>
+          <a:xfrm>
+            <a:off x="6053327" y="3584448"/>
+            <a:ext cx="5861304" cy="2295144"/>
+          </a:xfrm>
+          <a:prstGeom prst="roundRect">
+            <a:avLst>
+              <a:gd name="adj" fmla="val 8000"/>
+            </a:avLst>
+          </a:prstGeom>
+          <a:solidFill>
+            <a:srgbClr val="EEF3FF"/>
+          </a:solidFill>
+          <a:ln w="9525">
+            <a:solidFill>
+              <a:srgbClr val="D6E4FF"/>
+            </a:solidFill>
+          </a:ln>
+          <a:effectLst/>
+        </p:spPr>
+        <p:style>
+          <a:lnRef idx="1">
+            <a:schemeClr val="accent1"/>
+          </a:lnRef>
+          <a:fillRef idx="3">
+            <a:schemeClr val="accent1"/>
+          </a:fillRef>
+          <a:effectRef idx="2">
+            <a:schemeClr val="accent1"/>
+          </a:effectRef>
+          <a:fontRef idx="minor">
+            <a:schemeClr val="lt1"/>
+          </a:fontRef>
+        </p:style>
+        <p:txBody>
+          <a:bodyPr rtlCol="0" anchor="ctr"/>
+          <a:lstStyle/>
+          <a:p>
+            <a:pPr algn="ctr"/>
+          </a:p>
+        </p:txBody>
+      </p:sp>
+      <p:sp>
+        <p:nvSpPr>
+          <p:cNvPr id="15" name="TextBox 14"/>
           <p:cNvSpPr txBox="1"/>
           <p:nvPr/>
         </p:nvSpPr>
         <p:spPr>
           <a:xfrm>
-            <a:off x="594360" y="5166360"/>
-            <a:ext cx="10972800" cy="731520"/>
+            <a:off x="6309359" y="3840480"/>
+            <a:ext cx="5349240" cy="1783080"/>
           </a:xfrm>
           <a:prstGeom prst="rect">
             <a:avLst/>
@@ -6586,7 +8513,7 @@
         <p:spPr>
           <a:xfrm>
             <a:off x="0" y="0"/>
-            <a:ext cx="118872" cy="6858000"/>
+            <a:ext cx="12191695" cy="109728"/>
           </a:xfrm>
           <a:prstGeom prst="rect">
             <a:avLst/>
@@ -6623,121 +8550,16 @@
       </p:sp>
       <p:sp>
         <p:nvSpPr>
-          <p:cNvPr id="3" name="TextBox 2"/>
-          <p:cNvSpPr txBox="1"/>
-          <p:nvPr/>
-        </p:nvSpPr>
-        <p:spPr>
-          <a:xfrm>
-            <a:off x="457200" y="6419088"/>
-            <a:ext cx="3657600" cy="274320"/>
-          </a:xfrm>
-          <a:prstGeom prst="rect">
-            <a:avLst/>
-          </a:prstGeom>
-          <a:noFill/>
-        </p:spPr>
-        <p:txBody>
-          <a:bodyPr wrap="none">
-            <a:spAutoFit/>
-          </a:bodyPr>
-          <a:lstStyle/>
-          <a:p>
-            <a:pPr algn="l"/>
-            <a:r>
-              <a:rPr sz="900" b="0">
-                <a:solidFill>
-                  <a:srgbClr val="5A6478"/>
-                </a:solidFill>
-                <a:latin typeface="Microsoft YaHei"/>
-              </a:rPr>
-              <a:t>LESSONFORGE 微课</a:t>
-            </a:r>
-          </a:p>
-        </p:txBody>
-      </p:sp>
-      <p:sp>
-        <p:nvSpPr>
-          <p:cNvPr id="4" name="TextBox 3"/>
-          <p:cNvSpPr txBox="1"/>
-          <p:nvPr/>
-        </p:nvSpPr>
-        <p:spPr>
-          <a:xfrm>
-            <a:off x="10607040" y="6419088"/>
-            <a:ext cx="1097280" cy="274320"/>
-          </a:xfrm>
-          <a:prstGeom prst="rect">
-            <a:avLst/>
-          </a:prstGeom>
-          <a:noFill/>
-        </p:spPr>
-        <p:txBody>
-          <a:bodyPr wrap="none">
-            <a:spAutoFit/>
-          </a:bodyPr>
-          <a:lstStyle/>
-          <a:p>
-            <a:pPr algn="r"/>
-            <a:r>
-              <a:rPr sz="1000" b="1">
-                <a:solidFill>
-                  <a:srgbClr val="5A6478"/>
-                </a:solidFill>
-                <a:latin typeface="Microsoft YaHei"/>
-              </a:rPr>
-              <a:t>04</a:t>
-            </a:r>
-          </a:p>
-        </p:txBody>
-      </p:sp>
-      <p:sp>
-        <p:nvSpPr>
-          <p:cNvPr id="5" name="TextBox 4"/>
-          <p:cNvSpPr txBox="1"/>
-          <p:nvPr/>
-        </p:nvSpPr>
-        <p:spPr>
-          <a:xfrm>
-            <a:off x="548640" y="457200"/>
-            <a:ext cx="11064240" cy="777240"/>
-          </a:xfrm>
-          <a:prstGeom prst="rect">
-            <a:avLst/>
-          </a:prstGeom>
-          <a:noFill/>
-        </p:spPr>
-        <p:txBody>
-          <a:bodyPr wrap="square" lIns="18288" rIns="18288" tIns="9144" bIns="9144" anchor="ctr">
-            <a:spAutoFit/>
-          </a:bodyPr>
-          <a:lstStyle/>
-          <a:p>
-            <a:pPr algn="l"/>
-            <a:r>
-              <a:rPr sz="2800" b="1" i="0">
-                <a:solidFill>
-                  <a:srgbClr val="0B3D91"/>
-                </a:solidFill>
-                <a:latin typeface="Microsoft YaHei"/>
-              </a:rPr>
-              <a:t/>
-            </a:r>
-          </a:p>
-        </p:txBody>
-      </p:sp>
-      <p:sp>
-        <p:nvSpPr>
-          <p:cNvPr id="6" name="Rectangle 5"/>
+          <p:cNvPr id="3" name="Oval 2"/>
           <p:cNvSpPr/>
           <p:nvPr/>
         </p:nvSpPr>
         <p:spPr>
           <a:xfrm>
-            <a:off x="566928" y="1298448"/>
-            <a:ext cx="1234440" cy="82296"/>
-          </a:xfrm>
-          <a:prstGeom prst="rect">
+            <a:off x="11521440" y="320040"/>
+            <a:ext cx="457200" cy="457200"/>
+          </a:xfrm>
+          <a:prstGeom prst="ellipse">
             <a:avLst/>
           </a:prstGeom>
           <a:solidFill>
@@ -6772,14 +8594,84 @@
       </p:sp>
       <p:sp>
         <p:nvSpPr>
-          <p:cNvPr id="7" name="TextBox 6"/>
+          <p:cNvPr id="4" name="TextBox 3"/>
           <p:cNvSpPr txBox="1"/>
           <p:nvPr/>
         </p:nvSpPr>
         <p:spPr>
           <a:xfrm>
-            <a:off x="594360" y="1737360"/>
-            <a:ext cx="10972800" cy="640080"/>
+            <a:off x="457200" y="6419088"/>
+            <a:ext cx="3657600" cy="274320"/>
+          </a:xfrm>
+          <a:prstGeom prst="rect">
+            <a:avLst/>
+          </a:prstGeom>
+          <a:noFill/>
+        </p:spPr>
+        <p:txBody>
+          <a:bodyPr wrap="none">
+            <a:spAutoFit/>
+          </a:bodyPr>
+          <a:lstStyle/>
+          <a:p>
+            <a:pPr algn="l"/>
+            <a:r>
+              <a:rPr sz="900" b="0">
+                <a:solidFill>
+                  <a:srgbClr val="5A6478"/>
+                </a:solidFill>
+                <a:latin typeface="Microsoft YaHei"/>
+              </a:rPr>
+              <a:t>LESSONFORGE 微课</a:t>
+            </a:r>
+          </a:p>
+        </p:txBody>
+      </p:sp>
+      <p:sp>
+        <p:nvSpPr>
+          <p:cNvPr id="5" name="TextBox 4"/>
+          <p:cNvSpPr txBox="1"/>
+          <p:nvPr/>
+        </p:nvSpPr>
+        <p:spPr>
+          <a:xfrm>
+            <a:off x="10607040" y="6419088"/>
+            <a:ext cx="1097280" cy="274320"/>
+          </a:xfrm>
+          <a:prstGeom prst="rect">
+            <a:avLst/>
+          </a:prstGeom>
+          <a:noFill/>
+        </p:spPr>
+        <p:txBody>
+          <a:bodyPr wrap="none">
+            <a:spAutoFit/>
+          </a:bodyPr>
+          <a:lstStyle/>
+          <a:p>
+            <a:pPr algn="r"/>
+            <a:r>
+              <a:rPr sz="1000" b="1">
+                <a:solidFill>
+                  <a:srgbClr val="5A6478"/>
+                </a:solidFill>
+                <a:latin typeface="Microsoft YaHei"/>
+              </a:rPr>
+              <a:t>04</a:t>
+            </a:r>
+          </a:p>
+        </p:txBody>
+      </p:sp>
+      <p:sp>
+        <p:nvSpPr>
+          <p:cNvPr id="6" name="TextBox 5"/>
+          <p:cNvSpPr txBox="1"/>
+          <p:nvPr/>
+        </p:nvSpPr>
+        <p:spPr>
+          <a:xfrm>
+            <a:off x="640080" y="548640"/>
+            <a:ext cx="10607040" cy="731520"/>
           </a:xfrm>
           <a:prstGeom prst="rect">
             <a:avLst/>
@@ -6794,7 +8686,7 @@
           <a:p>
             <a:pPr algn="l"/>
             <a:r>
-              <a:rPr sz="1800" b="1" i="0">
+              <a:rPr sz="2800" b="1" i="0">
                 <a:solidFill>
                   <a:srgbClr val="0B3D91"/>
                 </a:solidFill>
@@ -6807,14 +8699,106 @@
       </p:sp>
       <p:sp>
         <p:nvSpPr>
-          <p:cNvPr id="8" name="TextBox 7"/>
+          <p:cNvPr id="7" name="Rectangle 6"/>
+          <p:cNvSpPr/>
+          <p:nvPr/>
+        </p:nvSpPr>
+        <p:spPr>
+          <a:xfrm>
+            <a:off x="667512" y="1353312"/>
+            <a:ext cx="1234440" cy="73152"/>
+          </a:xfrm>
+          <a:prstGeom prst="rect">
+            <a:avLst/>
+          </a:prstGeom>
+          <a:solidFill>
+            <a:srgbClr val="D6E4FF"/>
+          </a:solidFill>
+          <a:ln>
+            <a:noFill/>
+          </a:ln>
+          <a:effectLst/>
+        </p:spPr>
+        <p:style>
+          <a:lnRef idx="1">
+            <a:schemeClr val="accent1"/>
+          </a:lnRef>
+          <a:fillRef idx="3">
+            <a:schemeClr val="accent1"/>
+          </a:fillRef>
+          <a:effectRef idx="2">
+            <a:schemeClr val="accent1"/>
+          </a:effectRef>
+          <a:fontRef idx="minor">
+            <a:schemeClr val="lt1"/>
+          </a:fontRef>
+        </p:style>
+        <p:txBody>
+          <a:bodyPr rtlCol="0" anchor="ctr"/>
+          <a:lstStyle/>
+          <a:p>
+            <a:pPr algn="ctr"/>
+          </a:p>
+        </p:txBody>
+      </p:sp>
+      <p:sp>
+        <p:nvSpPr>
+          <p:cNvPr id="8" name="Rounded Rectangle 7"/>
+          <p:cNvSpPr/>
+          <p:nvPr/>
+        </p:nvSpPr>
+        <p:spPr>
+          <a:xfrm>
+            <a:off x="384047" y="1435608"/>
+            <a:ext cx="5861304" cy="2295144"/>
+          </a:xfrm>
+          <a:prstGeom prst="roundRect">
+            <a:avLst>
+              <a:gd name="adj" fmla="val 8000"/>
+            </a:avLst>
+          </a:prstGeom>
+          <a:solidFill>
+            <a:srgbClr val="EEF3FF"/>
+          </a:solidFill>
+          <a:ln w="9525">
+            <a:solidFill>
+              <a:srgbClr val="D6E4FF"/>
+            </a:solidFill>
+          </a:ln>
+          <a:effectLst/>
+        </p:spPr>
+        <p:style>
+          <a:lnRef idx="1">
+            <a:schemeClr val="accent1"/>
+          </a:lnRef>
+          <a:fillRef idx="3">
+            <a:schemeClr val="accent1"/>
+          </a:fillRef>
+          <a:effectRef idx="2">
+            <a:schemeClr val="accent1"/>
+          </a:effectRef>
+          <a:fontRef idx="minor">
+            <a:schemeClr val="lt1"/>
+          </a:fontRef>
+        </p:style>
+        <p:txBody>
+          <a:bodyPr rtlCol="0" anchor="ctr"/>
+          <a:lstStyle/>
+          <a:p>
+            <a:pPr algn="ctr"/>
+          </a:p>
+        </p:txBody>
+      </p:sp>
+      <p:sp>
+        <p:nvSpPr>
+          <p:cNvPr id="9" name="TextBox 8"/>
           <p:cNvSpPr txBox="1"/>
           <p:nvPr/>
         </p:nvSpPr>
         <p:spPr>
           <a:xfrm>
-            <a:off x="594360" y="2606040"/>
-            <a:ext cx="5394960" cy="685800"/>
+            <a:off x="640080" y="1691640"/>
+            <a:ext cx="5349240" cy="1783080"/>
           </a:xfrm>
           <a:prstGeom prst="rect">
             <a:avLst/>
@@ -6842,14 +8826,62 @@
       </p:sp>
       <p:sp>
         <p:nvSpPr>
-          <p:cNvPr id="9" name="TextBox 8"/>
+          <p:cNvPr id="10" name="Rounded Rectangle 9"/>
+          <p:cNvSpPr/>
+          <p:nvPr/>
+        </p:nvSpPr>
+        <p:spPr>
+          <a:xfrm>
+            <a:off x="6053327" y="1435608"/>
+            <a:ext cx="5861304" cy="2295144"/>
+          </a:xfrm>
+          <a:prstGeom prst="roundRect">
+            <a:avLst>
+              <a:gd name="adj" fmla="val 8000"/>
+            </a:avLst>
+          </a:prstGeom>
+          <a:solidFill>
+            <a:srgbClr val="EEF3FF"/>
+          </a:solidFill>
+          <a:ln w="9525">
+            <a:solidFill>
+              <a:srgbClr val="D6E4FF"/>
+            </a:solidFill>
+          </a:ln>
+          <a:effectLst/>
+        </p:spPr>
+        <p:style>
+          <a:lnRef idx="1">
+            <a:schemeClr val="accent1"/>
+          </a:lnRef>
+          <a:fillRef idx="3">
+            <a:schemeClr val="accent1"/>
+          </a:fillRef>
+          <a:effectRef idx="2">
+            <a:schemeClr val="accent1"/>
+          </a:effectRef>
+          <a:fontRef idx="minor">
+            <a:schemeClr val="lt1"/>
+          </a:fontRef>
+        </p:style>
+        <p:txBody>
+          <a:bodyPr rtlCol="0" anchor="ctr"/>
+          <a:lstStyle/>
+          <a:p>
+            <a:pPr algn="ctr"/>
+          </a:p>
+        </p:txBody>
+      </p:sp>
+      <p:sp>
+        <p:nvSpPr>
+          <p:cNvPr id="11" name="TextBox 10"/>
           <p:cNvSpPr txBox="1"/>
           <p:nvPr/>
         </p:nvSpPr>
         <p:spPr>
           <a:xfrm>
-            <a:off x="6263640" y="2606040"/>
-            <a:ext cx="5394960" cy="685800"/>
+            <a:off x="6309359" y="1691640"/>
+            <a:ext cx="5349240" cy="1783080"/>
           </a:xfrm>
           <a:prstGeom prst="rect">
             <a:avLst/>
@@ -6877,14 +8909,62 @@
       </p:sp>
       <p:sp>
         <p:nvSpPr>
-          <p:cNvPr id="10" name="TextBox 9"/>
+          <p:cNvPr id="12" name="Rounded Rectangle 11"/>
+          <p:cNvSpPr/>
+          <p:nvPr/>
+        </p:nvSpPr>
+        <p:spPr>
+          <a:xfrm>
+            <a:off x="384047" y="3584448"/>
+            <a:ext cx="5861304" cy="2295144"/>
+          </a:xfrm>
+          <a:prstGeom prst="roundRect">
+            <a:avLst>
+              <a:gd name="adj" fmla="val 8000"/>
+            </a:avLst>
+          </a:prstGeom>
+          <a:solidFill>
+            <a:srgbClr val="EEF3FF"/>
+          </a:solidFill>
+          <a:ln w="9525">
+            <a:solidFill>
+              <a:srgbClr val="D6E4FF"/>
+            </a:solidFill>
+          </a:ln>
+          <a:effectLst/>
+        </p:spPr>
+        <p:style>
+          <a:lnRef idx="1">
+            <a:schemeClr val="accent1"/>
+          </a:lnRef>
+          <a:fillRef idx="3">
+            <a:schemeClr val="accent1"/>
+          </a:fillRef>
+          <a:effectRef idx="2">
+            <a:schemeClr val="accent1"/>
+          </a:effectRef>
+          <a:fontRef idx="minor">
+            <a:schemeClr val="lt1"/>
+          </a:fontRef>
+        </p:style>
+        <p:txBody>
+          <a:bodyPr rtlCol="0" anchor="ctr"/>
+          <a:lstStyle/>
+          <a:p>
+            <a:pPr algn="ctr"/>
+          </a:p>
+        </p:txBody>
+      </p:sp>
+      <p:sp>
+        <p:nvSpPr>
+          <p:cNvPr id="13" name="TextBox 12"/>
           <p:cNvSpPr txBox="1"/>
           <p:nvPr/>
         </p:nvSpPr>
         <p:spPr>
           <a:xfrm>
-            <a:off x="594360" y="3474720"/>
-            <a:ext cx="5394960" cy="685800"/>
+            <a:off x="640080" y="3840480"/>
+            <a:ext cx="5349240" cy="1783080"/>
           </a:xfrm>
           <a:prstGeom prst="rect">
             <a:avLst/>
@@ -6912,14 +8992,62 @@
       </p:sp>
       <p:sp>
         <p:nvSpPr>
-          <p:cNvPr id="11" name="TextBox 10"/>
+          <p:cNvPr id="14" name="Rounded Rectangle 13"/>
+          <p:cNvSpPr/>
+          <p:nvPr/>
+        </p:nvSpPr>
+        <p:spPr>
+          <a:xfrm>
+            <a:off x="6053327" y="3584448"/>
+            <a:ext cx="5861304" cy="2295144"/>
+          </a:xfrm>
+          <a:prstGeom prst="roundRect">
+            <a:avLst>
+              <a:gd name="adj" fmla="val 8000"/>
+            </a:avLst>
+          </a:prstGeom>
+          <a:solidFill>
+            <a:srgbClr val="EEF3FF"/>
+          </a:solidFill>
+          <a:ln w="9525">
+            <a:solidFill>
+              <a:srgbClr val="D6E4FF"/>
+            </a:solidFill>
+          </a:ln>
+          <a:effectLst/>
+        </p:spPr>
+        <p:style>
+          <a:lnRef idx="1">
+            <a:schemeClr val="accent1"/>
+          </a:lnRef>
+          <a:fillRef idx="3">
+            <a:schemeClr val="accent1"/>
+          </a:fillRef>
+          <a:effectRef idx="2">
+            <a:schemeClr val="accent1"/>
+          </a:effectRef>
+          <a:fontRef idx="minor">
+            <a:schemeClr val="lt1"/>
+          </a:fontRef>
+        </p:style>
+        <p:txBody>
+          <a:bodyPr rtlCol="0" anchor="ctr"/>
+          <a:lstStyle/>
+          <a:p>
+            <a:pPr algn="ctr"/>
+          </a:p>
+        </p:txBody>
+      </p:sp>
+      <p:sp>
+        <p:nvSpPr>
+          <p:cNvPr id="15" name="TextBox 14"/>
           <p:cNvSpPr txBox="1"/>
           <p:nvPr/>
         </p:nvSpPr>
         <p:spPr>
           <a:xfrm>
-            <a:off x="6263640" y="3474720"/>
-            <a:ext cx="5394960" cy="685800"/>
+            <a:off x="6309359" y="3840480"/>
+            <a:ext cx="5349240" cy="1783080"/>
           </a:xfrm>
           <a:prstGeom prst="rect">
             <a:avLst/>
@@ -6980,7 +9108,7 @@
         <p:spPr>
           <a:xfrm>
             <a:off x="0" y="0"/>
-            <a:ext cx="118872" cy="6858000"/>
+            <a:ext cx="12191695" cy="109728"/>
           </a:xfrm>
           <a:prstGeom prst="rect">
             <a:avLst/>
@@ -7017,121 +9145,16 @@
       </p:sp>
       <p:sp>
         <p:nvSpPr>
-          <p:cNvPr id="3" name="TextBox 2"/>
-          <p:cNvSpPr txBox="1"/>
-          <p:nvPr/>
-        </p:nvSpPr>
-        <p:spPr>
-          <a:xfrm>
-            <a:off x="457200" y="6419088"/>
-            <a:ext cx="3657600" cy="274320"/>
-          </a:xfrm>
-          <a:prstGeom prst="rect">
-            <a:avLst/>
-          </a:prstGeom>
-          <a:noFill/>
-        </p:spPr>
-        <p:txBody>
-          <a:bodyPr wrap="none">
-            <a:spAutoFit/>
-          </a:bodyPr>
-          <a:lstStyle/>
-          <a:p>
-            <a:pPr algn="l"/>
-            <a:r>
-              <a:rPr sz="900" b="0">
-                <a:solidFill>
-                  <a:srgbClr val="5A6478"/>
-                </a:solidFill>
-                <a:latin typeface="Microsoft YaHei"/>
-              </a:rPr>
-              <a:t>LESSONFORGE 微课</a:t>
-            </a:r>
-          </a:p>
-        </p:txBody>
-      </p:sp>
-      <p:sp>
-        <p:nvSpPr>
-          <p:cNvPr id="4" name="TextBox 3"/>
-          <p:cNvSpPr txBox="1"/>
-          <p:nvPr/>
-        </p:nvSpPr>
-        <p:spPr>
-          <a:xfrm>
-            <a:off x="10607040" y="6419088"/>
-            <a:ext cx="1097280" cy="274320"/>
-          </a:xfrm>
-          <a:prstGeom prst="rect">
-            <a:avLst/>
-          </a:prstGeom>
-          <a:noFill/>
-        </p:spPr>
-        <p:txBody>
-          <a:bodyPr wrap="none">
-            <a:spAutoFit/>
-          </a:bodyPr>
-          <a:lstStyle/>
-          <a:p>
-            <a:pPr algn="r"/>
-            <a:r>
-              <a:rPr sz="1000" b="1">
-                <a:solidFill>
-                  <a:srgbClr val="5A6478"/>
-                </a:solidFill>
-                <a:latin typeface="Microsoft YaHei"/>
-              </a:rPr>
-              <a:t>05</a:t>
-            </a:r>
-          </a:p>
-        </p:txBody>
-      </p:sp>
-      <p:sp>
-        <p:nvSpPr>
-          <p:cNvPr id="5" name="TextBox 4"/>
-          <p:cNvSpPr txBox="1"/>
-          <p:nvPr/>
-        </p:nvSpPr>
-        <p:spPr>
-          <a:xfrm>
-            <a:off x="548640" y="457200"/>
-            <a:ext cx="11064240" cy="777240"/>
-          </a:xfrm>
-          <a:prstGeom prst="rect">
-            <a:avLst/>
-          </a:prstGeom>
-          <a:noFill/>
-        </p:spPr>
-        <p:txBody>
-          <a:bodyPr wrap="square" lIns="18288" rIns="18288" tIns="9144" bIns="9144" anchor="ctr">
-            <a:spAutoFit/>
-          </a:bodyPr>
-          <a:lstStyle/>
-          <a:p>
-            <a:pPr algn="l"/>
-            <a:r>
-              <a:rPr sz="2800" b="1" i="0">
-                <a:solidFill>
-                  <a:srgbClr val="0B3D91"/>
-                </a:solidFill>
-                <a:latin typeface="Microsoft YaHei"/>
-              </a:rPr>
-              <a:t/>
-            </a:r>
-          </a:p>
-        </p:txBody>
-      </p:sp>
-      <p:sp>
-        <p:nvSpPr>
-          <p:cNvPr id="6" name="Rectangle 5"/>
+          <p:cNvPr id="3" name="Oval 2"/>
           <p:cNvSpPr/>
           <p:nvPr/>
         </p:nvSpPr>
         <p:spPr>
           <a:xfrm>
-            <a:off x="566928" y="1298448"/>
-            <a:ext cx="1234440" cy="82296"/>
-          </a:xfrm>
-          <a:prstGeom prst="rect">
+            <a:off x="11521440" y="320040"/>
+            <a:ext cx="457200" cy="457200"/>
+          </a:xfrm>
+          <a:prstGeom prst="ellipse">
             <a:avLst/>
           </a:prstGeom>
           <a:solidFill>
@@ -7166,14 +9189,84 @@
       </p:sp>
       <p:sp>
         <p:nvSpPr>
-          <p:cNvPr id="7" name="TextBox 6"/>
+          <p:cNvPr id="4" name="TextBox 3"/>
           <p:cNvSpPr txBox="1"/>
           <p:nvPr/>
         </p:nvSpPr>
         <p:spPr>
           <a:xfrm>
-            <a:off x="594360" y="1645920"/>
-            <a:ext cx="10972800" cy="914400"/>
+            <a:off x="457200" y="6419088"/>
+            <a:ext cx="3657600" cy="274320"/>
+          </a:xfrm>
+          <a:prstGeom prst="rect">
+            <a:avLst/>
+          </a:prstGeom>
+          <a:noFill/>
+        </p:spPr>
+        <p:txBody>
+          <a:bodyPr wrap="none">
+            <a:spAutoFit/>
+          </a:bodyPr>
+          <a:lstStyle/>
+          <a:p>
+            <a:pPr algn="l"/>
+            <a:r>
+              <a:rPr sz="900" b="0">
+                <a:solidFill>
+                  <a:srgbClr val="5A6478"/>
+                </a:solidFill>
+                <a:latin typeface="Microsoft YaHei"/>
+              </a:rPr>
+              <a:t>LESSONFORGE 微课</a:t>
+            </a:r>
+          </a:p>
+        </p:txBody>
+      </p:sp>
+      <p:sp>
+        <p:nvSpPr>
+          <p:cNvPr id="5" name="TextBox 4"/>
+          <p:cNvSpPr txBox="1"/>
+          <p:nvPr/>
+        </p:nvSpPr>
+        <p:spPr>
+          <a:xfrm>
+            <a:off x="10607040" y="6419088"/>
+            <a:ext cx="1097280" cy="274320"/>
+          </a:xfrm>
+          <a:prstGeom prst="rect">
+            <a:avLst/>
+          </a:prstGeom>
+          <a:noFill/>
+        </p:spPr>
+        <p:txBody>
+          <a:bodyPr wrap="none">
+            <a:spAutoFit/>
+          </a:bodyPr>
+          <a:lstStyle/>
+          <a:p>
+            <a:pPr algn="r"/>
+            <a:r>
+              <a:rPr sz="1000" b="1">
+                <a:solidFill>
+                  <a:srgbClr val="5A6478"/>
+                </a:solidFill>
+                <a:latin typeface="Microsoft YaHei"/>
+              </a:rPr>
+              <a:t>05</a:t>
+            </a:r>
+          </a:p>
+        </p:txBody>
+      </p:sp>
+      <p:sp>
+        <p:nvSpPr>
+          <p:cNvPr id="6" name="TextBox 5"/>
+          <p:cNvSpPr txBox="1"/>
+          <p:nvPr/>
+        </p:nvSpPr>
+        <p:spPr>
+          <a:xfrm>
+            <a:off x="640080" y="548640"/>
+            <a:ext cx="10607040" cy="731520"/>
           </a:xfrm>
           <a:prstGeom prst="rect">
             <a:avLst/>
@@ -7188,7 +9281,7 @@
           <a:p>
             <a:pPr algn="l"/>
             <a:r>
-              <a:rPr sz="1800" b="1" i="0">
+              <a:rPr sz="2800" b="1" i="0">
                 <a:solidFill>
                   <a:srgbClr val="0B3D91"/>
                 </a:solidFill>
@@ -7201,14 +9294,106 @@
       </p:sp>
       <p:sp>
         <p:nvSpPr>
-          <p:cNvPr id="8" name="TextBox 7"/>
+          <p:cNvPr id="7" name="Rectangle 6"/>
+          <p:cNvSpPr/>
+          <p:nvPr/>
+        </p:nvSpPr>
+        <p:spPr>
+          <a:xfrm>
+            <a:off x="667512" y="1353312"/>
+            <a:ext cx="1234440" cy="73152"/>
+          </a:xfrm>
+          <a:prstGeom prst="rect">
+            <a:avLst/>
+          </a:prstGeom>
+          <a:solidFill>
+            <a:srgbClr val="D6E4FF"/>
+          </a:solidFill>
+          <a:ln>
+            <a:noFill/>
+          </a:ln>
+          <a:effectLst/>
+        </p:spPr>
+        <p:style>
+          <a:lnRef idx="1">
+            <a:schemeClr val="accent1"/>
+          </a:lnRef>
+          <a:fillRef idx="3">
+            <a:schemeClr val="accent1"/>
+          </a:fillRef>
+          <a:effectRef idx="2">
+            <a:schemeClr val="accent1"/>
+          </a:effectRef>
+          <a:fontRef idx="minor">
+            <a:schemeClr val="lt1"/>
+          </a:fontRef>
+        </p:style>
+        <p:txBody>
+          <a:bodyPr rtlCol="0" anchor="ctr"/>
+          <a:lstStyle/>
+          <a:p>
+            <a:pPr algn="ctr"/>
+          </a:p>
+        </p:txBody>
+      </p:sp>
+      <p:sp>
+        <p:nvSpPr>
+          <p:cNvPr id="8" name="Rounded Rectangle 7"/>
+          <p:cNvSpPr/>
+          <p:nvPr/>
+        </p:nvSpPr>
+        <p:spPr>
+          <a:xfrm>
+            <a:off x="384047" y="1435608"/>
+            <a:ext cx="11484864" cy="1335024"/>
+          </a:xfrm>
+          <a:prstGeom prst="roundRect">
+            <a:avLst>
+              <a:gd name="adj" fmla="val 8000"/>
+            </a:avLst>
+          </a:prstGeom>
+          <a:solidFill>
+            <a:srgbClr val="EEF3FF"/>
+          </a:solidFill>
+          <a:ln w="9525">
+            <a:solidFill>
+              <a:srgbClr val="D6E4FF"/>
+            </a:solidFill>
+          </a:ln>
+          <a:effectLst/>
+        </p:spPr>
+        <p:style>
+          <a:lnRef idx="1">
+            <a:schemeClr val="accent1"/>
+          </a:lnRef>
+          <a:fillRef idx="3">
+            <a:schemeClr val="accent1"/>
+          </a:fillRef>
+          <a:effectRef idx="2">
+            <a:schemeClr val="accent1"/>
+          </a:effectRef>
+          <a:fontRef idx="minor">
+            <a:schemeClr val="lt1"/>
+          </a:fontRef>
+        </p:style>
+        <p:txBody>
+          <a:bodyPr rtlCol="0" anchor="ctr"/>
+          <a:lstStyle/>
+          <a:p>
+            <a:pPr algn="ctr"/>
+          </a:p>
+        </p:txBody>
+      </p:sp>
+      <p:sp>
+        <p:nvSpPr>
+          <p:cNvPr id="9" name="TextBox 8"/>
           <p:cNvSpPr txBox="1"/>
           <p:nvPr/>
         </p:nvSpPr>
         <p:spPr>
           <a:xfrm>
-            <a:off x="594360" y="2743200"/>
-            <a:ext cx="5394960" cy="594360"/>
+            <a:off x="640080" y="1691640"/>
+            <a:ext cx="10972800" cy="822960"/>
           </a:xfrm>
           <a:prstGeom prst="rect">
             <a:avLst/>
@@ -7223,9 +9408,9 @@
           <a:p>
             <a:pPr algn="l"/>
             <a:r>
-              <a:rPr sz="1600" b="0" i="0">
-                <a:solidFill>
-                  <a:srgbClr val="0A0F1E"/>
+              <a:rPr sz="1800" b="1" i="0">
+                <a:solidFill>
+                  <a:srgbClr val="0B3D91"/>
                 </a:solidFill>
                 <a:latin typeface="Microsoft YaHei"/>
               </a:rPr>
@@ -7236,14 +9421,62 @@
       </p:sp>
       <p:sp>
         <p:nvSpPr>
-          <p:cNvPr id="9" name="TextBox 8"/>
+          <p:cNvPr id="10" name="Rounded Rectangle 9"/>
+          <p:cNvSpPr/>
+          <p:nvPr/>
+        </p:nvSpPr>
+        <p:spPr>
+          <a:xfrm>
+            <a:off x="384047" y="2487168"/>
+            <a:ext cx="5861304" cy="1975104"/>
+          </a:xfrm>
+          <a:prstGeom prst="roundRect">
+            <a:avLst>
+              <a:gd name="adj" fmla="val 8000"/>
+            </a:avLst>
+          </a:prstGeom>
+          <a:solidFill>
+            <a:srgbClr val="EEF3FF"/>
+          </a:solidFill>
+          <a:ln w="9525">
+            <a:solidFill>
+              <a:srgbClr val="D6E4FF"/>
+            </a:solidFill>
+          </a:ln>
+          <a:effectLst/>
+        </p:spPr>
+        <p:style>
+          <a:lnRef idx="1">
+            <a:schemeClr val="accent1"/>
+          </a:lnRef>
+          <a:fillRef idx="3">
+            <a:schemeClr val="accent1"/>
+          </a:fillRef>
+          <a:effectRef idx="2">
+            <a:schemeClr val="accent1"/>
+          </a:effectRef>
+          <a:fontRef idx="minor">
+            <a:schemeClr val="lt1"/>
+          </a:fontRef>
+        </p:style>
+        <p:txBody>
+          <a:bodyPr rtlCol="0" anchor="ctr"/>
+          <a:lstStyle/>
+          <a:p>
+            <a:pPr algn="ctr"/>
+          </a:p>
+        </p:txBody>
+      </p:sp>
+      <p:sp>
+        <p:nvSpPr>
+          <p:cNvPr id="11" name="TextBox 10"/>
           <p:cNvSpPr txBox="1"/>
           <p:nvPr/>
         </p:nvSpPr>
         <p:spPr>
           <a:xfrm>
-            <a:off x="6263640" y="2743200"/>
-            <a:ext cx="5394960" cy="594360"/>
+            <a:off x="640080" y="2743200"/>
+            <a:ext cx="5349240" cy="1463040"/>
           </a:xfrm>
           <a:prstGeom prst="rect">
             <a:avLst/>
@@ -7271,14 +9504,62 @@
       </p:sp>
       <p:sp>
         <p:nvSpPr>
-          <p:cNvPr id="10" name="TextBox 9"/>
+          <p:cNvPr id="12" name="Rounded Rectangle 11"/>
+          <p:cNvSpPr/>
+          <p:nvPr/>
+        </p:nvSpPr>
+        <p:spPr>
+          <a:xfrm>
+            <a:off x="6053327" y="2487168"/>
+            <a:ext cx="5861304" cy="1975104"/>
+          </a:xfrm>
+          <a:prstGeom prst="roundRect">
+            <a:avLst>
+              <a:gd name="adj" fmla="val 8000"/>
+            </a:avLst>
+          </a:prstGeom>
+          <a:solidFill>
+            <a:srgbClr val="EEF3FF"/>
+          </a:solidFill>
+          <a:ln w="9525">
+            <a:solidFill>
+              <a:srgbClr val="D6E4FF"/>
+            </a:solidFill>
+          </a:ln>
+          <a:effectLst/>
+        </p:spPr>
+        <p:style>
+          <a:lnRef idx="1">
+            <a:schemeClr val="accent1"/>
+          </a:lnRef>
+          <a:fillRef idx="3">
+            <a:schemeClr val="accent1"/>
+          </a:fillRef>
+          <a:effectRef idx="2">
+            <a:schemeClr val="accent1"/>
+          </a:effectRef>
+          <a:fontRef idx="minor">
+            <a:schemeClr val="lt1"/>
+          </a:fontRef>
+        </p:style>
+        <p:txBody>
+          <a:bodyPr rtlCol="0" anchor="ctr"/>
+          <a:lstStyle/>
+          <a:p>
+            <a:pPr algn="ctr"/>
+          </a:p>
+        </p:txBody>
+      </p:sp>
+      <p:sp>
+        <p:nvSpPr>
+          <p:cNvPr id="13" name="TextBox 12"/>
           <p:cNvSpPr txBox="1"/>
           <p:nvPr/>
         </p:nvSpPr>
         <p:spPr>
           <a:xfrm>
-            <a:off x="594360" y="3474720"/>
-            <a:ext cx="5394960" cy="594360"/>
+            <a:off x="6309359" y="2743200"/>
+            <a:ext cx="5349240" cy="1463040"/>
           </a:xfrm>
           <a:prstGeom prst="rect">
             <a:avLst/>
@@ -7306,14 +9587,62 @@
       </p:sp>
       <p:sp>
         <p:nvSpPr>
-          <p:cNvPr id="11" name="TextBox 10"/>
+          <p:cNvPr id="14" name="Rounded Rectangle 13"/>
+          <p:cNvSpPr/>
+          <p:nvPr/>
+        </p:nvSpPr>
+        <p:spPr>
+          <a:xfrm>
+            <a:off x="384047" y="4270248"/>
+            <a:ext cx="5861304" cy="1975104"/>
+          </a:xfrm>
+          <a:prstGeom prst="roundRect">
+            <a:avLst>
+              <a:gd name="adj" fmla="val 8000"/>
+            </a:avLst>
+          </a:prstGeom>
+          <a:solidFill>
+            <a:srgbClr val="EEF3FF"/>
+          </a:solidFill>
+          <a:ln w="9525">
+            <a:solidFill>
+              <a:srgbClr val="D6E4FF"/>
+            </a:solidFill>
+          </a:ln>
+          <a:effectLst/>
+        </p:spPr>
+        <p:style>
+          <a:lnRef idx="1">
+            <a:schemeClr val="accent1"/>
+          </a:lnRef>
+          <a:fillRef idx="3">
+            <a:schemeClr val="accent1"/>
+          </a:fillRef>
+          <a:effectRef idx="2">
+            <a:schemeClr val="accent1"/>
+          </a:effectRef>
+          <a:fontRef idx="minor">
+            <a:schemeClr val="lt1"/>
+          </a:fontRef>
+        </p:style>
+        <p:txBody>
+          <a:bodyPr rtlCol="0" anchor="ctr"/>
+          <a:lstStyle/>
+          <a:p>
+            <a:pPr algn="ctr"/>
+          </a:p>
+        </p:txBody>
+      </p:sp>
+      <p:sp>
+        <p:nvSpPr>
+          <p:cNvPr id="15" name="TextBox 14"/>
           <p:cNvSpPr txBox="1"/>
           <p:nvPr/>
         </p:nvSpPr>
         <p:spPr>
           <a:xfrm>
-            <a:off x="6263640" y="3474720"/>
-            <a:ext cx="5394960" cy="594360"/>
+            <a:off x="640080" y="4526280"/>
+            <a:ext cx="5349240" cy="1463040"/>
           </a:xfrm>
           <a:prstGeom prst="rect">
             <a:avLst/>
@@ -7341,49 +9670,62 @@
       </p:sp>
       <p:sp>
         <p:nvSpPr>
-          <p:cNvPr id="12" name="TextBox 11"/>
+          <p:cNvPr id="16" name="Rounded Rectangle 15"/>
+          <p:cNvSpPr/>
+          <p:nvPr/>
+        </p:nvSpPr>
+        <p:spPr>
+          <a:xfrm>
+            <a:off x="6053327" y="4270248"/>
+            <a:ext cx="5861304" cy="1975104"/>
+          </a:xfrm>
+          <a:prstGeom prst="roundRect">
+            <a:avLst>
+              <a:gd name="adj" fmla="val 8000"/>
+            </a:avLst>
+          </a:prstGeom>
+          <a:solidFill>
+            <a:srgbClr val="EEF3FF"/>
+          </a:solidFill>
+          <a:ln w="9525">
+            <a:solidFill>
+              <a:srgbClr val="D6E4FF"/>
+            </a:solidFill>
+          </a:ln>
+          <a:effectLst/>
+        </p:spPr>
+        <p:style>
+          <a:lnRef idx="1">
+            <a:schemeClr val="accent1"/>
+          </a:lnRef>
+          <a:fillRef idx="3">
+            <a:schemeClr val="accent1"/>
+          </a:fillRef>
+          <a:effectRef idx="2">
+            <a:schemeClr val="accent1"/>
+          </a:effectRef>
+          <a:fontRef idx="minor">
+            <a:schemeClr val="lt1"/>
+          </a:fontRef>
+        </p:style>
+        <p:txBody>
+          <a:bodyPr rtlCol="0" anchor="ctr"/>
+          <a:lstStyle/>
+          <a:p>
+            <a:pPr algn="ctr"/>
+          </a:p>
+        </p:txBody>
+      </p:sp>
+      <p:sp>
+        <p:nvSpPr>
+          <p:cNvPr id="17" name="TextBox 16"/>
           <p:cNvSpPr txBox="1"/>
           <p:nvPr/>
         </p:nvSpPr>
         <p:spPr>
           <a:xfrm>
-            <a:off x="594360" y="4206240"/>
-            <a:ext cx="5394960" cy="594360"/>
-          </a:xfrm>
-          <a:prstGeom prst="rect">
-            <a:avLst/>
-          </a:prstGeom>
-          <a:noFill/>
-        </p:spPr>
-        <p:txBody>
-          <a:bodyPr wrap="square" lIns="18288" rIns="18288" tIns="9144" bIns="9144" anchor="ctr">
-            <a:spAutoFit/>
-          </a:bodyPr>
-          <a:lstStyle/>
-          <a:p>
-            <a:pPr algn="l"/>
-            <a:r>
-              <a:rPr sz="1600" b="0" i="0">
-                <a:solidFill>
-                  <a:srgbClr val="0A0F1E"/>
-                </a:solidFill>
-                <a:latin typeface="Microsoft YaHei"/>
-              </a:rPr>
-              <a:t/>
-            </a:r>
-          </a:p>
-        </p:txBody>
-      </p:sp>
-      <p:sp>
-        <p:nvSpPr>
-          <p:cNvPr id="13" name="TextBox 12"/>
-          <p:cNvSpPr txBox="1"/>
-          <p:nvPr/>
-        </p:nvSpPr>
-        <p:spPr>
-          <a:xfrm>
-            <a:off x="6263640" y="4206240"/>
-            <a:ext cx="5394960" cy="594360"/>
+            <a:off x="6309359" y="4526280"/>
+            <a:ext cx="5349240" cy="1463040"/>
           </a:xfrm>
           <a:prstGeom prst="rect">
             <a:avLst/>
@@ -7444,7 +9786,7 @@
         <p:spPr>
           <a:xfrm>
             <a:off x="0" y="0"/>
-            <a:ext cx="118872" cy="6858000"/>
+            <a:ext cx="12191695" cy="109728"/>
           </a:xfrm>
           <a:prstGeom prst="rect">
             <a:avLst/>
@@ -7481,121 +9823,16 @@
       </p:sp>
       <p:sp>
         <p:nvSpPr>
-          <p:cNvPr id="3" name="TextBox 2"/>
-          <p:cNvSpPr txBox="1"/>
-          <p:nvPr/>
-        </p:nvSpPr>
-        <p:spPr>
-          <a:xfrm>
-            <a:off x="457200" y="6419088"/>
-            <a:ext cx="3657600" cy="274320"/>
-          </a:xfrm>
-          <a:prstGeom prst="rect">
-            <a:avLst/>
-          </a:prstGeom>
-          <a:noFill/>
-        </p:spPr>
-        <p:txBody>
-          <a:bodyPr wrap="none">
-            <a:spAutoFit/>
-          </a:bodyPr>
-          <a:lstStyle/>
-          <a:p>
-            <a:pPr algn="l"/>
-            <a:r>
-              <a:rPr sz="900" b="0">
-                <a:solidFill>
-                  <a:srgbClr val="5A6478"/>
-                </a:solidFill>
-                <a:latin typeface="Microsoft YaHei"/>
-              </a:rPr>
-              <a:t>LESSONFORGE 微课</a:t>
-            </a:r>
-          </a:p>
-        </p:txBody>
-      </p:sp>
-      <p:sp>
-        <p:nvSpPr>
-          <p:cNvPr id="4" name="TextBox 3"/>
-          <p:cNvSpPr txBox="1"/>
-          <p:nvPr/>
-        </p:nvSpPr>
-        <p:spPr>
-          <a:xfrm>
-            <a:off x="10607040" y="6419088"/>
-            <a:ext cx="1097280" cy="274320"/>
-          </a:xfrm>
-          <a:prstGeom prst="rect">
-            <a:avLst/>
-          </a:prstGeom>
-          <a:noFill/>
-        </p:spPr>
-        <p:txBody>
-          <a:bodyPr wrap="none">
-            <a:spAutoFit/>
-          </a:bodyPr>
-          <a:lstStyle/>
-          <a:p>
-            <a:pPr algn="r"/>
-            <a:r>
-              <a:rPr sz="1000" b="1">
-                <a:solidFill>
-                  <a:srgbClr val="5A6478"/>
-                </a:solidFill>
-                <a:latin typeface="Microsoft YaHei"/>
-              </a:rPr>
-              <a:t>06</a:t>
-            </a:r>
-          </a:p>
-        </p:txBody>
-      </p:sp>
-      <p:sp>
-        <p:nvSpPr>
-          <p:cNvPr id="5" name="TextBox 4"/>
-          <p:cNvSpPr txBox="1"/>
-          <p:nvPr/>
-        </p:nvSpPr>
-        <p:spPr>
-          <a:xfrm>
-            <a:off x="548640" y="457200"/>
-            <a:ext cx="11064240" cy="777240"/>
-          </a:xfrm>
-          <a:prstGeom prst="rect">
-            <a:avLst/>
-          </a:prstGeom>
-          <a:noFill/>
-        </p:spPr>
-        <p:txBody>
-          <a:bodyPr wrap="square" lIns="18288" rIns="18288" tIns="9144" bIns="9144" anchor="ctr">
-            <a:spAutoFit/>
-          </a:bodyPr>
-          <a:lstStyle/>
-          <a:p>
-            <a:pPr algn="l"/>
-            <a:r>
-              <a:rPr sz="2800" b="1" i="0">
-                <a:solidFill>
-                  <a:srgbClr val="0B3D91"/>
-                </a:solidFill>
-                <a:latin typeface="Microsoft YaHei"/>
-              </a:rPr>
-              <a:t/>
-            </a:r>
-          </a:p>
-        </p:txBody>
-      </p:sp>
-      <p:sp>
-        <p:nvSpPr>
-          <p:cNvPr id="6" name="Rectangle 5"/>
+          <p:cNvPr id="3" name="Oval 2"/>
           <p:cNvSpPr/>
           <p:nvPr/>
         </p:nvSpPr>
         <p:spPr>
           <a:xfrm>
-            <a:off x="566928" y="1298448"/>
-            <a:ext cx="1234440" cy="82296"/>
-          </a:xfrm>
-          <a:prstGeom prst="rect">
+            <a:off x="11521440" y="320040"/>
+            <a:ext cx="457200" cy="457200"/>
+          </a:xfrm>
+          <a:prstGeom prst="ellipse">
             <a:avLst/>
           </a:prstGeom>
           <a:solidFill>
@@ -7630,14 +9867,84 @@
       </p:sp>
       <p:sp>
         <p:nvSpPr>
-          <p:cNvPr id="7" name="TextBox 6"/>
+          <p:cNvPr id="4" name="TextBox 3"/>
           <p:cNvSpPr txBox="1"/>
           <p:nvPr/>
         </p:nvSpPr>
         <p:spPr>
           <a:xfrm>
-            <a:off x="594360" y="1645920"/>
-            <a:ext cx="3200400" cy="457200"/>
+            <a:off x="457200" y="6419088"/>
+            <a:ext cx="3657600" cy="274320"/>
+          </a:xfrm>
+          <a:prstGeom prst="rect">
+            <a:avLst/>
+          </a:prstGeom>
+          <a:noFill/>
+        </p:spPr>
+        <p:txBody>
+          <a:bodyPr wrap="none">
+            <a:spAutoFit/>
+          </a:bodyPr>
+          <a:lstStyle/>
+          <a:p>
+            <a:pPr algn="l"/>
+            <a:r>
+              <a:rPr sz="900" b="0">
+                <a:solidFill>
+                  <a:srgbClr val="5A6478"/>
+                </a:solidFill>
+                <a:latin typeface="Microsoft YaHei"/>
+              </a:rPr>
+              <a:t>LESSONFORGE 微课</a:t>
+            </a:r>
+          </a:p>
+        </p:txBody>
+      </p:sp>
+      <p:sp>
+        <p:nvSpPr>
+          <p:cNvPr id="5" name="TextBox 4"/>
+          <p:cNvSpPr txBox="1"/>
+          <p:nvPr/>
+        </p:nvSpPr>
+        <p:spPr>
+          <a:xfrm>
+            <a:off x="10607040" y="6419088"/>
+            <a:ext cx="1097280" cy="274320"/>
+          </a:xfrm>
+          <a:prstGeom prst="rect">
+            <a:avLst/>
+          </a:prstGeom>
+          <a:noFill/>
+        </p:spPr>
+        <p:txBody>
+          <a:bodyPr wrap="none">
+            <a:spAutoFit/>
+          </a:bodyPr>
+          <a:lstStyle/>
+          <a:p>
+            <a:pPr algn="r"/>
+            <a:r>
+              <a:rPr sz="1000" b="1">
+                <a:solidFill>
+                  <a:srgbClr val="5A6478"/>
+                </a:solidFill>
+                <a:latin typeface="Microsoft YaHei"/>
+              </a:rPr>
+              <a:t>06</a:t>
+            </a:r>
+          </a:p>
+        </p:txBody>
+      </p:sp>
+      <p:sp>
+        <p:nvSpPr>
+          <p:cNvPr id="6" name="TextBox 5"/>
+          <p:cNvSpPr txBox="1"/>
+          <p:nvPr/>
+        </p:nvSpPr>
+        <p:spPr>
+          <a:xfrm>
+            <a:off x="640080" y="548640"/>
+            <a:ext cx="10607040" cy="731520"/>
           </a:xfrm>
           <a:prstGeom prst="rect">
             <a:avLst/>
@@ -7652,7 +9959,7 @@
           <a:p>
             <a:pPr algn="l"/>
             <a:r>
-              <a:rPr sz="1400" b="1" i="0">
+              <a:rPr sz="2800" b="1" i="0">
                 <a:solidFill>
                   <a:srgbClr val="0B3D91"/>
                 </a:solidFill>
@@ -7665,14 +9972,106 @@
       </p:sp>
       <p:sp>
         <p:nvSpPr>
-          <p:cNvPr id="8" name="TextBox 7"/>
+          <p:cNvPr id="7" name="Rectangle 6"/>
+          <p:cNvSpPr/>
+          <p:nvPr/>
+        </p:nvSpPr>
+        <p:spPr>
+          <a:xfrm>
+            <a:off x="667512" y="1353312"/>
+            <a:ext cx="1234440" cy="73152"/>
+          </a:xfrm>
+          <a:prstGeom prst="rect">
+            <a:avLst/>
+          </a:prstGeom>
+          <a:solidFill>
+            <a:srgbClr val="D6E4FF"/>
+          </a:solidFill>
+          <a:ln>
+            <a:noFill/>
+          </a:ln>
+          <a:effectLst/>
+        </p:spPr>
+        <p:style>
+          <a:lnRef idx="1">
+            <a:schemeClr val="accent1"/>
+          </a:lnRef>
+          <a:fillRef idx="3">
+            <a:schemeClr val="accent1"/>
+          </a:fillRef>
+          <a:effectRef idx="2">
+            <a:schemeClr val="accent1"/>
+          </a:effectRef>
+          <a:fontRef idx="minor">
+            <a:schemeClr val="lt1"/>
+          </a:fontRef>
+        </p:style>
+        <p:txBody>
+          <a:bodyPr rtlCol="0" anchor="ctr"/>
+          <a:lstStyle/>
+          <a:p>
+            <a:pPr algn="ctr"/>
+          </a:p>
+        </p:txBody>
+      </p:sp>
+      <p:sp>
+        <p:nvSpPr>
+          <p:cNvPr id="8" name="Rounded Rectangle 7"/>
+          <p:cNvSpPr/>
+          <p:nvPr/>
+        </p:nvSpPr>
+        <p:spPr>
+          <a:xfrm>
+            <a:off x="384047" y="1435608"/>
+            <a:ext cx="3438144" cy="969264"/>
+          </a:xfrm>
+          <a:prstGeom prst="roundRect">
+            <a:avLst>
+              <a:gd name="adj" fmla="val 8000"/>
+            </a:avLst>
+          </a:prstGeom>
+          <a:solidFill>
+            <a:srgbClr val="EEF3FF"/>
+          </a:solidFill>
+          <a:ln w="9525">
+            <a:solidFill>
+              <a:srgbClr val="D6E4FF"/>
+            </a:solidFill>
+          </a:ln>
+          <a:effectLst/>
+        </p:spPr>
+        <p:style>
+          <a:lnRef idx="1">
+            <a:schemeClr val="accent1"/>
+          </a:lnRef>
+          <a:fillRef idx="3">
+            <a:schemeClr val="accent1"/>
+          </a:fillRef>
+          <a:effectRef idx="2">
+            <a:schemeClr val="accent1"/>
+          </a:effectRef>
+          <a:fontRef idx="minor">
+            <a:schemeClr val="lt1"/>
+          </a:fontRef>
+        </p:style>
+        <p:txBody>
+          <a:bodyPr rtlCol="0" anchor="ctr"/>
+          <a:lstStyle/>
+          <a:p>
+            <a:pPr algn="ctr"/>
+          </a:p>
+        </p:txBody>
+      </p:sp>
+      <p:sp>
+        <p:nvSpPr>
+          <p:cNvPr id="9" name="TextBox 8"/>
           <p:cNvSpPr txBox="1"/>
           <p:nvPr/>
         </p:nvSpPr>
         <p:spPr>
           <a:xfrm>
-            <a:off x="594360" y="2194560"/>
-            <a:ext cx="10972800" cy="731520"/>
+            <a:off x="640080" y="1691640"/>
+            <a:ext cx="2926080" cy="457200"/>
           </a:xfrm>
           <a:prstGeom prst="rect">
             <a:avLst/>
@@ -7687,9 +10086,9 @@
           <a:p>
             <a:pPr algn="l"/>
             <a:r>
-              <a:rPr sz="1800" b="1" i="0">
-                <a:solidFill>
-                  <a:srgbClr val="0A0F1E"/>
+              <a:rPr sz="1400" b="1" i="0">
+                <a:solidFill>
+                  <a:srgbClr val="0B3D91"/>
                 </a:solidFill>
                 <a:latin typeface="Microsoft YaHei"/>
               </a:rPr>
@@ -7700,14 +10099,62 @@
       </p:sp>
       <p:sp>
         <p:nvSpPr>
-          <p:cNvPr id="9" name="TextBox 8"/>
+          <p:cNvPr id="10" name="Rounded Rectangle 9"/>
+          <p:cNvSpPr/>
+          <p:nvPr/>
+        </p:nvSpPr>
+        <p:spPr>
+          <a:xfrm>
+            <a:off x="384047" y="2029967"/>
+            <a:ext cx="5861304" cy="2157984"/>
+          </a:xfrm>
+          <a:prstGeom prst="roundRect">
+            <a:avLst>
+              <a:gd name="adj" fmla="val 8000"/>
+            </a:avLst>
+          </a:prstGeom>
+          <a:solidFill>
+            <a:srgbClr val="EEF3FF"/>
+          </a:solidFill>
+          <a:ln w="9525">
+            <a:solidFill>
+              <a:srgbClr val="D6E4FF"/>
+            </a:solidFill>
+          </a:ln>
+          <a:effectLst/>
+        </p:spPr>
+        <p:style>
+          <a:lnRef idx="1">
+            <a:schemeClr val="accent1"/>
+          </a:lnRef>
+          <a:fillRef idx="3">
+            <a:schemeClr val="accent1"/>
+          </a:fillRef>
+          <a:effectRef idx="2">
+            <a:schemeClr val="accent1"/>
+          </a:effectRef>
+          <a:fontRef idx="minor">
+            <a:schemeClr val="lt1"/>
+          </a:fontRef>
+        </p:style>
+        <p:txBody>
+          <a:bodyPr rtlCol="0" anchor="ctr"/>
+          <a:lstStyle/>
+          <a:p>
+            <a:pPr algn="ctr"/>
+          </a:p>
+        </p:txBody>
+      </p:sp>
+      <p:sp>
+        <p:nvSpPr>
+          <p:cNvPr id="11" name="TextBox 10"/>
           <p:cNvSpPr txBox="1"/>
           <p:nvPr/>
         </p:nvSpPr>
         <p:spPr>
           <a:xfrm>
-            <a:off x="594360" y="3108960"/>
-            <a:ext cx="10972800" cy="594360"/>
+            <a:off x="640080" y="2286000"/>
+            <a:ext cx="5349240" cy="1645920"/>
           </a:xfrm>
           <a:prstGeom prst="rect">
             <a:avLst/>
@@ -7735,14 +10182,62 @@
       </p:sp>
       <p:sp>
         <p:nvSpPr>
-          <p:cNvPr id="10" name="TextBox 9"/>
+          <p:cNvPr id="12" name="Rounded Rectangle 11"/>
+          <p:cNvSpPr/>
+          <p:nvPr/>
+        </p:nvSpPr>
+        <p:spPr>
+          <a:xfrm>
+            <a:off x="6053327" y="2029967"/>
+            <a:ext cx="5861304" cy="2157984"/>
+          </a:xfrm>
+          <a:prstGeom prst="roundRect">
+            <a:avLst>
+              <a:gd name="adj" fmla="val 8000"/>
+            </a:avLst>
+          </a:prstGeom>
+          <a:solidFill>
+            <a:srgbClr val="EEF3FF"/>
+          </a:solidFill>
+          <a:ln w="9525">
+            <a:solidFill>
+              <a:srgbClr val="D6E4FF"/>
+            </a:solidFill>
+          </a:ln>
+          <a:effectLst/>
+        </p:spPr>
+        <p:style>
+          <a:lnRef idx="1">
+            <a:schemeClr val="accent1"/>
+          </a:lnRef>
+          <a:fillRef idx="3">
+            <a:schemeClr val="accent1"/>
+          </a:fillRef>
+          <a:effectRef idx="2">
+            <a:schemeClr val="accent1"/>
+          </a:effectRef>
+          <a:fontRef idx="minor">
+            <a:schemeClr val="lt1"/>
+          </a:fontRef>
+        </p:style>
+        <p:txBody>
+          <a:bodyPr rtlCol="0" anchor="ctr"/>
+          <a:lstStyle/>
+          <a:p>
+            <a:pPr algn="ctr"/>
+          </a:p>
+        </p:txBody>
+      </p:sp>
+      <p:sp>
+        <p:nvSpPr>
+          <p:cNvPr id="13" name="TextBox 12"/>
           <p:cNvSpPr txBox="1"/>
           <p:nvPr/>
         </p:nvSpPr>
         <p:spPr>
           <a:xfrm>
-            <a:off x="594360" y="3822191"/>
-            <a:ext cx="10972800" cy="594360"/>
+            <a:off x="6309359" y="2286000"/>
+            <a:ext cx="5349240" cy="1645920"/>
           </a:xfrm>
           <a:prstGeom prst="rect">
             <a:avLst/>
@@ -7770,14 +10265,62 @@
       </p:sp>
       <p:sp>
         <p:nvSpPr>
-          <p:cNvPr id="11" name="TextBox 10"/>
+          <p:cNvPr id="14" name="Rounded Rectangle 13"/>
+          <p:cNvSpPr/>
+          <p:nvPr/>
+        </p:nvSpPr>
+        <p:spPr>
+          <a:xfrm>
+            <a:off x="384047" y="3995928"/>
+            <a:ext cx="5861304" cy="2157984"/>
+          </a:xfrm>
+          <a:prstGeom prst="roundRect">
+            <a:avLst>
+              <a:gd name="adj" fmla="val 8000"/>
+            </a:avLst>
+          </a:prstGeom>
+          <a:solidFill>
+            <a:srgbClr val="EEF3FF"/>
+          </a:solidFill>
+          <a:ln w="9525">
+            <a:solidFill>
+              <a:srgbClr val="D6E4FF"/>
+            </a:solidFill>
+          </a:ln>
+          <a:effectLst/>
+        </p:spPr>
+        <p:style>
+          <a:lnRef idx="1">
+            <a:schemeClr val="accent1"/>
+          </a:lnRef>
+          <a:fillRef idx="3">
+            <a:schemeClr val="accent1"/>
+          </a:fillRef>
+          <a:effectRef idx="2">
+            <a:schemeClr val="accent1"/>
+          </a:effectRef>
+          <a:fontRef idx="minor">
+            <a:schemeClr val="lt1"/>
+          </a:fontRef>
+        </p:style>
+        <p:txBody>
+          <a:bodyPr rtlCol="0" anchor="ctr"/>
+          <a:lstStyle/>
+          <a:p>
+            <a:pPr algn="ctr"/>
+          </a:p>
+        </p:txBody>
+      </p:sp>
+      <p:sp>
+        <p:nvSpPr>
+          <p:cNvPr id="15" name="TextBox 14"/>
           <p:cNvSpPr txBox="1"/>
           <p:nvPr/>
         </p:nvSpPr>
         <p:spPr>
           <a:xfrm>
-            <a:off x="594360" y="4535424"/>
-            <a:ext cx="10972800" cy="594360"/>
+            <a:off x="640080" y="4251960"/>
+            <a:ext cx="5349240" cy="1645920"/>
           </a:xfrm>
           <a:prstGeom prst="rect">
             <a:avLst/>
@@ -7805,14 +10348,62 @@
       </p:sp>
       <p:sp>
         <p:nvSpPr>
-          <p:cNvPr id="12" name="TextBox 11"/>
+          <p:cNvPr id="16" name="Rounded Rectangle 15"/>
+          <p:cNvSpPr/>
+          <p:nvPr/>
+        </p:nvSpPr>
+        <p:spPr>
+          <a:xfrm>
+            <a:off x="6053327" y="3995928"/>
+            <a:ext cx="5861304" cy="2157984"/>
+          </a:xfrm>
+          <a:prstGeom prst="roundRect">
+            <a:avLst>
+              <a:gd name="adj" fmla="val 8000"/>
+            </a:avLst>
+          </a:prstGeom>
+          <a:solidFill>
+            <a:srgbClr val="EEF3FF"/>
+          </a:solidFill>
+          <a:ln w="9525">
+            <a:solidFill>
+              <a:srgbClr val="D6E4FF"/>
+            </a:solidFill>
+          </a:ln>
+          <a:effectLst/>
+        </p:spPr>
+        <p:style>
+          <a:lnRef idx="1">
+            <a:schemeClr val="accent1"/>
+          </a:lnRef>
+          <a:fillRef idx="3">
+            <a:schemeClr val="accent1"/>
+          </a:fillRef>
+          <a:effectRef idx="2">
+            <a:schemeClr val="accent1"/>
+          </a:effectRef>
+          <a:fontRef idx="minor">
+            <a:schemeClr val="lt1"/>
+          </a:fontRef>
+        </p:style>
+        <p:txBody>
+          <a:bodyPr rtlCol="0" anchor="ctr"/>
+          <a:lstStyle/>
+          <a:p>
+            <a:pPr algn="ctr"/>
+          </a:p>
+        </p:txBody>
+      </p:sp>
+      <p:sp>
+        <p:nvSpPr>
+          <p:cNvPr id="17" name="TextBox 16"/>
           <p:cNvSpPr txBox="1"/>
           <p:nvPr/>
         </p:nvSpPr>
         <p:spPr>
           <a:xfrm>
-            <a:off x="594360" y="5248656"/>
-            <a:ext cx="10972800" cy="594360"/>
+            <a:off x="6309359" y="4251960"/>
+            <a:ext cx="5349240" cy="1645920"/>
           </a:xfrm>
           <a:prstGeom prst="rect">
             <a:avLst/>
@@ -7873,7 +10464,7 @@
         <p:spPr>
           <a:xfrm>
             <a:off x="0" y="0"/>
-            <a:ext cx="118872" cy="6858000"/>
+            <a:ext cx="12191695" cy="109728"/>
           </a:xfrm>
           <a:prstGeom prst="rect">
             <a:avLst/>
@@ -7910,121 +10501,16 @@
       </p:sp>
       <p:sp>
         <p:nvSpPr>
-          <p:cNvPr id="3" name="TextBox 2"/>
-          <p:cNvSpPr txBox="1"/>
-          <p:nvPr/>
-        </p:nvSpPr>
-        <p:spPr>
-          <a:xfrm>
-            <a:off x="457200" y="6419088"/>
-            <a:ext cx="3657600" cy="274320"/>
-          </a:xfrm>
-          <a:prstGeom prst="rect">
-            <a:avLst/>
-          </a:prstGeom>
-          <a:noFill/>
-        </p:spPr>
-        <p:txBody>
-          <a:bodyPr wrap="none">
-            <a:spAutoFit/>
-          </a:bodyPr>
-          <a:lstStyle/>
-          <a:p>
-            <a:pPr algn="l"/>
-            <a:r>
-              <a:rPr sz="900" b="0">
-                <a:solidFill>
-                  <a:srgbClr val="5A6478"/>
-                </a:solidFill>
-                <a:latin typeface="Microsoft YaHei"/>
-              </a:rPr>
-              <a:t>LESSONFORGE 微课</a:t>
-            </a:r>
-          </a:p>
-        </p:txBody>
-      </p:sp>
-      <p:sp>
-        <p:nvSpPr>
-          <p:cNvPr id="4" name="TextBox 3"/>
-          <p:cNvSpPr txBox="1"/>
-          <p:nvPr/>
-        </p:nvSpPr>
-        <p:spPr>
-          <a:xfrm>
-            <a:off x="10607040" y="6419088"/>
-            <a:ext cx="1097280" cy="274320"/>
-          </a:xfrm>
-          <a:prstGeom prst="rect">
-            <a:avLst/>
-          </a:prstGeom>
-          <a:noFill/>
-        </p:spPr>
-        <p:txBody>
-          <a:bodyPr wrap="none">
-            <a:spAutoFit/>
-          </a:bodyPr>
-          <a:lstStyle/>
-          <a:p>
-            <a:pPr algn="r"/>
-            <a:r>
-              <a:rPr sz="1000" b="1">
-                <a:solidFill>
-                  <a:srgbClr val="5A6478"/>
-                </a:solidFill>
-                <a:latin typeface="Microsoft YaHei"/>
-              </a:rPr>
-              <a:t>07</a:t>
-            </a:r>
-          </a:p>
-        </p:txBody>
-      </p:sp>
-      <p:sp>
-        <p:nvSpPr>
-          <p:cNvPr id="5" name="TextBox 4"/>
-          <p:cNvSpPr txBox="1"/>
-          <p:nvPr/>
-        </p:nvSpPr>
-        <p:spPr>
-          <a:xfrm>
-            <a:off x="548640" y="457200"/>
-            <a:ext cx="11064240" cy="777240"/>
-          </a:xfrm>
-          <a:prstGeom prst="rect">
-            <a:avLst/>
-          </a:prstGeom>
-          <a:noFill/>
-        </p:spPr>
-        <p:txBody>
-          <a:bodyPr wrap="square" lIns="18288" rIns="18288" tIns="9144" bIns="9144" anchor="ctr">
-            <a:spAutoFit/>
-          </a:bodyPr>
-          <a:lstStyle/>
-          <a:p>
-            <a:pPr algn="l"/>
-            <a:r>
-              <a:rPr sz="2800" b="1" i="0">
-                <a:solidFill>
-                  <a:srgbClr val="0B3D91"/>
-                </a:solidFill>
-                <a:latin typeface="Microsoft YaHei"/>
-              </a:rPr>
-              <a:t/>
-            </a:r>
-          </a:p>
-        </p:txBody>
-      </p:sp>
-      <p:sp>
-        <p:nvSpPr>
-          <p:cNvPr id="6" name="Rectangle 5"/>
+          <p:cNvPr id="3" name="Oval 2"/>
           <p:cNvSpPr/>
           <p:nvPr/>
         </p:nvSpPr>
         <p:spPr>
           <a:xfrm>
-            <a:off x="566928" y="1298448"/>
-            <a:ext cx="1234440" cy="82296"/>
-          </a:xfrm>
-          <a:prstGeom prst="rect">
+            <a:off x="11521440" y="320040"/>
+            <a:ext cx="457200" cy="457200"/>
+          </a:xfrm>
+          <a:prstGeom prst="ellipse">
             <a:avLst/>
           </a:prstGeom>
           <a:solidFill>
@@ -8059,14 +10545,84 @@
       </p:sp>
       <p:sp>
         <p:nvSpPr>
-          <p:cNvPr id="7" name="TextBox 6"/>
+          <p:cNvPr id="4" name="TextBox 3"/>
           <p:cNvSpPr txBox="1"/>
           <p:nvPr/>
         </p:nvSpPr>
         <p:spPr>
           <a:xfrm>
-            <a:off x="594360" y="1645920"/>
-            <a:ext cx="3200400" cy="457200"/>
+            <a:off x="457200" y="6419088"/>
+            <a:ext cx="3657600" cy="274320"/>
+          </a:xfrm>
+          <a:prstGeom prst="rect">
+            <a:avLst/>
+          </a:prstGeom>
+          <a:noFill/>
+        </p:spPr>
+        <p:txBody>
+          <a:bodyPr wrap="none">
+            <a:spAutoFit/>
+          </a:bodyPr>
+          <a:lstStyle/>
+          <a:p>
+            <a:pPr algn="l"/>
+            <a:r>
+              <a:rPr sz="900" b="0">
+                <a:solidFill>
+                  <a:srgbClr val="5A6478"/>
+                </a:solidFill>
+                <a:latin typeface="Microsoft YaHei"/>
+              </a:rPr>
+              <a:t>LESSONFORGE 微课</a:t>
+            </a:r>
+          </a:p>
+        </p:txBody>
+      </p:sp>
+      <p:sp>
+        <p:nvSpPr>
+          <p:cNvPr id="5" name="TextBox 4"/>
+          <p:cNvSpPr txBox="1"/>
+          <p:nvPr/>
+        </p:nvSpPr>
+        <p:spPr>
+          <a:xfrm>
+            <a:off x="10607040" y="6419088"/>
+            <a:ext cx="1097280" cy="274320"/>
+          </a:xfrm>
+          <a:prstGeom prst="rect">
+            <a:avLst/>
+          </a:prstGeom>
+          <a:noFill/>
+        </p:spPr>
+        <p:txBody>
+          <a:bodyPr wrap="none">
+            <a:spAutoFit/>
+          </a:bodyPr>
+          <a:lstStyle/>
+          <a:p>
+            <a:pPr algn="r"/>
+            <a:r>
+              <a:rPr sz="1000" b="1">
+                <a:solidFill>
+                  <a:srgbClr val="5A6478"/>
+                </a:solidFill>
+                <a:latin typeface="Microsoft YaHei"/>
+              </a:rPr>
+              <a:t>07</a:t>
+            </a:r>
+          </a:p>
+        </p:txBody>
+      </p:sp>
+      <p:sp>
+        <p:nvSpPr>
+          <p:cNvPr id="6" name="TextBox 5"/>
+          <p:cNvSpPr txBox="1"/>
+          <p:nvPr/>
+        </p:nvSpPr>
+        <p:spPr>
+          <a:xfrm>
+            <a:off x="640080" y="548640"/>
+            <a:ext cx="10607040" cy="731520"/>
           </a:xfrm>
           <a:prstGeom prst="rect">
             <a:avLst/>
@@ -8081,7 +10637,7 @@
           <a:p>
             <a:pPr algn="l"/>
             <a:r>
-              <a:rPr sz="1400" b="1" i="0">
+              <a:rPr sz="2800" b="1" i="0">
                 <a:solidFill>
                   <a:srgbClr val="0B3D91"/>
                 </a:solidFill>
@@ -8094,14 +10650,106 @@
       </p:sp>
       <p:sp>
         <p:nvSpPr>
-          <p:cNvPr id="8" name="TextBox 7"/>
+          <p:cNvPr id="7" name="Rectangle 6"/>
+          <p:cNvSpPr/>
+          <p:nvPr/>
+        </p:nvSpPr>
+        <p:spPr>
+          <a:xfrm>
+            <a:off x="667512" y="1353312"/>
+            <a:ext cx="1234440" cy="73152"/>
+          </a:xfrm>
+          <a:prstGeom prst="rect">
+            <a:avLst/>
+          </a:prstGeom>
+          <a:solidFill>
+            <a:srgbClr val="D6E4FF"/>
+          </a:solidFill>
+          <a:ln>
+            <a:noFill/>
+          </a:ln>
+          <a:effectLst/>
+        </p:spPr>
+        <p:style>
+          <a:lnRef idx="1">
+            <a:schemeClr val="accent1"/>
+          </a:lnRef>
+          <a:fillRef idx="3">
+            <a:schemeClr val="accent1"/>
+          </a:fillRef>
+          <a:effectRef idx="2">
+            <a:schemeClr val="accent1"/>
+          </a:effectRef>
+          <a:fontRef idx="minor">
+            <a:schemeClr val="lt1"/>
+          </a:fontRef>
+        </p:style>
+        <p:txBody>
+          <a:bodyPr rtlCol="0" anchor="ctr"/>
+          <a:lstStyle/>
+          <a:p>
+            <a:pPr algn="ctr"/>
+          </a:p>
+        </p:txBody>
+      </p:sp>
+      <p:sp>
+        <p:nvSpPr>
+          <p:cNvPr id="8" name="Rounded Rectangle 7"/>
+          <p:cNvSpPr/>
+          <p:nvPr/>
+        </p:nvSpPr>
+        <p:spPr>
+          <a:xfrm>
+            <a:off x="384047" y="1435608"/>
+            <a:ext cx="3438144" cy="969264"/>
+          </a:xfrm>
+          <a:prstGeom prst="roundRect">
+            <a:avLst>
+              <a:gd name="adj" fmla="val 8000"/>
+            </a:avLst>
+          </a:prstGeom>
+          <a:solidFill>
+            <a:srgbClr val="EEF3FF"/>
+          </a:solidFill>
+          <a:ln w="9525">
+            <a:solidFill>
+              <a:srgbClr val="D6E4FF"/>
+            </a:solidFill>
+          </a:ln>
+          <a:effectLst/>
+        </p:spPr>
+        <p:style>
+          <a:lnRef idx="1">
+            <a:schemeClr val="accent1"/>
+          </a:lnRef>
+          <a:fillRef idx="3">
+            <a:schemeClr val="accent1"/>
+          </a:fillRef>
+          <a:effectRef idx="2">
+            <a:schemeClr val="accent1"/>
+          </a:effectRef>
+          <a:fontRef idx="minor">
+            <a:schemeClr val="lt1"/>
+          </a:fontRef>
+        </p:style>
+        <p:txBody>
+          <a:bodyPr rtlCol="0" anchor="ctr"/>
+          <a:lstStyle/>
+          <a:p>
+            <a:pPr algn="ctr"/>
+          </a:p>
+        </p:txBody>
+      </p:sp>
+      <p:sp>
+        <p:nvSpPr>
+          <p:cNvPr id="9" name="TextBox 8"/>
           <p:cNvSpPr txBox="1"/>
           <p:nvPr/>
         </p:nvSpPr>
         <p:spPr>
           <a:xfrm>
-            <a:off x="594360" y="2194560"/>
-            <a:ext cx="10972800" cy="731520"/>
+            <a:off x="640080" y="1691640"/>
+            <a:ext cx="2926080" cy="457200"/>
           </a:xfrm>
           <a:prstGeom prst="rect">
             <a:avLst/>
@@ -8116,9 +10764,9 @@
           <a:p>
             <a:pPr algn="l"/>
             <a:r>
-              <a:rPr sz="1800" b="1" i="0">
-                <a:solidFill>
-                  <a:srgbClr val="0A0F1E"/>
+              <a:rPr sz="1400" b="1" i="0">
+                <a:solidFill>
+                  <a:srgbClr val="0B3D91"/>
                 </a:solidFill>
                 <a:latin typeface="Microsoft YaHei"/>
               </a:rPr>
@@ -8129,14 +10777,62 @@
       </p:sp>
       <p:sp>
         <p:nvSpPr>
-          <p:cNvPr id="9" name="TextBox 8"/>
+          <p:cNvPr id="10" name="Rounded Rectangle 9"/>
+          <p:cNvSpPr/>
+          <p:nvPr/>
+        </p:nvSpPr>
+        <p:spPr>
+          <a:xfrm>
+            <a:off x="384047" y="2029967"/>
+            <a:ext cx="5861304" cy="2157984"/>
+          </a:xfrm>
+          <a:prstGeom prst="roundRect">
+            <a:avLst>
+              <a:gd name="adj" fmla="val 8000"/>
+            </a:avLst>
+          </a:prstGeom>
+          <a:solidFill>
+            <a:srgbClr val="EEF3FF"/>
+          </a:solidFill>
+          <a:ln w="9525">
+            <a:solidFill>
+              <a:srgbClr val="D6E4FF"/>
+            </a:solidFill>
+          </a:ln>
+          <a:effectLst/>
+        </p:spPr>
+        <p:style>
+          <a:lnRef idx="1">
+            <a:schemeClr val="accent1"/>
+          </a:lnRef>
+          <a:fillRef idx="3">
+            <a:schemeClr val="accent1"/>
+          </a:fillRef>
+          <a:effectRef idx="2">
+            <a:schemeClr val="accent1"/>
+          </a:effectRef>
+          <a:fontRef idx="minor">
+            <a:schemeClr val="lt1"/>
+          </a:fontRef>
+        </p:style>
+        <p:txBody>
+          <a:bodyPr rtlCol="0" anchor="ctr"/>
+          <a:lstStyle/>
+          <a:p>
+            <a:pPr algn="ctr"/>
+          </a:p>
+        </p:txBody>
+      </p:sp>
+      <p:sp>
+        <p:nvSpPr>
+          <p:cNvPr id="11" name="TextBox 10"/>
           <p:cNvSpPr txBox="1"/>
           <p:nvPr/>
         </p:nvSpPr>
         <p:spPr>
           <a:xfrm>
-            <a:off x="594360" y="3108960"/>
-            <a:ext cx="10972800" cy="594360"/>
+            <a:off x="640080" y="2286000"/>
+            <a:ext cx="5349240" cy="1645920"/>
           </a:xfrm>
           <a:prstGeom prst="rect">
             <a:avLst/>
@@ -8164,14 +10860,62 @@
       </p:sp>
       <p:sp>
         <p:nvSpPr>
-          <p:cNvPr id="10" name="TextBox 9"/>
+          <p:cNvPr id="12" name="Rounded Rectangle 11"/>
+          <p:cNvSpPr/>
+          <p:nvPr/>
+        </p:nvSpPr>
+        <p:spPr>
+          <a:xfrm>
+            <a:off x="6053327" y="2029967"/>
+            <a:ext cx="5861304" cy="2157984"/>
+          </a:xfrm>
+          <a:prstGeom prst="roundRect">
+            <a:avLst>
+              <a:gd name="adj" fmla="val 8000"/>
+            </a:avLst>
+          </a:prstGeom>
+          <a:solidFill>
+            <a:srgbClr val="EEF3FF"/>
+          </a:solidFill>
+          <a:ln w="9525">
+            <a:solidFill>
+              <a:srgbClr val="D6E4FF"/>
+            </a:solidFill>
+          </a:ln>
+          <a:effectLst/>
+        </p:spPr>
+        <p:style>
+          <a:lnRef idx="1">
+            <a:schemeClr val="accent1"/>
+          </a:lnRef>
+          <a:fillRef idx="3">
+            <a:schemeClr val="accent1"/>
+          </a:fillRef>
+          <a:effectRef idx="2">
+            <a:schemeClr val="accent1"/>
+          </a:effectRef>
+          <a:fontRef idx="minor">
+            <a:schemeClr val="lt1"/>
+          </a:fontRef>
+        </p:style>
+        <p:txBody>
+          <a:bodyPr rtlCol="0" anchor="ctr"/>
+          <a:lstStyle/>
+          <a:p>
+            <a:pPr algn="ctr"/>
+          </a:p>
+        </p:txBody>
+      </p:sp>
+      <p:sp>
+        <p:nvSpPr>
+          <p:cNvPr id="13" name="TextBox 12"/>
           <p:cNvSpPr txBox="1"/>
           <p:nvPr/>
         </p:nvSpPr>
         <p:spPr>
           <a:xfrm>
-            <a:off x="594360" y="3822191"/>
-            <a:ext cx="10972800" cy="594360"/>
+            <a:off x="6309359" y="2286000"/>
+            <a:ext cx="5349240" cy="1645920"/>
           </a:xfrm>
           <a:prstGeom prst="rect">
             <a:avLst/>
@@ -8199,14 +10943,62 @@
       </p:sp>
       <p:sp>
         <p:nvSpPr>
-          <p:cNvPr id="11" name="TextBox 10"/>
+          <p:cNvPr id="14" name="Rounded Rectangle 13"/>
+          <p:cNvSpPr/>
+          <p:nvPr/>
+        </p:nvSpPr>
+        <p:spPr>
+          <a:xfrm>
+            <a:off x="384047" y="3995928"/>
+            <a:ext cx="5861304" cy="2157984"/>
+          </a:xfrm>
+          <a:prstGeom prst="roundRect">
+            <a:avLst>
+              <a:gd name="adj" fmla="val 8000"/>
+            </a:avLst>
+          </a:prstGeom>
+          <a:solidFill>
+            <a:srgbClr val="EEF3FF"/>
+          </a:solidFill>
+          <a:ln w="9525">
+            <a:solidFill>
+              <a:srgbClr val="D6E4FF"/>
+            </a:solidFill>
+          </a:ln>
+          <a:effectLst/>
+        </p:spPr>
+        <p:style>
+          <a:lnRef idx="1">
+            <a:schemeClr val="accent1"/>
+          </a:lnRef>
+          <a:fillRef idx="3">
+            <a:schemeClr val="accent1"/>
+          </a:fillRef>
+          <a:effectRef idx="2">
+            <a:schemeClr val="accent1"/>
+          </a:effectRef>
+          <a:fontRef idx="minor">
+            <a:schemeClr val="lt1"/>
+          </a:fontRef>
+        </p:style>
+        <p:txBody>
+          <a:bodyPr rtlCol="0" anchor="ctr"/>
+          <a:lstStyle/>
+          <a:p>
+            <a:pPr algn="ctr"/>
+          </a:p>
+        </p:txBody>
+      </p:sp>
+      <p:sp>
+        <p:nvSpPr>
+          <p:cNvPr id="15" name="TextBox 14"/>
           <p:cNvSpPr txBox="1"/>
           <p:nvPr/>
         </p:nvSpPr>
         <p:spPr>
           <a:xfrm>
-            <a:off x="594360" y="4535424"/>
-            <a:ext cx="10972800" cy="594360"/>
+            <a:off x="640080" y="4251960"/>
+            <a:ext cx="5349240" cy="1645920"/>
           </a:xfrm>
           <a:prstGeom prst="rect">
             <a:avLst/>
@@ -8234,14 +11026,62 @@
       </p:sp>
       <p:sp>
         <p:nvSpPr>
-          <p:cNvPr id="12" name="TextBox 11"/>
+          <p:cNvPr id="16" name="Rounded Rectangle 15"/>
+          <p:cNvSpPr/>
+          <p:nvPr/>
+        </p:nvSpPr>
+        <p:spPr>
+          <a:xfrm>
+            <a:off x="6053327" y="3995928"/>
+            <a:ext cx="5861304" cy="2157984"/>
+          </a:xfrm>
+          <a:prstGeom prst="roundRect">
+            <a:avLst>
+              <a:gd name="adj" fmla="val 8000"/>
+            </a:avLst>
+          </a:prstGeom>
+          <a:solidFill>
+            <a:srgbClr val="EEF3FF"/>
+          </a:solidFill>
+          <a:ln w="9525">
+            <a:solidFill>
+              <a:srgbClr val="D6E4FF"/>
+            </a:solidFill>
+          </a:ln>
+          <a:effectLst/>
+        </p:spPr>
+        <p:style>
+          <a:lnRef idx="1">
+            <a:schemeClr val="accent1"/>
+          </a:lnRef>
+          <a:fillRef idx="3">
+            <a:schemeClr val="accent1"/>
+          </a:fillRef>
+          <a:effectRef idx="2">
+            <a:schemeClr val="accent1"/>
+          </a:effectRef>
+          <a:fontRef idx="minor">
+            <a:schemeClr val="lt1"/>
+          </a:fontRef>
+        </p:style>
+        <p:txBody>
+          <a:bodyPr rtlCol="0" anchor="ctr"/>
+          <a:lstStyle/>
+          <a:p>
+            <a:pPr algn="ctr"/>
+          </a:p>
+        </p:txBody>
+      </p:sp>
+      <p:sp>
+        <p:nvSpPr>
+          <p:cNvPr id="17" name="TextBox 16"/>
           <p:cNvSpPr txBox="1"/>
           <p:nvPr/>
         </p:nvSpPr>
         <p:spPr>
           <a:xfrm>
-            <a:off x="594360" y="5248656"/>
-            <a:ext cx="10972800" cy="594360"/>
+            <a:off x="6309359" y="4251960"/>
+            <a:ext cx="5349240" cy="1645920"/>
           </a:xfrm>
           <a:prstGeom prst="rect">
             <a:avLst/>
@@ -8302,7 +11142,7 @@
         <p:spPr>
           <a:xfrm>
             <a:off x="0" y="0"/>
-            <a:ext cx="118872" cy="6858000"/>
+            <a:ext cx="12191695" cy="109728"/>
           </a:xfrm>
           <a:prstGeom prst="rect">
             <a:avLst/>
@@ -8339,121 +11179,16 @@
       </p:sp>
       <p:sp>
         <p:nvSpPr>
-          <p:cNvPr id="3" name="TextBox 2"/>
-          <p:cNvSpPr txBox="1"/>
-          <p:nvPr/>
-        </p:nvSpPr>
-        <p:spPr>
-          <a:xfrm>
-            <a:off x="457200" y="6419088"/>
-            <a:ext cx="3657600" cy="274320"/>
-          </a:xfrm>
-          <a:prstGeom prst="rect">
-            <a:avLst/>
-          </a:prstGeom>
-          <a:noFill/>
-        </p:spPr>
-        <p:txBody>
-          <a:bodyPr wrap="none">
-            <a:spAutoFit/>
-          </a:bodyPr>
-          <a:lstStyle/>
-          <a:p>
-            <a:pPr algn="l"/>
-            <a:r>
-              <a:rPr sz="900" b="0">
-                <a:solidFill>
-                  <a:srgbClr val="5A6478"/>
-                </a:solidFill>
-                <a:latin typeface="Microsoft YaHei"/>
-              </a:rPr>
-              <a:t>LESSONFORGE 微课</a:t>
-            </a:r>
-          </a:p>
-        </p:txBody>
-      </p:sp>
-      <p:sp>
-        <p:nvSpPr>
-          <p:cNvPr id="4" name="TextBox 3"/>
-          <p:cNvSpPr txBox="1"/>
-          <p:nvPr/>
-        </p:nvSpPr>
-        <p:spPr>
-          <a:xfrm>
-            <a:off x="10607040" y="6419088"/>
-            <a:ext cx="1097280" cy="274320"/>
-          </a:xfrm>
-          <a:prstGeom prst="rect">
-            <a:avLst/>
-          </a:prstGeom>
-          <a:noFill/>
-        </p:spPr>
-        <p:txBody>
-          <a:bodyPr wrap="none">
-            <a:spAutoFit/>
-          </a:bodyPr>
-          <a:lstStyle/>
-          <a:p>
-            <a:pPr algn="r"/>
-            <a:r>
-              <a:rPr sz="1000" b="1">
-                <a:solidFill>
-                  <a:srgbClr val="5A6478"/>
-                </a:solidFill>
-                <a:latin typeface="Microsoft YaHei"/>
-              </a:rPr>
-              <a:t>08</a:t>
-            </a:r>
-          </a:p>
-        </p:txBody>
-      </p:sp>
-      <p:sp>
-        <p:nvSpPr>
-          <p:cNvPr id="5" name="TextBox 4"/>
-          <p:cNvSpPr txBox="1"/>
-          <p:nvPr/>
-        </p:nvSpPr>
-        <p:spPr>
-          <a:xfrm>
-            <a:off x="548640" y="457200"/>
-            <a:ext cx="11064240" cy="777240"/>
-          </a:xfrm>
-          <a:prstGeom prst="rect">
-            <a:avLst/>
-          </a:prstGeom>
-          <a:noFill/>
-        </p:spPr>
-        <p:txBody>
-          <a:bodyPr wrap="square" lIns="18288" rIns="18288" tIns="9144" bIns="9144" anchor="ctr">
-            <a:spAutoFit/>
-          </a:bodyPr>
-          <a:lstStyle/>
-          <a:p>
-            <a:pPr algn="l"/>
-            <a:r>
-              <a:rPr sz="2800" b="1" i="0">
-                <a:solidFill>
-                  <a:srgbClr val="0B3D91"/>
-                </a:solidFill>
-                <a:latin typeface="Microsoft YaHei"/>
-              </a:rPr>
-              <a:t/>
-            </a:r>
-          </a:p>
-        </p:txBody>
-      </p:sp>
-      <p:sp>
-        <p:nvSpPr>
-          <p:cNvPr id="6" name="Rectangle 5"/>
+          <p:cNvPr id="3" name="Oval 2"/>
           <p:cNvSpPr/>
           <p:nvPr/>
         </p:nvSpPr>
         <p:spPr>
           <a:xfrm>
-            <a:off x="566928" y="1298448"/>
-            <a:ext cx="1234440" cy="82296"/>
-          </a:xfrm>
-          <a:prstGeom prst="rect">
+            <a:off x="11521440" y="320040"/>
+            <a:ext cx="457200" cy="457200"/>
+          </a:xfrm>
+          <a:prstGeom prst="ellipse">
             <a:avLst/>
           </a:prstGeom>
           <a:solidFill>
@@ -8488,14 +11223,84 @@
       </p:sp>
       <p:sp>
         <p:nvSpPr>
-          <p:cNvPr id="7" name="TextBox 6"/>
+          <p:cNvPr id="4" name="TextBox 3"/>
           <p:cNvSpPr txBox="1"/>
           <p:nvPr/>
         </p:nvSpPr>
         <p:spPr>
           <a:xfrm>
-            <a:off x="594360" y="1645920"/>
-            <a:ext cx="3200400" cy="457200"/>
+            <a:off x="457200" y="6419088"/>
+            <a:ext cx="3657600" cy="274320"/>
+          </a:xfrm>
+          <a:prstGeom prst="rect">
+            <a:avLst/>
+          </a:prstGeom>
+          <a:noFill/>
+        </p:spPr>
+        <p:txBody>
+          <a:bodyPr wrap="none">
+            <a:spAutoFit/>
+          </a:bodyPr>
+          <a:lstStyle/>
+          <a:p>
+            <a:pPr algn="l"/>
+            <a:r>
+              <a:rPr sz="900" b="0">
+                <a:solidFill>
+                  <a:srgbClr val="5A6478"/>
+                </a:solidFill>
+                <a:latin typeface="Microsoft YaHei"/>
+              </a:rPr>
+              <a:t>LESSONFORGE 微课</a:t>
+            </a:r>
+          </a:p>
+        </p:txBody>
+      </p:sp>
+      <p:sp>
+        <p:nvSpPr>
+          <p:cNvPr id="5" name="TextBox 4"/>
+          <p:cNvSpPr txBox="1"/>
+          <p:nvPr/>
+        </p:nvSpPr>
+        <p:spPr>
+          <a:xfrm>
+            <a:off x="10607040" y="6419088"/>
+            <a:ext cx="1097280" cy="274320"/>
+          </a:xfrm>
+          <a:prstGeom prst="rect">
+            <a:avLst/>
+          </a:prstGeom>
+          <a:noFill/>
+        </p:spPr>
+        <p:txBody>
+          <a:bodyPr wrap="none">
+            <a:spAutoFit/>
+          </a:bodyPr>
+          <a:lstStyle/>
+          <a:p>
+            <a:pPr algn="r"/>
+            <a:r>
+              <a:rPr sz="1000" b="1">
+                <a:solidFill>
+                  <a:srgbClr val="5A6478"/>
+                </a:solidFill>
+                <a:latin typeface="Microsoft YaHei"/>
+              </a:rPr>
+              <a:t>08</a:t>
+            </a:r>
+          </a:p>
+        </p:txBody>
+      </p:sp>
+      <p:sp>
+        <p:nvSpPr>
+          <p:cNvPr id="6" name="TextBox 5"/>
+          <p:cNvSpPr txBox="1"/>
+          <p:nvPr/>
+        </p:nvSpPr>
+        <p:spPr>
+          <a:xfrm>
+            <a:off x="640080" y="548640"/>
+            <a:ext cx="10607040" cy="731520"/>
           </a:xfrm>
           <a:prstGeom prst="rect">
             <a:avLst/>
@@ -8510,7 +11315,7 @@
           <a:p>
             <a:pPr algn="l"/>
             <a:r>
-              <a:rPr sz="1400" b="1" i="0">
+              <a:rPr sz="2800" b="1" i="0">
                 <a:solidFill>
                   <a:srgbClr val="0B3D91"/>
                 </a:solidFill>
@@ -8523,14 +11328,106 @@
       </p:sp>
       <p:sp>
         <p:nvSpPr>
-          <p:cNvPr id="8" name="TextBox 7"/>
+          <p:cNvPr id="7" name="Rectangle 6"/>
+          <p:cNvSpPr/>
+          <p:nvPr/>
+        </p:nvSpPr>
+        <p:spPr>
+          <a:xfrm>
+            <a:off x="667512" y="1353312"/>
+            <a:ext cx="1234440" cy="73152"/>
+          </a:xfrm>
+          <a:prstGeom prst="rect">
+            <a:avLst/>
+          </a:prstGeom>
+          <a:solidFill>
+            <a:srgbClr val="D6E4FF"/>
+          </a:solidFill>
+          <a:ln>
+            <a:noFill/>
+          </a:ln>
+          <a:effectLst/>
+        </p:spPr>
+        <p:style>
+          <a:lnRef idx="1">
+            <a:schemeClr val="accent1"/>
+          </a:lnRef>
+          <a:fillRef idx="3">
+            <a:schemeClr val="accent1"/>
+          </a:fillRef>
+          <a:effectRef idx="2">
+            <a:schemeClr val="accent1"/>
+          </a:effectRef>
+          <a:fontRef idx="minor">
+            <a:schemeClr val="lt1"/>
+          </a:fontRef>
+        </p:style>
+        <p:txBody>
+          <a:bodyPr rtlCol="0" anchor="ctr"/>
+          <a:lstStyle/>
+          <a:p>
+            <a:pPr algn="ctr"/>
+          </a:p>
+        </p:txBody>
+      </p:sp>
+      <p:sp>
+        <p:nvSpPr>
+          <p:cNvPr id="8" name="Rounded Rectangle 7"/>
+          <p:cNvSpPr/>
+          <p:nvPr/>
+        </p:nvSpPr>
+        <p:spPr>
+          <a:xfrm>
+            <a:off x="384047" y="1435608"/>
+            <a:ext cx="3438144" cy="969264"/>
+          </a:xfrm>
+          <a:prstGeom prst="roundRect">
+            <a:avLst>
+              <a:gd name="adj" fmla="val 8000"/>
+            </a:avLst>
+          </a:prstGeom>
+          <a:solidFill>
+            <a:srgbClr val="EEF3FF"/>
+          </a:solidFill>
+          <a:ln w="9525">
+            <a:solidFill>
+              <a:srgbClr val="D6E4FF"/>
+            </a:solidFill>
+          </a:ln>
+          <a:effectLst/>
+        </p:spPr>
+        <p:style>
+          <a:lnRef idx="1">
+            <a:schemeClr val="accent1"/>
+          </a:lnRef>
+          <a:fillRef idx="3">
+            <a:schemeClr val="accent1"/>
+          </a:fillRef>
+          <a:effectRef idx="2">
+            <a:schemeClr val="accent1"/>
+          </a:effectRef>
+          <a:fontRef idx="minor">
+            <a:schemeClr val="lt1"/>
+          </a:fontRef>
+        </p:style>
+        <p:txBody>
+          <a:bodyPr rtlCol="0" anchor="ctr"/>
+          <a:lstStyle/>
+          <a:p>
+            <a:pPr algn="ctr"/>
+          </a:p>
+        </p:txBody>
+      </p:sp>
+      <p:sp>
+        <p:nvSpPr>
+          <p:cNvPr id="9" name="TextBox 8"/>
           <p:cNvSpPr txBox="1"/>
           <p:nvPr/>
         </p:nvSpPr>
         <p:spPr>
           <a:xfrm>
-            <a:off x="594360" y="2194560"/>
-            <a:ext cx="10972800" cy="731520"/>
+            <a:off x="640080" y="1691640"/>
+            <a:ext cx="2926080" cy="457200"/>
           </a:xfrm>
           <a:prstGeom prst="rect">
             <a:avLst/>
@@ -8545,9 +11442,9 @@
           <a:p>
             <a:pPr algn="l"/>
             <a:r>
-              <a:rPr sz="1800" b="1" i="0">
-                <a:solidFill>
-                  <a:srgbClr val="0A0F1E"/>
+              <a:rPr sz="1400" b="1" i="0">
+                <a:solidFill>
+                  <a:srgbClr val="0B3D91"/>
                 </a:solidFill>
                 <a:latin typeface="Microsoft YaHei"/>
               </a:rPr>
@@ -8558,14 +11455,62 @@
       </p:sp>
       <p:sp>
         <p:nvSpPr>
-          <p:cNvPr id="9" name="TextBox 8"/>
+          <p:cNvPr id="10" name="Rounded Rectangle 9"/>
+          <p:cNvSpPr/>
+          <p:nvPr/>
+        </p:nvSpPr>
+        <p:spPr>
+          <a:xfrm>
+            <a:off x="384047" y="2029967"/>
+            <a:ext cx="5861304" cy="2157984"/>
+          </a:xfrm>
+          <a:prstGeom prst="roundRect">
+            <a:avLst>
+              <a:gd name="adj" fmla="val 8000"/>
+            </a:avLst>
+          </a:prstGeom>
+          <a:solidFill>
+            <a:srgbClr val="EEF3FF"/>
+          </a:solidFill>
+          <a:ln w="9525">
+            <a:solidFill>
+              <a:srgbClr val="D6E4FF"/>
+            </a:solidFill>
+          </a:ln>
+          <a:effectLst/>
+        </p:spPr>
+        <p:style>
+          <a:lnRef idx="1">
+            <a:schemeClr val="accent1"/>
+          </a:lnRef>
+          <a:fillRef idx="3">
+            <a:schemeClr val="accent1"/>
+          </a:fillRef>
+          <a:effectRef idx="2">
+            <a:schemeClr val="accent1"/>
+          </a:effectRef>
+          <a:fontRef idx="minor">
+            <a:schemeClr val="lt1"/>
+          </a:fontRef>
+        </p:style>
+        <p:txBody>
+          <a:bodyPr rtlCol="0" anchor="ctr"/>
+          <a:lstStyle/>
+          <a:p>
+            <a:pPr algn="ctr"/>
+          </a:p>
+        </p:txBody>
+      </p:sp>
+      <p:sp>
+        <p:nvSpPr>
+          <p:cNvPr id="11" name="TextBox 10"/>
           <p:cNvSpPr txBox="1"/>
           <p:nvPr/>
         </p:nvSpPr>
         <p:spPr>
           <a:xfrm>
-            <a:off x="594360" y="3108960"/>
-            <a:ext cx="10972800" cy="594360"/>
+            <a:off x="640080" y="2286000"/>
+            <a:ext cx="5349240" cy="1645920"/>
           </a:xfrm>
           <a:prstGeom prst="rect">
             <a:avLst/>
@@ -8593,14 +11538,62 @@
       </p:sp>
       <p:sp>
         <p:nvSpPr>
-          <p:cNvPr id="10" name="TextBox 9"/>
+          <p:cNvPr id="12" name="Rounded Rectangle 11"/>
+          <p:cNvSpPr/>
+          <p:nvPr/>
+        </p:nvSpPr>
+        <p:spPr>
+          <a:xfrm>
+            <a:off x="6053327" y="2029967"/>
+            <a:ext cx="5861304" cy="2157984"/>
+          </a:xfrm>
+          <a:prstGeom prst="roundRect">
+            <a:avLst>
+              <a:gd name="adj" fmla="val 8000"/>
+            </a:avLst>
+          </a:prstGeom>
+          <a:solidFill>
+            <a:srgbClr val="EEF3FF"/>
+          </a:solidFill>
+          <a:ln w="9525">
+            <a:solidFill>
+              <a:srgbClr val="D6E4FF"/>
+            </a:solidFill>
+          </a:ln>
+          <a:effectLst/>
+        </p:spPr>
+        <p:style>
+          <a:lnRef idx="1">
+            <a:schemeClr val="accent1"/>
+          </a:lnRef>
+          <a:fillRef idx="3">
+            <a:schemeClr val="accent1"/>
+          </a:fillRef>
+          <a:effectRef idx="2">
+            <a:schemeClr val="accent1"/>
+          </a:effectRef>
+          <a:fontRef idx="minor">
+            <a:schemeClr val="lt1"/>
+          </a:fontRef>
+        </p:style>
+        <p:txBody>
+          <a:bodyPr rtlCol="0" anchor="ctr"/>
+          <a:lstStyle/>
+          <a:p>
+            <a:pPr algn="ctr"/>
+          </a:p>
+        </p:txBody>
+      </p:sp>
+      <p:sp>
+        <p:nvSpPr>
+          <p:cNvPr id="13" name="TextBox 12"/>
           <p:cNvSpPr txBox="1"/>
           <p:nvPr/>
         </p:nvSpPr>
         <p:spPr>
           <a:xfrm>
-            <a:off x="594360" y="3822191"/>
-            <a:ext cx="10972800" cy="594360"/>
+            <a:off x="6309359" y="2286000"/>
+            <a:ext cx="5349240" cy="1645920"/>
           </a:xfrm>
           <a:prstGeom prst="rect">
             <a:avLst/>
@@ -8628,14 +11621,62 @@
       </p:sp>
       <p:sp>
         <p:nvSpPr>
-          <p:cNvPr id="11" name="TextBox 10"/>
+          <p:cNvPr id="14" name="Rounded Rectangle 13"/>
+          <p:cNvSpPr/>
+          <p:nvPr/>
+        </p:nvSpPr>
+        <p:spPr>
+          <a:xfrm>
+            <a:off x="384047" y="3995928"/>
+            <a:ext cx="5861304" cy="2157984"/>
+          </a:xfrm>
+          <a:prstGeom prst="roundRect">
+            <a:avLst>
+              <a:gd name="adj" fmla="val 8000"/>
+            </a:avLst>
+          </a:prstGeom>
+          <a:solidFill>
+            <a:srgbClr val="EEF3FF"/>
+          </a:solidFill>
+          <a:ln w="9525">
+            <a:solidFill>
+              <a:srgbClr val="D6E4FF"/>
+            </a:solidFill>
+          </a:ln>
+          <a:effectLst/>
+        </p:spPr>
+        <p:style>
+          <a:lnRef idx="1">
+            <a:schemeClr val="accent1"/>
+          </a:lnRef>
+          <a:fillRef idx="3">
+            <a:schemeClr val="accent1"/>
+          </a:fillRef>
+          <a:effectRef idx="2">
+            <a:schemeClr val="accent1"/>
+          </a:effectRef>
+          <a:fontRef idx="minor">
+            <a:schemeClr val="lt1"/>
+          </a:fontRef>
+        </p:style>
+        <p:txBody>
+          <a:bodyPr rtlCol="0" anchor="ctr"/>
+          <a:lstStyle/>
+          <a:p>
+            <a:pPr algn="ctr"/>
+          </a:p>
+        </p:txBody>
+      </p:sp>
+      <p:sp>
+        <p:nvSpPr>
+          <p:cNvPr id="15" name="TextBox 14"/>
           <p:cNvSpPr txBox="1"/>
           <p:nvPr/>
         </p:nvSpPr>
         <p:spPr>
           <a:xfrm>
-            <a:off x="594360" y="4535424"/>
-            <a:ext cx="10972800" cy="594360"/>
+            <a:off x="640080" y="4251960"/>
+            <a:ext cx="5349240" cy="1645920"/>
           </a:xfrm>
           <a:prstGeom prst="rect">
             <a:avLst/>
@@ -8663,14 +11704,62 @@
       </p:sp>
       <p:sp>
         <p:nvSpPr>
-          <p:cNvPr id="12" name="TextBox 11"/>
+          <p:cNvPr id="16" name="Rounded Rectangle 15"/>
+          <p:cNvSpPr/>
+          <p:nvPr/>
+        </p:nvSpPr>
+        <p:spPr>
+          <a:xfrm>
+            <a:off x="6053327" y="3995928"/>
+            <a:ext cx="5861304" cy="2157984"/>
+          </a:xfrm>
+          <a:prstGeom prst="roundRect">
+            <a:avLst>
+              <a:gd name="adj" fmla="val 8000"/>
+            </a:avLst>
+          </a:prstGeom>
+          <a:solidFill>
+            <a:srgbClr val="EEF3FF"/>
+          </a:solidFill>
+          <a:ln w="9525">
+            <a:solidFill>
+              <a:srgbClr val="D6E4FF"/>
+            </a:solidFill>
+          </a:ln>
+          <a:effectLst/>
+        </p:spPr>
+        <p:style>
+          <a:lnRef idx="1">
+            <a:schemeClr val="accent1"/>
+          </a:lnRef>
+          <a:fillRef idx="3">
+            <a:schemeClr val="accent1"/>
+          </a:fillRef>
+          <a:effectRef idx="2">
+            <a:schemeClr val="accent1"/>
+          </a:effectRef>
+          <a:fontRef idx="minor">
+            <a:schemeClr val="lt1"/>
+          </a:fontRef>
+        </p:style>
+        <p:txBody>
+          <a:bodyPr rtlCol="0" anchor="ctr"/>
+          <a:lstStyle/>
+          <a:p>
+            <a:pPr algn="ctr"/>
+          </a:p>
+        </p:txBody>
+      </p:sp>
+      <p:sp>
+        <p:nvSpPr>
+          <p:cNvPr id="17" name="TextBox 16"/>
           <p:cNvSpPr txBox="1"/>
           <p:nvPr/>
         </p:nvSpPr>
         <p:spPr>
           <a:xfrm>
-            <a:off x="594360" y="5248656"/>
-            <a:ext cx="10972800" cy="594360"/>
+            <a:off x="6309359" y="4251960"/>
+            <a:ext cx="5349240" cy="1645920"/>
           </a:xfrm>
           <a:prstGeom prst="rect">
             <a:avLst/>
@@ -8731,7 +11820,7 @@
         <p:spPr>
           <a:xfrm>
             <a:off x="0" y="0"/>
-            <a:ext cx="118872" cy="6858000"/>
+            <a:ext cx="12191695" cy="109728"/>
           </a:xfrm>
           <a:prstGeom prst="rect">
             <a:avLst/>
@@ -8768,121 +11857,16 @@
       </p:sp>
       <p:sp>
         <p:nvSpPr>
-          <p:cNvPr id="3" name="TextBox 2"/>
-          <p:cNvSpPr txBox="1"/>
-          <p:nvPr/>
-        </p:nvSpPr>
-        <p:spPr>
-          <a:xfrm>
-            <a:off x="457200" y="6419088"/>
-            <a:ext cx="3657600" cy="274320"/>
-          </a:xfrm>
-          <a:prstGeom prst="rect">
-            <a:avLst/>
-          </a:prstGeom>
-          <a:noFill/>
-        </p:spPr>
-        <p:txBody>
-          <a:bodyPr wrap="none">
-            <a:spAutoFit/>
-          </a:bodyPr>
-          <a:lstStyle/>
-          <a:p>
-            <a:pPr algn="l"/>
-            <a:r>
-              <a:rPr sz="900" b="0">
-                <a:solidFill>
-                  <a:srgbClr val="5A6478"/>
-                </a:solidFill>
-                <a:latin typeface="Microsoft YaHei"/>
-              </a:rPr>
-              <a:t>LESSONFORGE 微课</a:t>
-            </a:r>
-          </a:p>
-        </p:txBody>
-      </p:sp>
-      <p:sp>
-        <p:nvSpPr>
-          <p:cNvPr id="4" name="TextBox 3"/>
-          <p:cNvSpPr txBox="1"/>
-          <p:nvPr/>
-        </p:nvSpPr>
-        <p:spPr>
-          <a:xfrm>
-            <a:off x="10607040" y="6419088"/>
-            <a:ext cx="1097280" cy="274320"/>
-          </a:xfrm>
-          <a:prstGeom prst="rect">
-            <a:avLst/>
-          </a:prstGeom>
-          <a:noFill/>
-        </p:spPr>
-        <p:txBody>
-          <a:bodyPr wrap="none">
-            <a:spAutoFit/>
-          </a:bodyPr>
-          <a:lstStyle/>
-          <a:p>
-            <a:pPr algn="r"/>
-            <a:r>
-              <a:rPr sz="1000" b="1">
-                <a:solidFill>
-                  <a:srgbClr val="5A6478"/>
-                </a:solidFill>
-                <a:latin typeface="Microsoft YaHei"/>
-              </a:rPr>
-              <a:t>09</a:t>
-            </a:r>
-          </a:p>
-        </p:txBody>
-      </p:sp>
-      <p:sp>
-        <p:nvSpPr>
-          <p:cNvPr id="5" name="TextBox 4"/>
-          <p:cNvSpPr txBox="1"/>
-          <p:nvPr/>
-        </p:nvSpPr>
-        <p:spPr>
-          <a:xfrm>
-            <a:off x="548640" y="457200"/>
-            <a:ext cx="11064240" cy="777240"/>
-          </a:xfrm>
-          <a:prstGeom prst="rect">
-            <a:avLst/>
-          </a:prstGeom>
-          <a:noFill/>
-        </p:spPr>
-        <p:txBody>
-          <a:bodyPr wrap="square" lIns="18288" rIns="18288" tIns="9144" bIns="9144" anchor="ctr">
-            <a:spAutoFit/>
-          </a:bodyPr>
-          <a:lstStyle/>
-          <a:p>
-            <a:pPr algn="l"/>
-            <a:r>
-              <a:rPr sz="2800" b="1" i="0">
-                <a:solidFill>
-                  <a:srgbClr val="0B3D91"/>
-                </a:solidFill>
-                <a:latin typeface="Microsoft YaHei"/>
-              </a:rPr>
-              <a:t/>
-            </a:r>
-          </a:p>
-        </p:txBody>
-      </p:sp>
-      <p:sp>
-        <p:nvSpPr>
-          <p:cNvPr id="6" name="Rectangle 5"/>
+          <p:cNvPr id="3" name="Oval 2"/>
           <p:cNvSpPr/>
           <p:nvPr/>
         </p:nvSpPr>
         <p:spPr>
           <a:xfrm>
-            <a:off x="566928" y="1298448"/>
-            <a:ext cx="1234440" cy="82296"/>
-          </a:xfrm>
-          <a:prstGeom prst="rect">
+            <a:off x="11521440" y="320040"/>
+            <a:ext cx="457200" cy="457200"/>
+          </a:xfrm>
+          <a:prstGeom prst="ellipse">
             <a:avLst/>
           </a:prstGeom>
           <a:solidFill>
@@ -8917,14 +11901,84 @@
       </p:sp>
       <p:sp>
         <p:nvSpPr>
-          <p:cNvPr id="7" name="TextBox 6"/>
+          <p:cNvPr id="4" name="TextBox 3"/>
           <p:cNvSpPr txBox="1"/>
           <p:nvPr/>
         </p:nvSpPr>
         <p:spPr>
           <a:xfrm>
-            <a:off x="594360" y="1645920"/>
-            <a:ext cx="3200400" cy="457200"/>
+            <a:off x="457200" y="6419088"/>
+            <a:ext cx="3657600" cy="274320"/>
+          </a:xfrm>
+          <a:prstGeom prst="rect">
+            <a:avLst/>
+          </a:prstGeom>
+          <a:noFill/>
+        </p:spPr>
+        <p:txBody>
+          <a:bodyPr wrap="none">
+            <a:spAutoFit/>
+          </a:bodyPr>
+          <a:lstStyle/>
+          <a:p>
+            <a:pPr algn="l"/>
+            <a:r>
+              <a:rPr sz="900" b="0">
+                <a:solidFill>
+                  <a:srgbClr val="5A6478"/>
+                </a:solidFill>
+                <a:latin typeface="Microsoft YaHei"/>
+              </a:rPr>
+              <a:t>LESSONFORGE 微课</a:t>
+            </a:r>
+          </a:p>
+        </p:txBody>
+      </p:sp>
+      <p:sp>
+        <p:nvSpPr>
+          <p:cNvPr id="5" name="TextBox 4"/>
+          <p:cNvSpPr txBox="1"/>
+          <p:nvPr/>
+        </p:nvSpPr>
+        <p:spPr>
+          <a:xfrm>
+            <a:off x="10607040" y="6419088"/>
+            <a:ext cx="1097280" cy="274320"/>
+          </a:xfrm>
+          <a:prstGeom prst="rect">
+            <a:avLst/>
+          </a:prstGeom>
+          <a:noFill/>
+        </p:spPr>
+        <p:txBody>
+          <a:bodyPr wrap="none">
+            <a:spAutoFit/>
+          </a:bodyPr>
+          <a:lstStyle/>
+          <a:p>
+            <a:pPr algn="r"/>
+            <a:r>
+              <a:rPr sz="1000" b="1">
+                <a:solidFill>
+                  <a:srgbClr val="5A6478"/>
+                </a:solidFill>
+                <a:latin typeface="Microsoft YaHei"/>
+              </a:rPr>
+              <a:t>09</a:t>
+            </a:r>
+          </a:p>
+        </p:txBody>
+      </p:sp>
+      <p:sp>
+        <p:nvSpPr>
+          <p:cNvPr id="6" name="TextBox 5"/>
+          <p:cNvSpPr txBox="1"/>
+          <p:nvPr/>
+        </p:nvSpPr>
+        <p:spPr>
+          <a:xfrm>
+            <a:off x="640080" y="548640"/>
+            <a:ext cx="10607040" cy="731520"/>
           </a:xfrm>
           <a:prstGeom prst="rect">
             <a:avLst/>
@@ -8939,7 +11993,7 @@
           <a:p>
             <a:pPr algn="l"/>
             <a:r>
-              <a:rPr sz="1400" b="1" i="0">
+              <a:rPr sz="2800" b="1" i="0">
                 <a:solidFill>
                   <a:srgbClr val="0B3D91"/>
                 </a:solidFill>
@@ -8952,14 +12006,106 @@
       </p:sp>
       <p:sp>
         <p:nvSpPr>
-          <p:cNvPr id="8" name="TextBox 7"/>
+          <p:cNvPr id="7" name="Rectangle 6"/>
+          <p:cNvSpPr/>
+          <p:nvPr/>
+        </p:nvSpPr>
+        <p:spPr>
+          <a:xfrm>
+            <a:off x="667512" y="1353312"/>
+            <a:ext cx="1234440" cy="73152"/>
+          </a:xfrm>
+          <a:prstGeom prst="rect">
+            <a:avLst/>
+          </a:prstGeom>
+          <a:solidFill>
+            <a:srgbClr val="D6E4FF"/>
+          </a:solidFill>
+          <a:ln>
+            <a:noFill/>
+          </a:ln>
+          <a:effectLst/>
+        </p:spPr>
+        <p:style>
+          <a:lnRef idx="1">
+            <a:schemeClr val="accent1"/>
+          </a:lnRef>
+          <a:fillRef idx="3">
+            <a:schemeClr val="accent1"/>
+          </a:fillRef>
+          <a:effectRef idx="2">
+            <a:schemeClr val="accent1"/>
+          </a:effectRef>
+          <a:fontRef idx="minor">
+            <a:schemeClr val="lt1"/>
+          </a:fontRef>
+        </p:style>
+        <p:txBody>
+          <a:bodyPr rtlCol="0" anchor="ctr"/>
+          <a:lstStyle/>
+          <a:p>
+            <a:pPr algn="ctr"/>
+          </a:p>
+        </p:txBody>
+      </p:sp>
+      <p:sp>
+        <p:nvSpPr>
+          <p:cNvPr id="8" name="Rounded Rectangle 7"/>
+          <p:cNvSpPr/>
+          <p:nvPr/>
+        </p:nvSpPr>
+        <p:spPr>
+          <a:xfrm>
+            <a:off x="384047" y="1435608"/>
+            <a:ext cx="3438144" cy="969264"/>
+          </a:xfrm>
+          <a:prstGeom prst="roundRect">
+            <a:avLst>
+              <a:gd name="adj" fmla="val 8000"/>
+            </a:avLst>
+          </a:prstGeom>
+          <a:solidFill>
+            <a:srgbClr val="EEF3FF"/>
+          </a:solidFill>
+          <a:ln w="9525">
+            <a:solidFill>
+              <a:srgbClr val="D6E4FF"/>
+            </a:solidFill>
+          </a:ln>
+          <a:effectLst/>
+        </p:spPr>
+        <p:style>
+          <a:lnRef idx="1">
+            <a:schemeClr val="accent1"/>
+          </a:lnRef>
+          <a:fillRef idx="3">
+            <a:schemeClr val="accent1"/>
+          </a:fillRef>
+          <a:effectRef idx="2">
+            <a:schemeClr val="accent1"/>
+          </a:effectRef>
+          <a:fontRef idx="minor">
+            <a:schemeClr val="lt1"/>
+          </a:fontRef>
+        </p:style>
+        <p:txBody>
+          <a:bodyPr rtlCol="0" anchor="ctr"/>
+          <a:lstStyle/>
+          <a:p>
+            <a:pPr algn="ctr"/>
+          </a:p>
+        </p:txBody>
+      </p:sp>
+      <p:sp>
+        <p:nvSpPr>
+          <p:cNvPr id="9" name="TextBox 8"/>
           <p:cNvSpPr txBox="1"/>
           <p:nvPr/>
         </p:nvSpPr>
         <p:spPr>
           <a:xfrm>
-            <a:off x="594360" y="2194560"/>
-            <a:ext cx="10972800" cy="731520"/>
+            <a:off x="640080" y="1691640"/>
+            <a:ext cx="2926080" cy="457200"/>
           </a:xfrm>
           <a:prstGeom prst="rect">
             <a:avLst/>
@@ -8974,9 +12120,9 @@
           <a:p>
             <a:pPr algn="l"/>
             <a:r>
-              <a:rPr sz="1800" b="1" i="0">
-                <a:solidFill>
-                  <a:srgbClr val="0A0F1E"/>
+              <a:rPr sz="1400" b="1" i="0">
+                <a:solidFill>
+                  <a:srgbClr val="0B3D91"/>
                 </a:solidFill>
                 <a:latin typeface="Microsoft YaHei"/>
               </a:rPr>
@@ -8987,14 +12133,62 @@
       </p:sp>
       <p:sp>
         <p:nvSpPr>
-          <p:cNvPr id="9" name="TextBox 8"/>
+          <p:cNvPr id="10" name="Rounded Rectangle 9"/>
+          <p:cNvSpPr/>
+          <p:nvPr/>
+        </p:nvSpPr>
+        <p:spPr>
+          <a:xfrm>
+            <a:off x="384047" y="2029967"/>
+            <a:ext cx="5861304" cy="2157984"/>
+          </a:xfrm>
+          <a:prstGeom prst="roundRect">
+            <a:avLst>
+              <a:gd name="adj" fmla="val 8000"/>
+            </a:avLst>
+          </a:prstGeom>
+          <a:solidFill>
+            <a:srgbClr val="EEF3FF"/>
+          </a:solidFill>
+          <a:ln w="9525">
+            <a:solidFill>
+              <a:srgbClr val="D6E4FF"/>
+            </a:solidFill>
+          </a:ln>
+          <a:effectLst/>
+        </p:spPr>
+        <p:style>
+          <a:lnRef idx="1">
+            <a:schemeClr val="accent1"/>
+          </a:lnRef>
+          <a:fillRef idx="3">
+            <a:schemeClr val="accent1"/>
+          </a:fillRef>
+          <a:effectRef idx="2">
+            <a:schemeClr val="accent1"/>
+          </a:effectRef>
+          <a:fontRef idx="minor">
+            <a:schemeClr val="lt1"/>
+          </a:fontRef>
+        </p:style>
+        <p:txBody>
+          <a:bodyPr rtlCol="0" anchor="ctr"/>
+          <a:lstStyle/>
+          <a:p>
+            <a:pPr algn="ctr"/>
+          </a:p>
+        </p:txBody>
+      </p:sp>
+      <p:sp>
+        <p:nvSpPr>
+          <p:cNvPr id="11" name="TextBox 10"/>
           <p:cNvSpPr txBox="1"/>
           <p:nvPr/>
         </p:nvSpPr>
         <p:spPr>
           <a:xfrm>
-            <a:off x="594360" y="3108960"/>
-            <a:ext cx="10972800" cy="594360"/>
+            <a:off x="640080" y="2286000"/>
+            <a:ext cx="5349240" cy="1645920"/>
           </a:xfrm>
           <a:prstGeom prst="rect">
             <a:avLst/>
@@ -9022,14 +12216,62 @@
       </p:sp>
       <p:sp>
         <p:nvSpPr>
-          <p:cNvPr id="10" name="TextBox 9"/>
+          <p:cNvPr id="12" name="Rounded Rectangle 11"/>
+          <p:cNvSpPr/>
+          <p:nvPr/>
+        </p:nvSpPr>
+        <p:spPr>
+          <a:xfrm>
+            <a:off x="6053327" y="2029967"/>
+            <a:ext cx="5861304" cy="2157984"/>
+          </a:xfrm>
+          <a:prstGeom prst="roundRect">
+            <a:avLst>
+              <a:gd name="adj" fmla="val 8000"/>
+            </a:avLst>
+          </a:prstGeom>
+          <a:solidFill>
+            <a:srgbClr val="EEF3FF"/>
+          </a:solidFill>
+          <a:ln w="9525">
+            <a:solidFill>
+              <a:srgbClr val="D6E4FF"/>
+            </a:solidFill>
+          </a:ln>
+          <a:effectLst/>
+        </p:spPr>
+        <p:style>
+          <a:lnRef idx="1">
+            <a:schemeClr val="accent1"/>
+          </a:lnRef>
+          <a:fillRef idx="3">
+            <a:schemeClr val="accent1"/>
+          </a:fillRef>
+          <a:effectRef idx="2">
+            <a:schemeClr val="accent1"/>
+          </a:effectRef>
+          <a:fontRef idx="minor">
+            <a:schemeClr val="lt1"/>
+          </a:fontRef>
+        </p:style>
+        <p:txBody>
+          <a:bodyPr rtlCol="0" anchor="ctr"/>
+          <a:lstStyle/>
+          <a:p>
+            <a:pPr algn="ctr"/>
+          </a:p>
+        </p:txBody>
+      </p:sp>
+      <p:sp>
+        <p:nvSpPr>
+          <p:cNvPr id="13" name="TextBox 12"/>
           <p:cNvSpPr txBox="1"/>
           <p:nvPr/>
         </p:nvSpPr>
         <p:spPr>
           <a:xfrm>
-            <a:off x="594360" y="3822191"/>
-            <a:ext cx="10972800" cy="594360"/>
+            <a:off x="6309359" y="2286000"/>
+            <a:ext cx="5349240" cy="1645920"/>
           </a:xfrm>
           <a:prstGeom prst="rect">
             <a:avLst/>
@@ -9057,14 +12299,62 @@
       </p:sp>
       <p:sp>
         <p:nvSpPr>
-          <p:cNvPr id="11" name="TextBox 10"/>
+          <p:cNvPr id="14" name="Rounded Rectangle 13"/>
+          <p:cNvSpPr/>
+          <p:nvPr/>
+        </p:nvSpPr>
+        <p:spPr>
+          <a:xfrm>
+            <a:off x="384047" y="3995928"/>
+            <a:ext cx="5861304" cy="2157984"/>
+          </a:xfrm>
+          <a:prstGeom prst="roundRect">
+            <a:avLst>
+              <a:gd name="adj" fmla="val 8000"/>
+            </a:avLst>
+          </a:prstGeom>
+          <a:solidFill>
+            <a:srgbClr val="EEF3FF"/>
+          </a:solidFill>
+          <a:ln w="9525">
+            <a:solidFill>
+              <a:srgbClr val="D6E4FF"/>
+            </a:solidFill>
+          </a:ln>
+          <a:effectLst/>
+        </p:spPr>
+        <p:style>
+          <a:lnRef idx="1">
+            <a:schemeClr val="accent1"/>
+          </a:lnRef>
+          <a:fillRef idx="3">
+            <a:schemeClr val="accent1"/>
+          </a:fillRef>
+          <a:effectRef idx="2">
+            <a:schemeClr val="accent1"/>
+          </a:effectRef>
+          <a:fontRef idx="minor">
+            <a:schemeClr val="lt1"/>
+          </a:fontRef>
+        </p:style>
+        <p:txBody>
+          <a:bodyPr rtlCol="0" anchor="ctr"/>
+          <a:lstStyle/>
+          <a:p>
+            <a:pPr algn="ctr"/>
+          </a:p>
+        </p:txBody>
+      </p:sp>
+      <p:sp>
+        <p:nvSpPr>
+          <p:cNvPr id="15" name="TextBox 14"/>
           <p:cNvSpPr txBox="1"/>
           <p:nvPr/>
         </p:nvSpPr>
         <p:spPr>
           <a:xfrm>
-            <a:off x="594360" y="4535424"/>
-            <a:ext cx="10972800" cy="594360"/>
+            <a:off x="640080" y="4251960"/>
+            <a:ext cx="5349240" cy="1645920"/>
           </a:xfrm>
           <a:prstGeom prst="rect">
             <a:avLst/>
@@ -9092,14 +12382,62 @@
       </p:sp>
       <p:sp>
         <p:nvSpPr>
-          <p:cNvPr id="12" name="TextBox 11"/>
+          <p:cNvPr id="16" name="Rounded Rectangle 15"/>
+          <p:cNvSpPr/>
+          <p:nvPr/>
+        </p:nvSpPr>
+        <p:spPr>
+          <a:xfrm>
+            <a:off x="6053327" y="3995928"/>
+            <a:ext cx="5861304" cy="2157984"/>
+          </a:xfrm>
+          <a:prstGeom prst="roundRect">
+            <a:avLst>
+              <a:gd name="adj" fmla="val 8000"/>
+            </a:avLst>
+          </a:prstGeom>
+          <a:solidFill>
+            <a:srgbClr val="EEF3FF"/>
+          </a:solidFill>
+          <a:ln w="9525">
+            <a:solidFill>
+              <a:srgbClr val="D6E4FF"/>
+            </a:solidFill>
+          </a:ln>
+          <a:effectLst/>
+        </p:spPr>
+        <p:style>
+          <a:lnRef idx="1">
+            <a:schemeClr val="accent1"/>
+          </a:lnRef>
+          <a:fillRef idx="3">
+            <a:schemeClr val="accent1"/>
+          </a:fillRef>
+          <a:effectRef idx="2">
+            <a:schemeClr val="accent1"/>
+          </a:effectRef>
+          <a:fontRef idx="minor">
+            <a:schemeClr val="lt1"/>
+          </a:fontRef>
+        </p:style>
+        <p:txBody>
+          <a:bodyPr rtlCol="0" anchor="ctr"/>
+          <a:lstStyle/>
+          <a:p>
+            <a:pPr algn="ctr"/>
+          </a:p>
+        </p:txBody>
+      </p:sp>
+      <p:sp>
+        <p:nvSpPr>
+          <p:cNvPr id="17" name="TextBox 16"/>
           <p:cNvSpPr txBox="1"/>
           <p:nvPr/>
         </p:nvSpPr>
         <p:spPr>
           <a:xfrm>
-            <a:off x="594360" y="5248656"/>
-            <a:ext cx="10972800" cy="594360"/>
+            <a:off x="6309359" y="4251960"/>
+            <a:ext cx="5349240" cy="1645920"/>
           </a:xfrm>
           <a:prstGeom prst="rect">
             <a:avLst/>
